--- a/기획서/서재 개발 기획.pptx
+++ b/기획서/서재 개발 기획.pptx
@@ -10,14 +10,19 @@
     <p:sldId id="258" r:id="rId4"/>
     <p:sldId id="259" r:id="rId5"/>
     <p:sldId id="260" r:id="rId6"/>
-    <p:sldId id="261" r:id="rId7"/>
-    <p:sldId id="262" r:id="rId8"/>
-    <p:sldId id="263" r:id="rId9"/>
-    <p:sldId id="264" r:id="rId10"/>
-    <p:sldId id="265" r:id="rId11"/>
-    <p:sldId id="266" r:id="rId12"/>
-    <p:sldId id="268" r:id="rId13"/>
-    <p:sldId id="269" r:id="rId14"/>
+    <p:sldId id="270" r:id="rId7"/>
+    <p:sldId id="271" r:id="rId8"/>
+    <p:sldId id="274" r:id="rId9"/>
+    <p:sldId id="261" r:id="rId10"/>
+    <p:sldId id="262" r:id="rId11"/>
+    <p:sldId id="263" r:id="rId12"/>
+    <p:sldId id="264" r:id="rId13"/>
+    <p:sldId id="265" r:id="rId14"/>
+    <p:sldId id="266" r:id="rId15"/>
+    <p:sldId id="272" r:id="rId16"/>
+    <p:sldId id="268" r:id="rId17"/>
+    <p:sldId id="273" r:id="rId18"/>
+    <p:sldId id="269" r:id="rId19"/>
   </p:sldIdLst>
   <p:sldSz cx="12192000" cy="6858000"/>
   <p:notesSz cx="6858000" cy="9144000"/>
@@ -116,6 +121,11 @@
       </a:defRPr>
     </a:lvl9pPr>
   </p:defaultTextStyle>
+  <p:extLst>
+    <p:ext uri="{EFAFB233-063F-42B5-8137-9DF3F51BA10A}">
+      <p15:sldGuideLst xmlns:p15="http://schemas.microsoft.com/office/powerpoint/2012/main"/>
+    </p:ext>
+  </p:extLst>
 </p:presentation>
 </file>
 
@@ -266,7 +276,7 @@
           <a:p>
             <a:fld id="{0F45E6E6-56B5-476E-A835-0EA484E7D0D1}" type="datetimeFigureOut">
               <a:rPr lang="ko-KR" altLang="en-US" smtClean="0"/>
-              <a:t>2025-10-01</a:t>
+              <a:t>2025-10-09</a:t>
             </a:fld>
             <a:endParaRPr lang="ko-KR" altLang="en-US"/>
           </a:p>
@@ -464,7 +474,7 @@
           <a:p>
             <a:fld id="{0F45E6E6-56B5-476E-A835-0EA484E7D0D1}" type="datetimeFigureOut">
               <a:rPr lang="ko-KR" altLang="en-US" smtClean="0"/>
-              <a:t>2025-10-01</a:t>
+              <a:t>2025-10-09</a:t>
             </a:fld>
             <a:endParaRPr lang="ko-KR" altLang="en-US"/>
           </a:p>
@@ -672,7 +682,7 @@
           <a:p>
             <a:fld id="{0F45E6E6-56B5-476E-A835-0EA484E7D0D1}" type="datetimeFigureOut">
               <a:rPr lang="ko-KR" altLang="en-US" smtClean="0"/>
-              <a:t>2025-10-01</a:t>
+              <a:t>2025-10-09</a:t>
             </a:fld>
             <a:endParaRPr lang="ko-KR" altLang="en-US"/>
           </a:p>
@@ -870,7 +880,7 @@
           <a:p>
             <a:fld id="{0F45E6E6-56B5-476E-A835-0EA484E7D0D1}" type="datetimeFigureOut">
               <a:rPr lang="ko-KR" altLang="en-US" smtClean="0"/>
-              <a:t>2025-10-01</a:t>
+              <a:t>2025-10-09</a:t>
             </a:fld>
             <a:endParaRPr lang="ko-KR" altLang="en-US"/>
           </a:p>
@@ -1145,7 +1155,7 @@
           <a:p>
             <a:fld id="{0F45E6E6-56B5-476E-A835-0EA484E7D0D1}" type="datetimeFigureOut">
               <a:rPr lang="ko-KR" altLang="en-US" smtClean="0"/>
-              <a:t>2025-10-01</a:t>
+              <a:t>2025-10-09</a:t>
             </a:fld>
             <a:endParaRPr lang="ko-KR" altLang="en-US"/>
           </a:p>
@@ -1410,7 +1420,7 @@
           <a:p>
             <a:fld id="{0F45E6E6-56B5-476E-A835-0EA484E7D0D1}" type="datetimeFigureOut">
               <a:rPr lang="ko-KR" altLang="en-US" smtClean="0"/>
-              <a:t>2025-10-01</a:t>
+              <a:t>2025-10-09</a:t>
             </a:fld>
             <a:endParaRPr lang="ko-KR" altLang="en-US"/>
           </a:p>
@@ -1822,7 +1832,7 @@
           <a:p>
             <a:fld id="{0F45E6E6-56B5-476E-A835-0EA484E7D0D1}" type="datetimeFigureOut">
               <a:rPr lang="ko-KR" altLang="en-US" smtClean="0"/>
-              <a:t>2025-10-01</a:t>
+              <a:t>2025-10-09</a:t>
             </a:fld>
             <a:endParaRPr lang="ko-KR" altLang="en-US"/>
           </a:p>
@@ -1963,7 +1973,7 @@
           <a:p>
             <a:fld id="{0F45E6E6-56B5-476E-A835-0EA484E7D0D1}" type="datetimeFigureOut">
               <a:rPr lang="ko-KR" altLang="en-US" smtClean="0"/>
-              <a:t>2025-10-01</a:t>
+              <a:t>2025-10-09</a:t>
             </a:fld>
             <a:endParaRPr lang="ko-KR" altLang="en-US"/>
           </a:p>
@@ -2076,7 +2086,7 @@
           <a:p>
             <a:fld id="{0F45E6E6-56B5-476E-A835-0EA484E7D0D1}" type="datetimeFigureOut">
               <a:rPr lang="ko-KR" altLang="en-US" smtClean="0"/>
-              <a:t>2025-10-01</a:t>
+              <a:t>2025-10-09</a:t>
             </a:fld>
             <a:endParaRPr lang="ko-KR" altLang="en-US"/>
           </a:p>
@@ -2387,7 +2397,7 @@
           <a:p>
             <a:fld id="{0F45E6E6-56B5-476E-A835-0EA484E7D0D1}" type="datetimeFigureOut">
               <a:rPr lang="ko-KR" altLang="en-US" smtClean="0"/>
-              <a:t>2025-10-01</a:t>
+              <a:t>2025-10-09</a:t>
             </a:fld>
             <a:endParaRPr lang="ko-KR" altLang="en-US"/>
           </a:p>
@@ -2675,7 +2685,7 @@
           <a:p>
             <a:fld id="{0F45E6E6-56B5-476E-A835-0EA484E7D0D1}" type="datetimeFigureOut">
               <a:rPr lang="ko-KR" altLang="en-US" smtClean="0"/>
-              <a:t>2025-10-01</a:t>
+              <a:t>2025-10-09</a:t>
             </a:fld>
             <a:endParaRPr lang="ko-KR" altLang="en-US"/>
           </a:p>
@@ -2916,7 +2926,7 @@
           <a:p>
             <a:fld id="{0F45E6E6-56B5-476E-A835-0EA484E7D0D1}" type="datetimeFigureOut">
               <a:rPr lang="ko-KR" altLang="en-US" smtClean="0"/>
-              <a:t>2025-10-01</a:t>
+              <a:t>2025-10-09</a:t>
             </a:fld>
             <a:endParaRPr lang="ko-KR" altLang="en-US"/>
           </a:p>
@@ -3460,103 +3470,12 @@
           </a:p>
         </p:txBody>
       </p:sp>
-      <p:sp>
-        <p:nvSpPr>
-          <p:cNvPr id="6" name="TextBox 5">
-            <a:extLst>
-              <a:ext uri="{FF2B5EF4-FFF2-40B4-BE49-F238E27FC236}">
-                <a16:creationId xmlns:a16="http://schemas.microsoft.com/office/drawing/2014/main" id="{8D412666-212D-4CB7-944D-A2F46FAD81FE}"/>
-              </a:ext>
-            </a:extLst>
-          </p:cNvPr>
-          <p:cNvSpPr txBox="1"/>
-          <p:nvPr/>
-        </p:nvSpPr>
-        <p:spPr>
-          <a:xfrm>
-            <a:off x="5239650" y="2553535"/>
-            <a:ext cx="5987332" cy="3139321"/>
-          </a:xfrm>
-          <a:prstGeom prst="rect">
-            <a:avLst/>
-          </a:prstGeom>
-          <a:noFill/>
-        </p:spPr>
-        <p:txBody>
-          <a:bodyPr wrap="square" rtlCol="0">
-            <a:spAutoFit/>
-          </a:bodyPr>
-          <a:lstStyle/>
-          <a:p>
-            <a:r>
-              <a:rPr lang="ko-KR" altLang="en-US" dirty="0"/>
-              <a:t>데스크 클릭 후 패널  </a:t>
-            </a:r>
-            <a:endParaRPr lang="en-US" altLang="ko-KR" dirty="0"/>
-          </a:p>
-          <a:p>
-            <a:endParaRPr lang="en-US" altLang="ko-KR" dirty="0"/>
-          </a:p>
-          <a:p>
-            <a:r>
-              <a:rPr lang="ko-KR" altLang="en-US" dirty="0"/>
-              <a:t>패널을 활성화 한 후 일기장과 퍼즐로 사용할 암호문의 자식 오브젝트들을 패널의 활성화와 같이 활성화</a:t>
-            </a:r>
-            <a:endParaRPr lang="en-US" altLang="ko-KR" dirty="0"/>
-          </a:p>
-          <a:p>
-            <a:endParaRPr lang="en-US" altLang="ko-KR" dirty="0"/>
-          </a:p>
-          <a:p>
-            <a:endParaRPr lang="en-US" altLang="ko-KR" dirty="0"/>
-          </a:p>
-          <a:p>
-            <a:r>
-              <a:rPr lang="ko-KR" altLang="en-US" dirty="0"/>
-              <a:t>예외 처리 </a:t>
-            </a:r>
-            <a:r>
-              <a:rPr lang="en-US" altLang="ko-KR" dirty="0"/>
-              <a:t>: </a:t>
-            </a:r>
-            <a:r>
-              <a:rPr lang="ko-KR" altLang="en-US" dirty="0"/>
-              <a:t>백스페이스와 마찬가지로 패널을 활성화 했을 경우 패널의 자식 오브젝트나 이미지가 아닌 이상 또한 데스크를 활성화 했을 때의 퍼즐이나 일기장을 제외한 다른 </a:t>
-            </a:r>
-            <a:r>
-              <a:rPr lang="ko-KR" altLang="en-US" dirty="0" err="1"/>
-              <a:t>오브젝트들와의</a:t>
-            </a:r>
-            <a:r>
-              <a:rPr lang="ko-KR" altLang="en-US" dirty="0"/>
-              <a:t> 상호작용은 </a:t>
-            </a:r>
-            <a:r>
-              <a:rPr lang="en-US" altLang="ko-KR" dirty="0"/>
-              <a:t>false</a:t>
-            </a:r>
-            <a:r>
-              <a:rPr lang="ko-KR" altLang="en-US" dirty="0"/>
-              <a:t>상태 상호 작용 이후 </a:t>
-            </a:r>
-            <a:r>
-              <a:rPr lang="en-US" altLang="ko-KR" dirty="0"/>
-              <a:t>true </a:t>
-            </a:r>
-            <a:r>
-              <a:rPr lang="ko-KR" altLang="en-US" dirty="0"/>
-              <a:t>상태로 전환하여 상호작용 가능하도록</a:t>
-            </a:r>
-            <a:endParaRPr lang="en-US" altLang="ko-KR" dirty="0"/>
-          </a:p>
-        </p:txBody>
-      </p:sp>
       <p:pic>
         <p:nvPicPr>
-          <p:cNvPr id="13" name="내용 개체 틀 12">
-            <a:extLst>
-              <a:ext uri="{FF2B5EF4-FFF2-40B4-BE49-F238E27FC236}">
-                <a16:creationId xmlns:a16="http://schemas.microsoft.com/office/drawing/2014/main" id="{E8CB12AD-1E4C-4795-AECA-84BD9FA7CF27}"/>
+          <p:cNvPr id="5" name="내용 개체 틀 4">
+            <a:extLst>
+              <a:ext uri="{FF2B5EF4-FFF2-40B4-BE49-F238E27FC236}">
+                <a16:creationId xmlns:a16="http://schemas.microsoft.com/office/drawing/2014/main" id="{B32C2D8B-EB5C-4880-A2F5-4687A9F9B249}"/>
               </a:ext>
             </a:extLst>
           </p:cNvPr>
@@ -3581,15 +3500,394 @@
         </p:blipFill>
         <p:spPr>
           <a:xfrm>
-            <a:off x="583010" y="2162118"/>
-            <a:ext cx="4163919" cy="3601612"/>
+            <a:off x="375489" y="2573048"/>
+            <a:ext cx="4218069" cy="2372664"/>
           </a:xfrm>
         </p:spPr>
       </p:pic>
+      <p:sp>
+        <p:nvSpPr>
+          <p:cNvPr id="6" name="TextBox 5">
+            <a:extLst>
+              <a:ext uri="{FF2B5EF4-FFF2-40B4-BE49-F238E27FC236}">
+                <a16:creationId xmlns:a16="http://schemas.microsoft.com/office/drawing/2014/main" id="{8D412666-212D-4CB7-944D-A2F46FAD81FE}"/>
+              </a:ext>
+            </a:extLst>
+          </p:cNvPr>
+          <p:cNvSpPr txBox="1"/>
+          <p:nvPr/>
+        </p:nvSpPr>
+        <p:spPr>
+          <a:xfrm>
+            <a:off x="5239650" y="2553535"/>
+            <a:ext cx="5987332" cy="3416320"/>
+          </a:xfrm>
+          <a:prstGeom prst="rect">
+            <a:avLst/>
+          </a:prstGeom>
+          <a:noFill/>
+        </p:spPr>
+        <p:txBody>
+          <a:bodyPr wrap="square" rtlCol="0">
+            <a:spAutoFit/>
+          </a:bodyPr>
+          <a:lstStyle/>
+          <a:p>
+            <a:endParaRPr lang="en-US" altLang="ko-KR" dirty="0"/>
+          </a:p>
+          <a:p>
+            <a:r>
+              <a:rPr lang="ko-KR" altLang="en-US" dirty="0"/>
+              <a:t>왼쪽 위의 </a:t>
+            </a:r>
+            <a:r>
+              <a:rPr lang="ko-KR" altLang="en-US" dirty="0" err="1"/>
+              <a:t>백스패이스</a:t>
+            </a:r>
+            <a:r>
+              <a:rPr lang="ko-KR" altLang="en-US" dirty="0"/>
+              <a:t> </a:t>
+            </a:r>
+            <a:endParaRPr lang="en-US" altLang="ko-KR" dirty="0"/>
+          </a:p>
+          <a:p>
+            <a:r>
+              <a:rPr lang="en-US" altLang="ko-KR" dirty="0"/>
+              <a:t>-&gt; </a:t>
+            </a:r>
+            <a:r>
+              <a:rPr lang="ko-KR" altLang="en-US" dirty="0"/>
+              <a:t>클릭되었을 경우 메뉴를 띄우며 </a:t>
+            </a:r>
+            <a:endParaRPr lang="en-US" altLang="ko-KR" dirty="0"/>
+          </a:p>
+          <a:p>
+            <a:r>
+              <a:rPr lang="en-US" altLang="ko-KR" dirty="0"/>
+              <a:t>-&gt; </a:t>
+            </a:r>
+            <a:r>
+              <a:rPr lang="ko-KR" altLang="en-US" dirty="0"/>
+              <a:t>나간다 클릭 </a:t>
+            </a:r>
+            <a:r>
+              <a:rPr lang="en-US" altLang="ko-KR" dirty="0"/>
+              <a:t>== </a:t>
+            </a:r>
+            <a:r>
+              <a:rPr lang="ko-KR" altLang="en-US" dirty="0"/>
+              <a:t>복도 씬</a:t>
+            </a:r>
+            <a:r>
+              <a:rPr lang="en-US" altLang="ko-KR" dirty="0"/>
+              <a:t>(HallWayRight2</a:t>
+            </a:r>
+            <a:r>
+              <a:rPr lang="ko-KR" altLang="en-US" dirty="0"/>
+              <a:t>를 로드</a:t>
+            </a:r>
+            <a:r>
+              <a:rPr lang="en-US" altLang="ko-KR" dirty="0"/>
+              <a:t>)</a:t>
+            </a:r>
+          </a:p>
+          <a:p>
+            <a:r>
+              <a:rPr lang="en-US" altLang="ko-KR" dirty="0"/>
+              <a:t>-&gt; </a:t>
+            </a:r>
+            <a:r>
+              <a:rPr lang="ko-KR" altLang="en-US" dirty="0"/>
+              <a:t>나가지 않는다 클릭 </a:t>
+            </a:r>
+            <a:r>
+              <a:rPr lang="en-US" altLang="ko-KR" dirty="0"/>
+              <a:t>== </a:t>
+            </a:r>
+            <a:r>
+              <a:rPr lang="ko-KR" altLang="en-US" dirty="0"/>
+              <a:t>좀 더 둘러 본다는 대사 출력</a:t>
+            </a:r>
+            <a:endParaRPr lang="en-US" altLang="ko-KR" dirty="0"/>
+          </a:p>
+          <a:p>
+            <a:endParaRPr lang="en-US" altLang="ko-KR" dirty="0"/>
+          </a:p>
+          <a:p>
+            <a:r>
+              <a:rPr lang="ko-KR" altLang="en-US" dirty="0"/>
+              <a:t>예외 처리 </a:t>
+            </a:r>
+            <a:endParaRPr lang="en-US" altLang="ko-KR" dirty="0"/>
+          </a:p>
+          <a:p>
+            <a:r>
+              <a:rPr lang="en-US" altLang="ko-KR" dirty="0"/>
+              <a:t>-&gt; </a:t>
+            </a:r>
+            <a:r>
+              <a:rPr lang="ko-KR" altLang="en-US" dirty="0"/>
+              <a:t>백스페이스를 클릭 하고 메뉴가 떴을 경우 다른 오브젝트와의 상호작용은 </a:t>
+            </a:r>
+            <a:r>
+              <a:rPr lang="en-US" altLang="ko-KR" dirty="0"/>
+              <a:t>false</a:t>
+            </a:r>
+            <a:r>
+              <a:rPr lang="ko-KR" altLang="en-US" dirty="0"/>
+              <a:t>로 유지</a:t>
+            </a:r>
+            <a:endParaRPr lang="en-US" altLang="ko-KR" dirty="0"/>
+          </a:p>
+          <a:p>
+            <a:r>
+              <a:rPr lang="en-US" altLang="ko-KR" dirty="0"/>
+              <a:t>[EX]</a:t>
+            </a:r>
+          </a:p>
+          <a:p>
+            <a:r>
+              <a:rPr lang="ko-KR" altLang="en-US" dirty="0"/>
+              <a:t>백스페이스가 클릭 되었을 경우 데스크를 클릭 했을 때 데스크 패널이 뜨지 않도록 하는 것</a:t>
+            </a:r>
+            <a:endParaRPr lang="en-US" altLang="ko-KR" dirty="0"/>
+          </a:p>
+        </p:txBody>
+      </p:sp>
+      <p:sp>
+        <p:nvSpPr>
+          <p:cNvPr id="3" name="직사각형 2">
+            <a:extLst>
+              <a:ext uri="{FF2B5EF4-FFF2-40B4-BE49-F238E27FC236}">
+                <a16:creationId xmlns:a16="http://schemas.microsoft.com/office/drawing/2014/main" id="{D03CD479-77EA-433F-8BBD-CD6DA4F74E29}"/>
+              </a:ext>
+            </a:extLst>
+          </p:cNvPr>
+          <p:cNvSpPr/>
+          <p:nvPr/>
+        </p:nvSpPr>
+        <p:spPr>
+          <a:xfrm>
+            <a:off x="461176" y="2679590"/>
+            <a:ext cx="477078" cy="453224"/>
+          </a:xfrm>
+          <a:prstGeom prst="rect">
+            <a:avLst/>
+          </a:prstGeom>
+        </p:spPr>
+        <p:style>
+          <a:lnRef idx="2">
+            <a:schemeClr val="accent1">
+              <a:shade val="50000"/>
+            </a:schemeClr>
+          </a:lnRef>
+          <a:fillRef idx="1">
+            <a:schemeClr val="accent1"/>
+          </a:fillRef>
+          <a:effectRef idx="0">
+            <a:schemeClr val="accent1"/>
+          </a:effectRef>
+          <a:fontRef idx="minor">
+            <a:schemeClr val="lt1"/>
+          </a:fontRef>
+        </p:style>
+        <p:txBody>
+          <a:bodyPr rtlCol="0" anchor="ctr"/>
+          <a:lstStyle/>
+          <a:p>
+            <a:pPr algn="ctr"/>
+            <a:endParaRPr lang="ko-KR" altLang="en-US"/>
+          </a:p>
+        </p:txBody>
+      </p:sp>
+      <p:sp>
+        <p:nvSpPr>
+          <p:cNvPr id="4" name="화살표: 오른쪽 3">
+            <a:extLst>
+              <a:ext uri="{FF2B5EF4-FFF2-40B4-BE49-F238E27FC236}">
+                <a16:creationId xmlns:a16="http://schemas.microsoft.com/office/drawing/2014/main" id="{6C1D3FFD-91D7-4E13-8259-AAD1757BA846}"/>
+              </a:ext>
+            </a:extLst>
+          </p:cNvPr>
+          <p:cNvSpPr/>
+          <p:nvPr/>
+        </p:nvSpPr>
+        <p:spPr>
+          <a:xfrm>
+            <a:off x="3808675" y="3808675"/>
+            <a:ext cx="620202" cy="357808"/>
+          </a:xfrm>
+          <a:prstGeom prst="rightArrow">
+            <a:avLst/>
+          </a:prstGeom>
+        </p:spPr>
+        <p:style>
+          <a:lnRef idx="2">
+            <a:schemeClr val="accent1">
+              <a:shade val="50000"/>
+            </a:schemeClr>
+          </a:lnRef>
+          <a:fillRef idx="1">
+            <a:schemeClr val="accent1"/>
+          </a:fillRef>
+          <a:effectRef idx="0">
+            <a:schemeClr val="accent1"/>
+          </a:effectRef>
+          <a:fontRef idx="minor">
+            <a:schemeClr val="lt1"/>
+          </a:fontRef>
+        </p:style>
+        <p:txBody>
+          <a:bodyPr rtlCol="0" anchor="ctr"/>
+          <a:lstStyle/>
+          <a:p>
+            <a:pPr algn="ctr"/>
+            <a:endParaRPr lang="ko-KR" altLang="en-US"/>
+          </a:p>
+        </p:txBody>
+      </p:sp>
+      <p:sp>
+        <p:nvSpPr>
+          <p:cNvPr id="7" name="화살표: 아래쪽 6">
+            <a:extLst>
+              <a:ext uri="{FF2B5EF4-FFF2-40B4-BE49-F238E27FC236}">
+                <a16:creationId xmlns:a16="http://schemas.microsoft.com/office/drawing/2014/main" id="{5EEB3AF9-EC6D-4C1E-A4AA-6F674E97F7F3}"/>
+              </a:ext>
+            </a:extLst>
+          </p:cNvPr>
+          <p:cNvSpPr/>
+          <p:nvPr/>
+        </p:nvSpPr>
+        <p:spPr>
+          <a:xfrm>
+            <a:off x="2289716" y="4317558"/>
+            <a:ext cx="389614" cy="628154"/>
+          </a:xfrm>
+          <a:prstGeom prst="downArrow">
+            <a:avLst/>
+          </a:prstGeom>
+        </p:spPr>
+        <p:style>
+          <a:lnRef idx="2">
+            <a:schemeClr val="accent1">
+              <a:shade val="50000"/>
+            </a:schemeClr>
+          </a:lnRef>
+          <a:fillRef idx="1">
+            <a:schemeClr val="accent1"/>
+          </a:fillRef>
+          <a:effectRef idx="0">
+            <a:schemeClr val="accent1"/>
+          </a:effectRef>
+          <a:fontRef idx="minor">
+            <a:schemeClr val="lt1"/>
+          </a:fontRef>
+        </p:style>
+        <p:txBody>
+          <a:bodyPr rtlCol="0" anchor="ctr"/>
+          <a:lstStyle/>
+          <a:p>
+            <a:pPr algn="ctr"/>
+            <a:endParaRPr lang="ko-KR" altLang="en-US"/>
+          </a:p>
+        </p:txBody>
+      </p:sp>
+      <p:sp>
+        <p:nvSpPr>
+          <p:cNvPr id="8" name="화살표: 아래쪽 7">
+            <a:extLst>
+              <a:ext uri="{FF2B5EF4-FFF2-40B4-BE49-F238E27FC236}">
+                <a16:creationId xmlns:a16="http://schemas.microsoft.com/office/drawing/2014/main" id="{6F431507-E024-44DE-BB3E-825853B3C7EB}"/>
+              </a:ext>
+            </a:extLst>
+          </p:cNvPr>
+          <p:cNvSpPr/>
+          <p:nvPr/>
+        </p:nvSpPr>
+        <p:spPr>
+          <a:xfrm rot="10800000">
+            <a:off x="2289716" y="2906202"/>
+            <a:ext cx="389614" cy="628154"/>
+          </a:xfrm>
+          <a:prstGeom prst="downArrow">
+            <a:avLst/>
+          </a:prstGeom>
+        </p:spPr>
+        <p:style>
+          <a:lnRef idx="2">
+            <a:schemeClr val="accent1">
+              <a:shade val="50000"/>
+            </a:schemeClr>
+          </a:lnRef>
+          <a:fillRef idx="1">
+            <a:schemeClr val="accent1"/>
+          </a:fillRef>
+          <a:effectRef idx="0">
+            <a:schemeClr val="accent1"/>
+          </a:effectRef>
+          <a:fontRef idx="minor">
+            <a:schemeClr val="lt1"/>
+          </a:fontRef>
+        </p:style>
+        <p:txBody>
+          <a:bodyPr rtlCol="0" anchor="ctr"/>
+          <a:lstStyle/>
+          <a:p>
+            <a:pPr algn="ctr"/>
+            <a:endParaRPr lang="ko-KR" altLang="en-US"/>
+          </a:p>
+        </p:txBody>
+      </p:sp>
+      <p:sp>
+        <p:nvSpPr>
+          <p:cNvPr id="9" name="화살표: 오른쪽 8">
+            <a:extLst>
+              <a:ext uri="{FF2B5EF4-FFF2-40B4-BE49-F238E27FC236}">
+                <a16:creationId xmlns:a16="http://schemas.microsoft.com/office/drawing/2014/main" id="{C7832BD4-B878-4B87-BA5B-1B8AA36913E2}"/>
+              </a:ext>
+            </a:extLst>
+          </p:cNvPr>
+          <p:cNvSpPr/>
+          <p:nvPr/>
+        </p:nvSpPr>
+        <p:spPr>
+          <a:xfrm rot="10800000">
+            <a:off x="628153" y="3707697"/>
+            <a:ext cx="620202" cy="357808"/>
+          </a:xfrm>
+          <a:prstGeom prst="rightArrow">
+            <a:avLst/>
+          </a:prstGeom>
+        </p:spPr>
+        <p:style>
+          <a:lnRef idx="2">
+            <a:schemeClr val="accent1">
+              <a:shade val="50000"/>
+            </a:schemeClr>
+          </a:lnRef>
+          <a:fillRef idx="1">
+            <a:schemeClr val="accent1"/>
+          </a:fillRef>
+          <a:effectRef idx="0">
+            <a:schemeClr val="accent1"/>
+          </a:effectRef>
+          <a:fontRef idx="minor">
+            <a:schemeClr val="lt1"/>
+          </a:fontRef>
+        </p:style>
+        <p:txBody>
+          <a:bodyPr rtlCol="0" anchor="ctr"/>
+          <a:lstStyle/>
+          <a:p>
+            <a:pPr algn="ctr"/>
+            <a:endParaRPr lang="ko-KR" altLang="en-US"/>
+          </a:p>
+        </p:txBody>
+      </p:sp>
     </p:spTree>
     <p:extLst>
       <p:ext uri="{BB962C8B-B14F-4D97-AF65-F5344CB8AC3E}">
-        <p14:creationId xmlns:p14="http://schemas.microsoft.com/office/powerpoint/2010/main" val="737257333"/>
+        <p14:creationId xmlns:p14="http://schemas.microsoft.com/office/powerpoint/2010/main" val="1462668348"/>
       </p:ext>
     </p:extLst>
   </p:cSld>
@@ -3657,105 +3955,12 @@
           </a:p>
         </p:txBody>
       </p:sp>
-      <p:sp>
-        <p:nvSpPr>
-          <p:cNvPr id="6" name="TextBox 5">
-            <a:extLst>
-              <a:ext uri="{FF2B5EF4-FFF2-40B4-BE49-F238E27FC236}">
-                <a16:creationId xmlns:a16="http://schemas.microsoft.com/office/drawing/2014/main" id="{8D412666-212D-4CB7-944D-A2F46FAD81FE}"/>
-              </a:ext>
-            </a:extLst>
-          </p:cNvPr>
-          <p:cNvSpPr txBox="1"/>
-          <p:nvPr/>
-        </p:nvSpPr>
-        <p:spPr>
-          <a:xfrm>
-            <a:off x="5239650" y="2553535"/>
-            <a:ext cx="5987332" cy="2308324"/>
-          </a:xfrm>
-          <a:prstGeom prst="rect">
-            <a:avLst/>
-          </a:prstGeom>
-          <a:noFill/>
-        </p:spPr>
-        <p:txBody>
-          <a:bodyPr wrap="square" rtlCol="0">
-            <a:spAutoFit/>
-          </a:bodyPr>
-          <a:lstStyle/>
-          <a:p>
-            <a:r>
-              <a:rPr lang="ko-KR" altLang="en-US" dirty="0"/>
-              <a:t>일기장 클릭  </a:t>
-            </a:r>
-            <a:endParaRPr lang="en-US" altLang="ko-KR" dirty="0"/>
-          </a:p>
-          <a:p>
-            <a:endParaRPr lang="en-US" altLang="ko-KR" dirty="0"/>
-          </a:p>
-          <a:p>
-            <a:r>
-              <a:rPr lang="ko-KR" altLang="en-US" dirty="0"/>
-              <a:t>일기장 클릭 이후 패널 활성화</a:t>
-            </a:r>
-            <a:endParaRPr lang="en-US" altLang="ko-KR" dirty="0"/>
-          </a:p>
-          <a:p>
-            <a:r>
-              <a:rPr lang="en-US" altLang="ko-KR" dirty="0"/>
-              <a:t>-&gt; </a:t>
-            </a:r>
-            <a:r>
-              <a:rPr lang="ko-KR" altLang="en-US" dirty="0"/>
-              <a:t>일기장의 내용이 나오고 넘기는 오브젝트 활성화 </a:t>
-            </a:r>
-            <a:r>
-              <a:rPr lang="en-US" altLang="ko-KR" dirty="0"/>
-              <a:t>(</a:t>
-            </a:r>
-            <a:r>
-              <a:rPr lang="ko-KR" altLang="en-US" dirty="0"/>
-              <a:t>화살표</a:t>
-            </a:r>
-            <a:r>
-              <a:rPr lang="en-US" altLang="ko-KR" dirty="0"/>
-              <a:t>)</a:t>
-            </a:r>
-          </a:p>
-          <a:p>
-            <a:endParaRPr lang="en-US" altLang="ko-KR" dirty="0"/>
-          </a:p>
-          <a:p>
-            <a:r>
-              <a:rPr lang="en-US" altLang="ko-KR" dirty="0"/>
-              <a:t>-&gt; </a:t>
-            </a:r>
-            <a:r>
-              <a:rPr lang="ko-KR" altLang="en-US" dirty="0"/>
-              <a:t>일기장을 다 넘기면 열쇠를 습득 가능하게 함 </a:t>
-            </a:r>
-            <a:r>
-              <a:rPr lang="en-US" altLang="ko-KR" dirty="0"/>
-              <a:t>(</a:t>
-            </a:r>
-            <a:r>
-              <a:rPr lang="ko-KR" altLang="en-US" dirty="0"/>
-              <a:t>인벤토리 추가</a:t>
-            </a:r>
-            <a:r>
-              <a:rPr lang="en-US" altLang="ko-KR" dirty="0"/>
-              <a:t>)</a:t>
-            </a:r>
-          </a:p>
-        </p:txBody>
-      </p:sp>
       <p:pic>
         <p:nvPicPr>
-          <p:cNvPr id="7" name="내용 개체 틀 6">
-            <a:extLst>
-              <a:ext uri="{FF2B5EF4-FFF2-40B4-BE49-F238E27FC236}">
-                <a16:creationId xmlns:a16="http://schemas.microsoft.com/office/drawing/2014/main" id="{CC12949B-22DF-43DB-BEDC-8F5B4BBF45A4}"/>
+          <p:cNvPr id="5" name="내용 개체 틀 4">
+            <a:extLst>
+              <a:ext uri="{FF2B5EF4-FFF2-40B4-BE49-F238E27FC236}">
+                <a16:creationId xmlns:a16="http://schemas.microsoft.com/office/drawing/2014/main" id="{B32C2D8B-EB5C-4880-A2F5-4687A9F9B249}"/>
               </a:ext>
             </a:extLst>
           </p:cNvPr>
@@ -3780,15 +3985,393 @@
         </p:blipFill>
         <p:spPr>
           <a:xfrm>
-            <a:off x="1421626" y="2810338"/>
-            <a:ext cx="2971800" cy="2000250"/>
+            <a:off x="375489" y="2573048"/>
+            <a:ext cx="4218069" cy="2372664"/>
           </a:xfrm>
         </p:spPr>
       </p:pic>
+      <p:sp>
+        <p:nvSpPr>
+          <p:cNvPr id="6" name="TextBox 5">
+            <a:extLst>
+              <a:ext uri="{FF2B5EF4-FFF2-40B4-BE49-F238E27FC236}">
+                <a16:creationId xmlns:a16="http://schemas.microsoft.com/office/drawing/2014/main" id="{8D412666-212D-4CB7-944D-A2F46FAD81FE}"/>
+              </a:ext>
+            </a:extLst>
+          </p:cNvPr>
+          <p:cNvSpPr txBox="1"/>
+          <p:nvPr/>
+        </p:nvSpPr>
+        <p:spPr>
+          <a:xfrm>
+            <a:off x="5239650" y="2553535"/>
+            <a:ext cx="5987332" cy="3416320"/>
+          </a:xfrm>
+          <a:prstGeom prst="rect">
+            <a:avLst/>
+          </a:prstGeom>
+          <a:noFill/>
+        </p:spPr>
+        <p:txBody>
+          <a:bodyPr wrap="square" rtlCol="0">
+            <a:spAutoFit/>
+          </a:bodyPr>
+          <a:lstStyle/>
+          <a:p>
+            <a:r>
+              <a:rPr lang="ko-KR" altLang="en-US" dirty="0"/>
+              <a:t>데스크 클릭 </a:t>
+            </a:r>
+            <a:endParaRPr lang="en-US" altLang="ko-KR" dirty="0"/>
+          </a:p>
+          <a:p>
+            <a:endParaRPr lang="en-US" altLang="ko-KR" dirty="0"/>
+          </a:p>
+          <a:p>
+            <a:r>
+              <a:rPr lang="ko-KR" altLang="en-US" dirty="0"/>
+              <a:t>데스크를 클릭 하였을 경우 메뉴창을 </a:t>
+            </a:r>
+            <a:r>
+              <a:rPr lang="ko-KR" altLang="en-US" dirty="0" err="1"/>
+              <a:t>뜨운다</a:t>
+            </a:r>
+            <a:endParaRPr lang="en-US" altLang="ko-KR" dirty="0"/>
+          </a:p>
+          <a:p>
+            <a:r>
+              <a:rPr lang="en-US" altLang="ko-KR" dirty="0"/>
+              <a:t>-&gt; </a:t>
+            </a:r>
+            <a:r>
+              <a:rPr lang="ko-KR" altLang="en-US" dirty="0"/>
+              <a:t>조사한다 </a:t>
+            </a:r>
+            <a:r>
+              <a:rPr lang="en-US" altLang="ko-KR" dirty="0"/>
+              <a:t>or </a:t>
+            </a:r>
+            <a:r>
+              <a:rPr lang="ko-KR" altLang="en-US" dirty="0"/>
+              <a:t>비슷한 </a:t>
+            </a:r>
+            <a:r>
+              <a:rPr lang="ko-KR" altLang="en-US" dirty="0" err="1"/>
+              <a:t>뉘양스의</a:t>
+            </a:r>
+            <a:r>
+              <a:rPr lang="ko-KR" altLang="en-US" dirty="0"/>
+              <a:t> 대사</a:t>
+            </a:r>
+            <a:endParaRPr lang="en-US" altLang="ko-KR" dirty="0"/>
+          </a:p>
+          <a:p>
+            <a:r>
+              <a:rPr lang="en-US" altLang="ko-KR" dirty="0"/>
+              <a:t>-&gt; </a:t>
+            </a:r>
+            <a:r>
+              <a:rPr lang="ko-KR" altLang="en-US" dirty="0" err="1"/>
+              <a:t>조사한다를</a:t>
+            </a:r>
+            <a:r>
+              <a:rPr lang="ko-KR" altLang="en-US" dirty="0"/>
+              <a:t> 클릭했을 경우 데스크 패널을 활성화</a:t>
+            </a:r>
+            <a:endParaRPr lang="en-US" altLang="ko-KR" dirty="0"/>
+          </a:p>
+          <a:p>
+            <a:r>
+              <a:rPr lang="en-US" altLang="ko-KR" dirty="0"/>
+              <a:t>-&gt; </a:t>
+            </a:r>
+            <a:r>
+              <a:rPr lang="ko-KR" altLang="en-US" dirty="0"/>
+              <a:t>데스크의 자식 오브젝트들 활성화 </a:t>
+            </a:r>
+            <a:r>
+              <a:rPr lang="en-US" altLang="ko-KR" dirty="0"/>
+              <a:t>(</a:t>
+            </a:r>
+            <a:r>
+              <a:rPr lang="ko-KR" altLang="en-US" dirty="0"/>
+              <a:t>패널의 백스페이스나 데스크 패널 자식 오브젝트들</a:t>
+            </a:r>
+            <a:r>
+              <a:rPr lang="en-US" altLang="ko-KR" dirty="0"/>
+              <a:t>)</a:t>
+            </a:r>
+          </a:p>
+          <a:p>
+            <a:endParaRPr lang="en-US" altLang="ko-KR" dirty="0"/>
+          </a:p>
+          <a:p>
+            <a:r>
+              <a:rPr lang="ko-KR" altLang="en-US" dirty="0"/>
+              <a:t>예외 처리 </a:t>
+            </a:r>
+            <a:r>
+              <a:rPr lang="en-US" altLang="ko-KR" dirty="0"/>
+              <a:t>: </a:t>
+            </a:r>
+            <a:r>
+              <a:rPr lang="ko-KR" altLang="en-US" dirty="0"/>
+              <a:t>백스페이스와 마찬가지로 패널을 활성화 했을 경우 패널의 자식 오브젝트나 이미지가 아닌 이상 또한 데스크를 활성화 했을 때의 퍼즐이나 일기장을 제외한 다른 </a:t>
+            </a:r>
+            <a:r>
+              <a:rPr lang="ko-KR" altLang="en-US" dirty="0" err="1"/>
+              <a:t>오브젝트들와의</a:t>
+            </a:r>
+            <a:r>
+              <a:rPr lang="ko-KR" altLang="en-US" dirty="0"/>
+              <a:t> 상호작용은 </a:t>
+            </a:r>
+            <a:r>
+              <a:rPr lang="en-US" altLang="ko-KR" dirty="0"/>
+              <a:t>false</a:t>
+            </a:r>
+            <a:r>
+              <a:rPr lang="ko-KR" altLang="en-US" dirty="0"/>
+              <a:t>상태 </a:t>
+            </a:r>
+            <a:endParaRPr lang="en-US" altLang="ko-KR" dirty="0"/>
+          </a:p>
+        </p:txBody>
+      </p:sp>
+      <p:sp>
+        <p:nvSpPr>
+          <p:cNvPr id="3" name="직사각형 2">
+            <a:extLst>
+              <a:ext uri="{FF2B5EF4-FFF2-40B4-BE49-F238E27FC236}">
+                <a16:creationId xmlns:a16="http://schemas.microsoft.com/office/drawing/2014/main" id="{D03CD479-77EA-433F-8BBD-CD6DA4F74E29}"/>
+              </a:ext>
+            </a:extLst>
+          </p:cNvPr>
+          <p:cNvSpPr/>
+          <p:nvPr/>
+        </p:nvSpPr>
+        <p:spPr>
+          <a:xfrm>
+            <a:off x="461176" y="2679590"/>
+            <a:ext cx="477078" cy="453224"/>
+          </a:xfrm>
+          <a:prstGeom prst="rect">
+            <a:avLst/>
+          </a:prstGeom>
+        </p:spPr>
+        <p:style>
+          <a:lnRef idx="2">
+            <a:schemeClr val="accent1">
+              <a:shade val="50000"/>
+            </a:schemeClr>
+          </a:lnRef>
+          <a:fillRef idx="1">
+            <a:schemeClr val="accent1"/>
+          </a:fillRef>
+          <a:effectRef idx="0">
+            <a:schemeClr val="accent1"/>
+          </a:effectRef>
+          <a:fontRef idx="minor">
+            <a:schemeClr val="lt1"/>
+          </a:fontRef>
+        </p:style>
+        <p:txBody>
+          <a:bodyPr rtlCol="0" anchor="ctr"/>
+          <a:lstStyle/>
+          <a:p>
+            <a:pPr algn="ctr"/>
+            <a:endParaRPr lang="ko-KR" altLang="en-US"/>
+          </a:p>
+        </p:txBody>
+      </p:sp>
+      <p:sp>
+        <p:nvSpPr>
+          <p:cNvPr id="4" name="화살표: 오른쪽 3">
+            <a:extLst>
+              <a:ext uri="{FF2B5EF4-FFF2-40B4-BE49-F238E27FC236}">
+                <a16:creationId xmlns:a16="http://schemas.microsoft.com/office/drawing/2014/main" id="{6C1D3FFD-91D7-4E13-8259-AAD1757BA846}"/>
+              </a:ext>
+            </a:extLst>
+          </p:cNvPr>
+          <p:cNvSpPr/>
+          <p:nvPr/>
+        </p:nvSpPr>
+        <p:spPr>
+          <a:xfrm>
+            <a:off x="3808675" y="3808675"/>
+            <a:ext cx="620202" cy="357808"/>
+          </a:xfrm>
+          <a:prstGeom prst="rightArrow">
+            <a:avLst/>
+          </a:prstGeom>
+        </p:spPr>
+        <p:style>
+          <a:lnRef idx="2">
+            <a:schemeClr val="accent1">
+              <a:shade val="50000"/>
+            </a:schemeClr>
+          </a:lnRef>
+          <a:fillRef idx="1">
+            <a:schemeClr val="accent1"/>
+          </a:fillRef>
+          <a:effectRef idx="0">
+            <a:schemeClr val="accent1"/>
+          </a:effectRef>
+          <a:fontRef idx="minor">
+            <a:schemeClr val="lt1"/>
+          </a:fontRef>
+        </p:style>
+        <p:txBody>
+          <a:bodyPr rtlCol="0" anchor="ctr"/>
+          <a:lstStyle/>
+          <a:p>
+            <a:pPr algn="ctr"/>
+            <a:endParaRPr lang="ko-KR" altLang="en-US"/>
+          </a:p>
+        </p:txBody>
+      </p:sp>
+      <p:sp>
+        <p:nvSpPr>
+          <p:cNvPr id="7" name="화살표: 아래쪽 6">
+            <a:extLst>
+              <a:ext uri="{FF2B5EF4-FFF2-40B4-BE49-F238E27FC236}">
+                <a16:creationId xmlns:a16="http://schemas.microsoft.com/office/drawing/2014/main" id="{5EEB3AF9-EC6D-4C1E-A4AA-6F674E97F7F3}"/>
+              </a:ext>
+            </a:extLst>
+          </p:cNvPr>
+          <p:cNvSpPr/>
+          <p:nvPr/>
+        </p:nvSpPr>
+        <p:spPr>
+          <a:xfrm>
+            <a:off x="2289716" y="4317558"/>
+            <a:ext cx="389614" cy="628154"/>
+          </a:xfrm>
+          <a:prstGeom prst="downArrow">
+            <a:avLst/>
+          </a:prstGeom>
+        </p:spPr>
+        <p:style>
+          <a:lnRef idx="2">
+            <a:schemeClr val="accent1">
+              <a:shade val="50000"/>
+            </a:schemeClr>
+          </a:lnRef>
+          <a:fillRef idx="1">
+            <a:schemeClr val="accent1"/>
+          </a:fillRef>
+          <a:effectRef idx="0">
+            <a:schemeClr val="accent1"/>
+          </a:effectRef>
+          <a:fontRef idx="minor">
+            <a:schemeClr val="lt1"/>
+          </a:fontRef>
+        </p:style>
+        <p:txBody>
+          <a:bodyPr rtlCol="0" anchor="ctr"/>
+          <a:lstStyle/>
+          <a:p>
+            <a:pPr algn="ctr"/>
+            <a:endParaRPr lang="ko-KR" altLang="en-US"/>
+          </a:p>
+        </p:txBody>
+      </p:sp>
+      <p:sp>
+        <p:nvSpPr>
+          <p:cNvPr id="8" name="화살표: 아래쪽 7">
+            <a:extLst>
+              <a:ext uri="{FF2B5EF4-FFF2-40B4-BE49-F238E27FC236}">
+                <a16:creationId xmlns:a16="http://schemas.microsoft.com/office/drawing/2014/main" id="{6F431507-E024-44DE-BB3E-825853B3C7EB}"/>
+              </a:ext>
+            </a:extLst>
+          </p:cNvPr>
+          <p:cNvSpPr/>
+          <p:nvPr/>
+        </p:nvSpPr>
+        <p:spPr>
+          <a:xfrm rot="10800000">
+            <a:off x="2289716" y="2906202"/>
+            <a:ext cx="389614" cy="628154"/>
+          </a:xfrm>
+          <a:prstGeom prst="downArrow">
+            <a:avLst/>
+          </a:prstGeom>
+        </p:spPr>
+        <p:style>
+          <a:lnRef idx="2">
+            <a:schemeClr val="accent1">
+              <a:shade val="50000"/>
+            </a:schemeClr>
+          </a:lnRef>
+          <a:fillRef idx="1">
+            <a:schemeClr val="accent1"/>
+          </a:fillRef>
+          <a:effectRef idx="0">
+            <a:schemeClr val="accent1"/>
+          </a:effectRef>
+          <a:fontRef idx="minor">
+            <a:schemeClr val="lt1"/>
+          </a:fontRef>
+        </p:style>
+        <p:txBody>
+          <a:bodyPr rtlCol="0" anchor="ctr"/>
+          <a:lstStyle/>
+          <a:p>
+            <a:pPr algn="ctr"/>
+            <a:endParaRPr lang="ko-KR" altLang="en-US"/>
+          </a:p>
+        </p:txBody>
+      </p:sp>
+      <p:sp>
+        <p:nvSpPr>
+          <p:cNvPr id="9" name="화살표: 오른쪽 8">
+            <a:extLst>
+              <a:ext uri="{FF2B5EF4-FFF2-40B4-BE49-F238E27FC236}">
+                <a16:creationId xmlns:a16="http://schemas.microsoft.com/office/drawing/2014/main" id="{C7832BD4-B878-4B87-BA5B-1B8AA36913E2}"/>
+              </a:ext>
+            </a:extLst>
+          </p:cNvPr>
+          <p:cNvSpPr/>
+          <p:nvPr/>
+        </p:nvSpPr>
+        <p:spPr>
+          <a:xfrm rot="10800000">
+            <a:off x="628153" y="3707697"/>
+            <a:ext cx="620202" cy="357808"/>
+          </a:xfrm>
+          <a:prstGeom prst="rightArrow">
+            <a:avLst/>
+          </a:prstGeom>
+        </p:spPr>
+        <p:style>
+          <a:lnRef idx="2">
+            <a:schemeClr val="accent1">
+              <a:shade val="50000"/>
+            </a:schemeClr>
+          </a:lnRef>
+          <a:fillRef idx="1">
+            <a:schemeClr val="accent1"/>
+          </a:fillRef>
+          <a:effectRef idx="0">
+            <a:schemeClr val="accent1"/>
+          </a:effectRef>
+          <a:fontRef idx="minor">
+            <a:schemeClr val="lt1"/>
+          </a:fontRef>
+        </p:style>
+        <p:txBody>
+          <a:bodyPr rtlCol="0" anchor="ctr"/>
+          <a:lstStyle/>
+          <a:p>
+            <a:pPr algn="ctr"/>
+            <a:endParaRPr lang="ko-KR" altLang="en-US"/>
+          </a:p>
+        </p:txBody>
+      </p:sp>
     </p:spTree>
     <p:extLst>
       <p:ext uri="{BB962C8B-B14F-4D97-AF65-F5344CB8AC3E}">
-        <p14:creationId xmlns:p14="http://schemas.microsoft.com/office/powerpoint/2010/main" val="2348711516"/>
+        <p14:creationId xmlns:p14="http://schemas.microsoft.com/office/powerpoint/2010/main" val="1451075368"/>
       </p:ext>
     </p:extLst>
   </p:cSld>
@@ -3858,6 +4441,1199 @@
       </p:sp>
       <p:pic>
         <p:nvPicPr>
+          <p:cNvPr id="5" name="내용 개체 틀 4">
+            <a:extLst>
+              <a:ext uri="{FF2B5EF4-FFF2-40B4-BE49-F238E27FC236}">
+                <a16:creationId xmlns:a16="http://schemas.microsoft.com/office/drawing/2014/main" id="{B32C2D8B-EB5C-4880-A2F5-4687A9F9B249}"/>
+              </a:ext>
+            </a:extLst>
+          </p:cNvPr>
+          <p:cNvPicPr>
+            <a:picLocks noGrp="1" noChangeAspect="1"/>
+          </p:cNvPicPr>
+          <p:nvPr>
+            <p:ph idx="1"/>
+          </p:nvPr>
+        </p:nvPicPr>
+        <p:blipFill>
+          <a:blip r:embed="rId2">
+            <a:extLst>
+              <a:ext uri="{28A0092B-C50C-407E-A947-70E740481C1C}">
+                <a14:useLocalDpi xmlns:a14="http://schemas.microsoft.com/office/drawing/2010/main" val="0"/>
+              </a:ext>
+            </a:extLst>
+          </a:blip>
+          <a:stretch>
+            <a:fillRect/>
+          </a:stretch>
+        </p:blipFill>
+        <p:spPr>
+          <a:xfrm>
+            <a:off x="375489" y="2573048"/>
+            <a:ext cx="4218069" cy="2372664"/>
+          </a:xfrm>
+        </p:spPr>
+      </p:pic>
+      <p:sp>
+        <p:nvSpPr>
+          <p:cNvPr id="6" name="TextBox 5">
+            <a:extLst>
+              <a:ext uri="{FF2B5EF4-FFF2-40B4-BE49-F238E27FC236}">
+                <a16:creationId xmlns:a16="http://schemas.microsoft.com/office/drawing/2014/main" id="{8D412666-212D-4CB7-944D-A2F46FAD81FE}"/>
+              </a:ext>
+            </a:extLst>
+          </p:cNvPr>
+          <p:cNvSpPr txBox="1"/>
+          <p:nvPr/>
+        </p:nvSpPr>
+        <p:spPr>
+          <a:xfrm>
+            <a:off x="5239650" y="2553535"/>
+            <a:ext cx="5987332" cy="3416320"/>
+          </a:xfrm>
+          <a:prstGeom prst="rect">
+            <a:avLst/>
+          </a:prstGeom>
+          <a:noFill/>
+        </p:spPr>
+        <p:txBody>
+          <a:bodyPr wrap="square" rtlCol="0">
+            <a:spAutoFit/>
+          </a:bodyPr>
+          <a:lstStyle/>
+          <a:p>
+            <a:r>
+              <a:rPr lang="ko-KR" altLang="en-US" dirty="0"/>
+              <a:t>데스크 클릭 </a:t>
+            </a:r>
+            <a:endParaRPr lang="en-US" altLang="ko-KR" dirty="0"/>
+          </a:p>
+          <a:p>
+            <a:endParaRPr lang="en-US" altLang="ko-KR" dirty="0"/>
+          </a:p>
+          <a:p>
+            <a:r>
+              <a:rPr lang="ko-KR" altLang="en-US" dirty="0"/>
+              <a:t>데스크를 클릭 하였을 경우 메뉴창을 </a:t>
+            </a:r>
+            <a:r>
+              <a:rPr lang="ko-KR" altLang="en-US" dirty="0" err="1"/>
+              <a:t>뜨운다</a:t>
+            </a:r>
+            <a:endParaRPr lang="en-US" altLang="ko-KR" dirty="0"/>
+          </a:p>
+          <a:p>
+            <a:r>
+              <a:rPr lang="en-US" altLang="ko-KR" dirty="0"/>
+              <a:t>-&gt; </a:t>
+            </a:r>
+            <a:r>
+              <a:rPr lang="ko-KR" altLang="en-US" dirty="0"/>
+              <a:t>조사한다 </a:t>
+            </a:r>
+            <a:r>
+              <a:rPr lang="en-US" altLang="ko-KR" dirty="0"/>
+              <a:t>or </a:t>
+            </a:r>
+            <a:r>
+              <a:rPr lang="ko-KR" altLang="en-US" dirty="0"/>
+              <a:t>비슷한 </a:t>
+            </a:r>
+            <a:r>
+              <a:rPr lang="ko-KR" altLang="en-US" dirty="0" err="1"/>
+              <a:t>뉘양스의</a:t>
+            </a:r>
+            <a:r>
+              <a:rPr lang="ko-KR" altLang="en-US" dirty="0"/>
+              <a:t> 대사</a:t>
+            </a:r>
+            <a:endParaRPr lang="en-US" altLang="ko-KR" dirty="0"/>
+          </a:p>
+          <a:p>
+            <a:r>
+              <a:rPr lang="en-US" altLang="ko-KR" dirty="0"/>
+              <a:t>-&gt; </a:t>
+            </a:r>
+            <a:r>
+              <a:rPr lang="ko-KR" altLang="en-US" dirty="0" err="1"/>
+              <a:t>조사한다를</a:t>
+            </a:r>
+            <a:r>
+              <a:rPr lang="ko-KR" altLang="en-US" dirty="0"/>
+              <a:t> 클릭했을 경우 데스크 패널을 활성화</a:t>
+            </a:r>
+            <a:endParaRPr lang="en-US" altLang="ko-KR" dirty="0"/>
+          </a:p>
+          <a:p>
+            <a:r>
+              <a:rPr lang="en-US" altLang="ko-KR" dirty="0"/>
+              <a:t>-&gt; </a:t>
+            </a:r>
+            <a:r>
+              <a:rPr lang="ko-KR" altLang="en-US" dirty="0"/>
+              <a:t>데스크의 자식 오브젝트들 활성화 </a:t>
+            </a:r>
+            <a:r>
+              <a:rPr lang="en-US" altLang="ko-KR" dirty="0"/>
+              <a:t>(</a:t>
+            </a:r>
+            <a:r>
+              <a:rPr lang="ko-KR" altLang="en-US" dirty="0"/>
+              <a:t>패널의 백스페이스나 데스크 패널 자식 오브젝트들</a:t>
+            </a:r>
+            <a:r>
+              <a:rPr lang="en-US" altLang="ko-KR" dirty="0"/>
+              <a:t>)</a:t>
+            </a:r>
+          </a:p>
+          <a:p>
+            <a:endParaRPr lang="en-US" altLang="ko-KR" dirty="0"/>
+          </a:p>
+          <a:p>
+            <a:r>
+              <a:rPr lang="ko-KR" altLang="en-US" dirty="0"/>
+              <a:t>예외 처리 </a:t>
+            </a:r>
+            <a:r>
+              <a:rPr lang="en-US" altLang="ko-KR" dirty="0"/>
+              <a:t>: </a:t>
+            </a:r>
+            <a:r>
+              <a:rPr lang="ko-KR" altLang="en-US" dirty="0"/>
+              <a:t>백스페이스와 마찬가지로 패널을 활성화 했을 경우 패널의 자식 오브젝트나 이미지가 아닌 이상 또한 데스크를 활성화 했을 때의 퍼즐이나 일기장을 제외한 다른 </a:t>
+            </a:r>
+            <a:r>
+              <a:rPr lang="ko-KR" altLang="en-US" dirty="0" err="1"/>
+              <a:t>오브젝트들과의</a:t>
+            </a:r>
+            <a:r>
+              <a:rPr lang="ko-KR" altLang="en-US" dirty="0"/>
+              <a:t> 상호작용은 </a:t>
+            </a:r>
+            <a:r>
+              <a:rPr lang="en-US" altLang="ko-KR" dirty="0"/>
+              <a:t>false</a:t>
+            </a:r>
+            <a:r>
+              <a:rPr lang="ko-KR" altLang="en-US" dirty="0"/>
+              <a:t>상태 </a:t>
+            </a:r>
+            <a:endParaRPr lang="en-US" altLang="ko-KR" dirty="0"/>
+          </a:p>
+        </p:txBody>
+      </p:sp>
+      <p:sp>
+        <p:nvSpPr>
+          <p:cNvPr id="3" name="직사각형 2">
+            <a:extLst>
+              <a:ext uri="{FF2B5EF4-FFF2-40B4-BE49-F238E27FC236}">
+                <a16:creationId xmlns:a16="http://schemas.microsoft.com/office/drawing/2014/main" id="{D03CD479-77EA-433F-8BBD-CD6DA4F74E29}"/>
+              </a:ext>
+            </a:extLst>
+          </p:cNvPr>
+          <p:cNvSpPr/>
+          <p:nvPr/>
+        </p:nvSpPr>
+        <p:spPr>
+          <a:xfrm>
+            <a:off x="461176" y="2679590"/>
+            <a:ext cx="477078" cy="453224"/>
+          </a:xfrm>
+          <a:prstGeom prst="rect">
+            <a:avLst/>
+          </a:prstGeom>
+        </p:spPr>
+        <p:style>
+          <a:lnRef idx="2">
+            <a:schemeClr val="accent1">
+              <a:shade val="50000"/>
+            </a:schemeClr>
+          </a:lnRef>
+          <a:fillRef idx="1">
+            <a:schemeClr val="accent1"/>
+          </a:fillRef>
+          <a:effectRef idx="0">
+            <a:schemeClr val="accent1"/>
+          </a:effectRef>
+          <a:fontRef idx="minor">
+            <a:schemeClr val="lt1"/>
+          </a:fontRef>
+        </p:style>
+        <p:txBody>
+          <a:bodyPr rtlCol="0" anchor="ctr"/>
+          <a:lstStyle/>
+          <a:p>
+            <a:pPr algn="ctr"/>
+            <a:endParaRPr lang="ko-KR" altLang="en-US"/>
+          </a:p>
+        </p:txBody>
+      </p:sp>
+      <p:sp>
+        <p:nvSpPr>
+          <p:cNvPr id="4" name="화살표: 오른쪽 3">
+            <a:extLst>
+              <a:ext uri="{FF2B5EF4-FFF2-40B4-BE49-F238E27FC236}">
+                <a16:creationId xmlns:a16="http://schemas.microsoft.com/office/drawing/2014/main" id="{6C1D3FFD-91D7-4E13-8259-AAD1757BA846}"/>
+              </a:ext>
+            </a:extLst>
+          </p:cNvPr>
+          <p:cNvSpPr/>
+          <p:nvPr/>
+        </p:nvSpPr>
+        <p:spPr>
+          <a:xfrm>
+            <a:off x="3808675" y="3808675"/>
+            <a:ext cx="620202" cy="357808"/>
+          </a:xfrm>
+          <a:prstGeom prst="rightArrow">
+            <a:avLst/>
+          </a:prstGeom>
+        </p:spPr>
+        <p:style>
+          <a:lnRef idx="2">
+            <a:schemeClr val="accent1">
+              <a:shade val="50000"/>
+            </a:schemeClr>
+          </a:lnRef>
+          <a:fillRef idx="1">
+            <a:schemeClr val="accent1"/>
+          </a:fillRef>
+          <a:effectRef idx="0">
+            <a:schemeClr val="accent1"/>
+          </a:effectRef>
+          <a:fontRef idx="minor">
+            <a:schemeClr val="lt1"/>
+          </a:fontRef>
+        </p:style>
+        <p:txBody>
+          <a:bodyPr rtlCol="0" anchor="ctr"/>
+          <a:lstStyle/>
+          <a:p>
+            <a:pPr algn="ctr"/>
+            <a:endParaRPr lang="ko-KR" altLang="en-US"/>
+          </a:p>
+        </p:txBody>
+      </p:sp>
+      <p:sp>
+        <p:nvSpPr>
+          <p:cNvPr id="7" name="화살표: 아래쪽 6">
+            <a:extLst>
+              <a:ext uri="{FF2B5EF4-FFF2-40B4-BE49-F238E27FC236}">
+                <a16:creationId xmlns:a16="http://schemas.microsoft.com/office/drawing/2014/main" id="{5EEB3AF9-EC6D-4C1E-A4AA-6F674E97F7F3}"/>
+              </a:ext>
+            </a:extLst>
+          </p:cNvPr>
+          <p:cNvSpPr/>
+          <p:nvPr/>
+        </p:nvSpPr>
+        <p:spPr>
+          <a:xfrm>
+            <a:off x="2289716" y="4317558"/>
+            <a:ext cx="389614" cy="628154"/>
+          </a:xfrm>
+          <a:prstGeom prst="downArrow">
+            <a:avLst/>
+          </a:prstGeom>
+        </p:spPr>
+        <p:style>
+          <a:lnRef idx="2">
+            <a:schemeClr val="accent1">
+              <a:shade val="50000"/>
+            </a:schemeClr>
+          </a:lnRef>
+          <a:fillRef idx="1">
+            <a:schemeClr val="accent1"/>
+          </a:fillRef>
+          <a:effectRef idx="0">
+            <a:schemeClr val="accent1"/>
+          </a:effectRef>
+          <a:fontRef idx="minor">
+            <a:schemeClr val="lt1"/>
+          </a:fontRef>
+        </p:style>
+        <p:txBody>
+          <a:bodyPr rtlCol="0" anchor="ctr"/>
+          <a:lstStyle/>
+          <a:p>
+            <a:pPr algn="ctr"/>
+            <a:endParaRPr lang="ko-KR" altLang="en-US"/>
+          </a:p>
+        </p:txBody>
+      </p:sp>
+      <p:sp>
+        <p:nvSpPr>
+          <p:cNvPr id="8" name="화살표: 아래쪽 7">
+            <a:extLst>
+              <a:ext uri="{FF2B5EF4-FFF2-40B4-BE49-F238E27FC236}">
+                <a16:creationId xmlns:a16="http://schemas.microsoft.com/office/drawing/2014/main" id="{6F431507-E024-44DE-BB3E-825853B3C7EB}"/>
+              </a:ext>
+            </a:extLst>
+          </p:cNvPr>
+          <p:cNvSpPr/>
+          <p:nvPr/>
+        </p:nvSpPr>
+        <p:spPr>
+          <a:xfrm rot="10800000">
+            <a:off x="2289716" y="2906202"/>
+            <a:ext cx="389614" cy="628154"/>
+          </a:xfrm>
+          <a:prstGeom prst="downArrow">
+            <a:avLst/>
+          </a:prstGeom>
+        </p:spPr>
+        <p:style>
+          <a:lnRef idx="2">
+            <a:schemeClr val="accent1">
+              <a:shade val="50000"/>
+            </a:schemeClr>
+          </a:lnRef>
+          <a:fillRef idx="1">
+            <a:schemeClr val="accent1"/>
+          </a:fillRef>
+          <a:effectRef idx="0">
+            <a:schemeClr val="accent1"/>
+          </a:effectRef>
+          <a:fontRef idx="minor">
+            <a:schemeClr val="lt1"/>
+          </a:fontRef>
+        </p:style>
+        <p:txBody>
+          <a:bodyPr rtlCol="0" anchor="ctr"/>
+          <a:lstStyle/>
+          <a:p>
+            <a:pPr algn="ctr"/>
+            <a:endParaRPr lang="ko-KR" altLang="en-US"/>
+          </a:p>
+        </p:txBody>
+      </p:sp>
+      <p:sp>
+        <p:nvSpPr>
+          <p:cNvPr id="9" name="화살표: 오른쪽 8">
+            <a:extLst>
+              <a:ext uri="{FF2B5EF4-FFF2-40B4-BE49-F238E27FC236}">
+                <a16:creationId xmlns:a16="http://schemas.microsoft.com/office/drawing/2014/main" id="{C7832BD4-B878-4B87-BA5B-1B8AA36913E2}"/>
+              </a:ext>
+            </a:extLst>
+          </p:cNvPr>
+          <p:cNvSpPr/>
+          <p:nvPr/>
+        </p:nvSpPr>
+        <p:spPr>
+          <a:xfrm rot="10800000">
+            <a:off x="628153" y="3707697"/>
+            <a:ext cx="620202" cy="357808"/>
+          </a:xfrm>
+          <a:prstGeom prst="rightArrow">
+            <a:avLst/>
+          </a:prstGeom>
+        </p:spPr>
+        <p:style>
+          <a:lnRef idx="2">
+            <a:schemeClr val="accent1">
+              <a:shade val="50000"/>
+            </a:schemeClr>
+          </a:lnRef>
+          <a:fillRef idx="1">
+            <a:schemeClr val="accent1"/>
+          </a:fillRef>
+          <a:effectRef idx="0">
+            <a:schemeClr val="accent1"/>
+          </a:effectRef>
+          <a:fontRef idx="minor">
+            <a:schemeClr val="lt1"/>
+          </a:fontRef>
+        </p:style>
+        <p:txBody>
+          <a:bodyPr rtlCol="0" anchor="ctr"/>
+          <a:lstStyle/>
+          <a:p>
+            <a:pPr algn="ctr"/>
+            <a:endParaRPr lang="ko-KR" altLang="en-US"/>
+          </a:p>
+        </p:txBody>
+      </p:sp>
+    </p:spTree>
+    <p:extLst>
+      <p:ext uri="{BB962C8B-B14F-4D97-AF65-F5344CB8AC3E}">
+        <p14:creationId xmlns:p14="http://schemas.microsoft.com/office/powerpoint/2010/main" val="2253979823"/>
+      </p:ext>
+    </p:extLst>
+  </p:cSld>
+  <p:clrMapOvr>
+    <a:masterClrMapping/>
+  </p:clrMapOvr>
+</p:sld>
+</file>
+
+<file path=ppt/slides/slide13.xml><?xml version="1.0" encoding="utf-8"?>
+<p:sld xmlns:a="http://schemas.openxmlformats.org/drawingml/2006/main" xmlns:r="http://schemas.openxmlformats.org/officeDocument/2006/relationships" xmlns:p="http://schemas.openxmlformats.org/presentationml/2006/main">
+  <p:cSld>
+    <p:spTree>
+      <p:nvGrpSpPr>
+        <p:cNvPr id="1" name=""/>
+        <p:cNvGrpSpPr/>
+        <p:nvPr/>
+      </p:nvGrpSpPr>
+      <p:grpSpPr>
+        <a:xfrm>
+          <a:off x="0" y="0"/>
+          <a:ext cx="0" cy="0"/>
+          <a:chOff x="0" y="0"/>
+          <a:chExt cx="0" cy="0"/>
+        </a:xfrm>
+      </p:grpSpPr>
+      <p:sp>
+        <p:nvSpPr>
+          <p:cNvPr id="2" name="제목 1">
+            <a:extLst>
+              <a:ext uri="{FF2B5EF4-FFF2-40B4-BE49-F238E27FC236}">
+                <a16:creationId xmlns:a16="http://schemas.microsoft.com/office/drawing/2014/main" id="{9E86BC59-9D15-44F2-941C-A39A53D9C1CB}"/>
+              </a:ext>
+            </a:extLst>
+          </p:cNvPr>
+          <p:cNvSpPr>
+            <a:spLocks noGrp="1"/>
+          </p:cNvSpPr>
+          <p:nvPr>
+            <p:ph type="title"/>
+          </p:nvPr>
+        </p:nvSpPr>
+        <p:spPr/>
+        <p:txBody>
+          <a:bodyPr/>
+          <a:lstStyle/>
+          <a:p>
+            <a:r>
+              <a:rPr lang="ko-KR" altLang="en-US" dirty="0"/>
+              <a:t>개발팀</a:t>
+            </a:r>
+            <a:r>
+              <a:rPr lang="en-US" altLang="ko-KR" dirty="0"/>
+              <a:t>(</a:t>
+            </a:r>
+            <a:r>
+              <a:rPr lang="ko-KR" altLang="en-US" dirty="0"/>
+              <a:t>서재 중앙</a:t>
+            </a:r>
+            <a:r>
+              <a:rPr lang="en-US" altLang="ko-KR" dirty="0"/>
+              <a:t>)</a:t>
+            </a:r>
+            <a:endParaRPr lang="ko-KR" altLang="en-US" dirty="0"/>
+          </a:p>
+        </p:txBody>
+      </p:sp>
+      <p:sp>
+        <p:nvSpPr>
+          <p:cNvPr id="6" name="TextBox 5">
+            <a:extLst>
+              <a:ext uri="{FF2B5EF4-FFF2-40B4-BE49-F238E27FC236}">
+                <a16:creationId xmlns:a16="http://schemas.microsoft.com/office/drawing/2014/main" id="{8D412666-212D-4CB7-944D-A2F46FAD81FE}"/>
+              </a:ext>
+            </a:extLst>
+          </p:cNvPr>
+          <p:cNvSpPr txBox="1"/>
+          <p:nvPr/>
+        </p:nvSpPr>
+        <p:spPr>
+          <a:xfrm>
+            <a:off x="5239650" y="2553535"/>
+            <a:ext cx="5987332" cy="3139321"/>
+          </a:xfrm>
+          <a:prstGeom prst="rect">
+            <a:avLst/>
+          </a:prstGeom>
+          <a:noFill/>
+        </p:spPr>
+        <p:txBody>
+          <a:bodyPr wrap="square" rtlCol="0">
+            <a:spAutoFit/>
+          </a:bodyPr>
+          <a:lstStyle/>
+          <a:p>
+            <a:r>
+              <a:rPr lang="ko-KR" altLang="en-US" dirty="0"/>
+              <a:t>데스크 클릭 후 패널  </a:t>
+            </a:r>
+            <a:endParaRPr lang="en-US" altLang="ko-KR" dirty="0"/>
+          </a:p>
+          <a:p>
+            <a:endParaRPr lang="en-US" altLang="ko-KR" dirty="0"/>
+          </a:p>
+          <a:p>
+            <a:r>
+              <a:rPr lang="ko-KR" altLang="en-US" dirty="0"/>
+              <a:t>패널을 활성화 한 후 일기장과 퍼즐로 사용할 암호문의 자식 오브젝트들을 패널의 활성화와 같이 활성화</a:t>
+            </a:r>
+            <a:endParaRPr lang="en-US" altLang="ko-KR" dirty="0"/>
+          </a:p>
+          <a:p>
+            <a:endParaRPr lang="en-US" altLang="ko-KR" dirty="0"/>
+          </a:p>
+          <a:p>
+            <a:endParaRPr lang="en-US" altLang="ko-KR" dirty="0"/>
+          </a:p>
+          <a:p>
+            <a:r>
+              <a:rPr lang="ko-KR" altLang="en-US" dirty="0"/>
+              <a:t>예외 처리 </a:t>
+            </a:r>
+            <a:r>
+              <a:rPr lang="en-US" altLang="ko-KR" dirty="0"/>
+              <a:t>: </a:t>
+            </a:r>
+            <a:r>
+              <a:rPr lang="ko-KR" altLang="en-US" dirty="0"/>
+              <a:t>백스페이스와 마찬가지로 패널을 활성화 했을 경우 패널의 자식 오브젝트나 이미지가 아닌 이상 또한 데스크를 활성화 했을 때의 퍼즐이나 일기장을 제외한 다른 </a:t>
+            </a:r>
+            <a:r>
+              <a:rPr lang="ko-KR" altLang="en-US" dirty="0" err="1"/>
+              <a:t>오브젝트들와의</a:t>
+            </a:r>
+            <a:r>
+              <a:rPr lang="ko-KR" altLang="en-US" dirty="0"/>
+              <a:t> 상호작용은 </a:t>
+            </a:r>
+            <a:r>
+              <a:rPr lang="en-US" altLang="ko-KR" dirty="0"/>
+              <a:t>false</a:t>
+            </a:r>
+            <a:r>
+              <a:rPr lang="ko-KR" altLang="en-US" dirty="0"/>
+              <a:t>상태 상호 작용 이후 </a:t>
+            </a:r>
+            <a:r>
+              <a:rPr lang="en-US" altLang="ko-KR" dirty="0"/>
+              <a:t>true </a:t>
+            </a:r>
+            <a:r>
+              <a:rPr lang="ko-KR" altLang="en-US" dirty="0"/>
+              <a:t>상태로 전환하여 상호작용 가능하도록</a:t>
+            </a:r>
+            <a:endParaRPr lang="en-US" altLang="ko-KR" dirty="0"/>
+          </a:p>
+        </p:txBody>
+      </p:sp>
+      <p:pic>
+        <p:nvPicPr>
+          <p:cNvPr id="13" name="내용 개체 틀 12">
+            <a:extLst>
+              <a:ext uri="{FF2B5EF4-FFF2-40B4-BE49-F238E27FC236}">
+                <a16:creationId xmlns:a16="http://schemas.microsoft.com/office/drawing/2014/main" id="{E8CB12AD-1E4C-4795-AECA-84BD9FA7CF27}"/>
+              </a:ext>
+            </a:extLst>
+          </p:cNvPr>
+          <p:cNvPicPr>
+            <a:picLocks noGrp="1" noChangeAspect="1"/>
+          </p:cNvPicPr>
+          <p:nvPr>
+            <p:ph idx="1"/>
+          </p:nvPr>
+        </p:nvPicPr>
+        <p:blipFill>
+          <a:blip r:embed="rId2">
+            <a:extLst>
+              <a:ext uri="{28A0092B-C50C-407E-A947-70E740481C1C}">
+                <a14:useLocalDpi xmlns:a14="http://schemas.microsoft.com/office/drawing/2010/main" val="0"/>
+              </a:ext>
+            </a:extLst>
+          </a:blip>
+          <a:stretch>
+            <a:fillRect/>
+          </a:stretch>
+        </p:blipFill>
+        <p:spPr>
+          <a:xfrm>
+            <a:off x="583010" y="2162118"/>
+            <a:ext cx="4163919" cy="3601612"/>
+          </a:xfrm>
+        </p:spPr>
+      </p:pic>
+    </p:spTree>
+    <p:extLst>
+      <p:ext uri="{BB962C8B-B14F-4D97-AF65-F5344CB8AC3E}">
+        <p14:creationId xmlns:p14="http://schemas.microsoft.com/office/powerpoint/2010/main" val="737257333"/>
+      </p:ext>
+    </p:extLst>
+  </p:cSld>
+  <p:clrMapOvr>
+    <a:masterClrMapping/>
+  </p:clrMapOvr>
+</p:sld>
+</file>
+
+<file path=ppt/slides/slide14.xml><?xml version="1.0" encoding="utf-8"?>
+<p:sld xmlns:a="http://schemas.openxmlformats.org/drawingml/2006/main" xmlns:r="http://schemas.openxmlformats.org/officeDocument/2006/relationships" xmlns:p="http://schemas.openxmlformats.org/presentationml/2006/main">
+  <p:cSld>
+    <p:spTree>
+      <p:nvGrpSpPr>
+        <p:cNvPr id="1" name=""/>
+        <p:cNvGrpSpPr/>
+        <p:nvPr/>
+      </p:nvGrpSpPr>
+      <p:grpSpPr>
+        <a:xfrm>
+          <a:off x="0" y="0"/>
+          <a:ext cx="0" cy="0"/>
+          <a:chOff x="0" y="0"/>
+          <a:chExt cx="0" cy="0"/>
+        </a:xfrm>
+      </p:grpSpPr>
+      <p:sp>
+        <p:nvSpPr>
+          <p:cNvPr id="2" name="제목 1">
+            <a:extLst>
+              <a:ext uri="{FF2B5EF4-FFF2-40B4-BE49-F238E27FC236}">
+                <a16:creationId xmlns:a16="http://schemas.microsoft.com/office/drawing/2014/main" id="{9E86BC59-9D15-44F2-941C-A39A53D9C1CB}"/>
+              </a:ext>
+            </a:extLst>
+          </p:cNvPr>
+          <p:cNvSpPr>
+            <a:spLocks noGrp="1"/>
+          </p:cNvSpPr>
+          <p:nvPr>
+            <p:ph type="title"/>
+          </p:nvPr>
+        </p:nvSpPr>
+        <p:spPr/>
+        <p:txBody>
+          <a:bodyPr/>
+          <a:lstStyle/>
+          <a:p>
+            <a:r>
+              <a:rPr lang="ko-KR" altLang="en-US" dirty="0"/>
+              <a:t>개발팀</a:t>
+            </a:r>
+            <a:r>
+              <a:rPr lang="en-US" altLang="ko-KR" dirty="0"/>
+              <a:t>(</a:t>
+            </a:r>
+            <a:r>
+              <a:rPr lang="ko-KR" altLang="en-US" dirty="0"/>
+              <a:t>서재 중앙</a:t>
+            </a:r>
+            <a:r>
+              <a:rPr lang="en-US" altLang="ko-KR" dirty="0"/>
+              <a:t>)</a:t>
+            </a:r>
+            <a:endParaRPr lang="ko-KR" altLang="en-US" dirty="0"/>
+          </a:p>
+        </p:txBody>
+      </p:sp>
+      <p:sp>
+        <p:nvSpPr>
+          <p:cNvPr id="6" name="TextBox 5">
+            <a:extLst>
+              <a:ext uri="{FF2B5EF4-FFF2-40B4-BE49-F238E27FC236}">
+                <a16:creationId xmlns:a16="http://schemas.microsoft.com/office/drawing/2014/main" id="{8D412666-212D-4CB7-944D-A2F46FAD81FE}"/>
+              </a:ext>
+            </a:extLst>
+          </p:cNvPr>
+          <p:cNvSpPr txBox="1"/>
+          <p:nvPr/>
+        </p:nvSpPr>
+        <p:spPr>
+          <a:xfrm>
+            <a:off x="5239650" y="2553535"/>
+            <a:ext cx="5987332" cy="3139321"/>
+          </a:xfrm>
+          <a:prstGeom prst="rect">
+            <a:avLst/>
+          </a:prstGeom>
+          <a:noFill/>
+        </p:spPr>
+        <p:txBody>
+          <a:bodyPr wrap="square" rtlCol="0">
+            <a:spAutoFit/>
+          </a:bodyPr>
+          <a:lstStyle/>
+          <a:p>
+            <a:r>
+              <a:rPr lang="ko-KR" altLang="en-US" dirty="0"/>
+              <a:t>일기장 클릭  </a:t>
+            </a:r>
+            <a:endParaRPr lang="en-US" altLang="ko-KR" dirty="0"/>
+          </a:p>
+          <a:p>
+            <a:endParaRPr lang="en-US" altLang="ko-KR" dirty="0"/>
+          </a:p>
+          <a:p>
+            <a:r>
+              <a:rPr lang="ko-KR" altLang="en-US" dirty="0"/>
+              <a:t>일기장 클릭 이후 패널 활성화</a:t>
+            </a:r>
+            <a:endParaRPr lang="en-US" altLang="ko-KR" dirty="0"/>
+          </a:p>
+          <a:p>
+            <a:r>
+              <a:rPr lang="en-US" altLang="ko-KR" dirty="0"/>
+              <a:t>-&gt; </a:t>
+            </a:r>
+            <a:r>
+              <a:rPr lang="ko-KR" altLang="en-US" dirty="0"/>
+              <a:t>일기장의 내용이 나오고 넘기는 오브젝트 활성화 </a:t>
+            </a:r>
+            <a:r>
+              <a:rPr lang="en-US" altLang="ko-KR" dirty="0"/>
+              <a:t>(</a:t>
+            </a:r>
+            <a:r>
+              <a:rPr lang="ko-KR" altLang="en-US" dirty="0"/>
+              <a:t>화살표</a:t>
+            </a:r>
+            <a:r>
+              <a:rPr lang="en-US" altLang="ko-KR" dirty="0"/>
+              <a:t>)</a:t>
+            </a:r>
+          </a:p>
+          <a:p>
+            <a:endParaRPr lang="en-US" altLang="ko-KR" dirty="0"/>
+          </a:p>
+          <a:p>
+            <a:r>
+              <a:rPr lang="en-US" altLang="ko-KR" dirty="0"/>
+              <a:t>-&gt; </a:t>
+            </a:r>
+            <a:r>
+              <a:rPr lang="ko-KR" altLang="en-US" dirty="0"/>
+              <a:t>일기장을 다 넘기면 열쇠를 습득 가능하게 함 </a:t>
+            </a:r>
+            <a:r>
+              <a:rPr lang="en-US" altLang="ko-KR" dirty="0"/>
+              <a:t>(</a:t>
+            </a:r>
+            <a:r>
+              <a:rPr lang="ko-KR" altLang="en-US" dirty="0"/>
+              <a:t>인벤토리 추가</a:t>
+            </a:r>
+            <a:r>
+              <a:rPr lang="en-US" altLang="ko-KR" dirty="0"/>
+              <a:t>)</a:t>
+            </a:r>
+          </a:p>
+          <a:p>
+            <a:endParaRPr lang="en-US" altLang="ko-KR" dirty="0"/>
+          </a:p>
+          <a:p>
+            <a:r>
+              <a:rPr lang="en-US" altLang="ko-KR" dirty="0"/>
+              <a:t>-&gt; </a:t>
+            </a:r>
+            <a:r>
+              <a:rPr lang="ko-KR" altLang="en-US" dirty="0"/>
+              <a:t>일기장 </a:t>
+            </a:r>
+            <a:r>
+              <a:rPr lang="en-US" altLang="ko-KR" dirty="0"/>
+              <a:t>4~5</a:t>
+            </a:r>
+            <a:r>
+              <a:rPr lang="ko-KR" altLang="en-US" dirty="0"/>
+              <a:t>페이지 추가 </a:t>
+            </a:r>
+            <a:r>
+              <a:rPr lang="en-US" altLang="ko-KR" dirty="0"/>
+              <a:t>(</a:t>
+            </a:r>
+            <a:r>
+              <a:rPr lang="ko-KR" altLang="en-US" dirty="0"/>
+              <a:t>내용은 </a:t>
+            </a:r>
+            <a:r>
+              <a:rPr lang="ko-KR" altLang="en-US" dirty="0" err="1"/>
+              <a:t>내러티브</a:t>
+            </a:r>
+            <a:r>
+              <a:rPr lang="ko-KR" altLang="en-US" dirty="0"/>
+              <a:t> 확정 이후 추가</a:t>
+            </a:r>
+            <a:r>
+              <a:rPr lang="en-US" altLang="ko-KR" dirty="0"/>
+              <a:t>) </a:t>
+            </a:r>
+          </a:p>
+        </p:txBody>
+      </p:sp>
+      <p:pic>
+        <p:nvPicPr>
+          <p:cNvPr id="7" name="내용 개체 틀 6">
+            <a:extLst>
+              <a:ext uri="{FF2B5EF4-FFF2-40B4-BE49-F238E27FC236}">
+                <a16:creationId xmlns:a16="http://schemas.microsoft.com/office/drawing/2014/main" id="{CC12949B-22DF-43DB-BEDC-8F5B4BBF45A4}"/>
+              </a:ext>
+            </a:extLst>
+          </p:cNvPr>
+          <p:cNvPicPr>
+            <a:picLocks noGrp="1" noChangeAspect="1"/>
+          </p:cNvPicPr>
+          <p:nvPr>
+            <p:ph idx="1"/>
+          </p:nvPr>
+        </p:nvPicPr>
+        <p:blipFill>
+          <a:blip r:embed="rId2">
+            <a:extLst>
+              <a:ext uri="{28A0092B-C50C-407E-A947-70E740481C1C}">
+                <a14:useLocalDpi xmlns:a14="http://schemas.microsoft.com/office/drawing/2010/main" val="0"/>
+              </a:ext>
+            </a:extLst>
+          </a:blip>
+          <a:stretch>
+            <a:fillRect/>
+          </a:stretch>
+        </p:blipFill>
+        <p:spPr>
+          <a:xfrm>
+            <a:off x="1421626" y="2810338"/>
+            <a:ext cx="2971800" cy="2000250"/>
+          </a:xfrm>
+        </p:spPr>
+      </p:pic>
+    </p:spTree>
+    <p:extLst>
+      <p:ext uri="{BB962C8B-B14F-4D97-AF65-F5344CB8AC3E}">
+        <p14:creationId xmlns:p14="http://schemas.microsoft.com/office/powerpoint/2010/main" val="2348711516"/>
+      </p:ext>
+    </p:extLst>
+  </p:cSld>
+  <p:clrMapOvr>
+    <a:masterClrMapping/>
+  </p:clrMapOvr>
+</p:sld>
+</file>
+
+<file path=ppt/slides/slide15.xml><?xml version="1.0" encoding="utf-8"?>
+<p:sld xmlns:a="http://schemas.openxmlformats.org/drawingml/2006/main" xmlns:r="http://schemas.openxmlformats.org/officeDocument/2006/relationships" xmlns:p="http://schemas.openxmlformats.org/presentationml/2006/main">
+  <p:cSld>
+    <p:spTree>
+      <p:nvGrpSpPr>
+        <p:cNvPr id="1" name=""/>
+        <p:cNvGrpSpPr/>
+        <p:nvPr/>
+      </p:nvGrpSpPr>
+      <p:grpSpPr>
+        <a:xfrm>
+          <a:off x="0" y="0"/>
+          <a:ext cx="0" cy="0"/>
+          <a:chOff x="0" y="0"/>
+          <a:chExt cx="0" cy="0"/>
+        </a:xfrm>
+      </p:grpSpPr>
+      <p:sp>
+        <p:nvSpPr>
+          <p:cNvPr id="2" name="제목 1">
+            <a:extLst>
+              <a:ext uri="{FF2B5EF4-FFF2-40B4-BE49-F238E27FC236}">
+                <a16:creationId xmlns:a16="http://schemas.microsoft.com/office/drawing/2014/main" id="{9E86BC59-9D15-44F2-941C-A39A53D9C1CB}"/>
+              </a:ext>
+            </a:extLst>
+          </p:cNvPr>
+          <p:cNvSpPr>
+            <a:spLocks noGrp="1"/>
+          </p:cNvSpPr>
+          <p:nvPr>
+            <p:ph type="title"/>
+          </p:nvPr>
+        </p:nvSpPr>
+        <p:spPr/>
+        <p:txBody>
+          <a:bodyPr/>
+          <a:lstStyle/>
+          <a:p>
+            <a:r>
+              <a:rPr lang="ko-KR" altLang="en-US" dirty="0"/>
+              <a:t>개발팀</a:t>
+            </a:r>
+            <a:r>
+              <a:rPr lang="en-US" altLang="ko-KR" dirty="0"/>
+              <a:t>(</a:t>
+            </a:r>
+            <a:r>
+              <a:rPr lang="ko-KR" altLang="en-US" dirty="0"/>
+              <a:t>서재 중앙</a:t>
+            </a:r>
+            <a:r>
+              <a:rPr lang="en-US" altLang="ko-KR" dirty="0"/>
+              <a:t>)</a:t>
+            </a:r>
+            <a:endParaRPr lang="ko-KR" altLang="en-US" dirty="0"/>
+          </a:p>
+        </p:txBody>
+      </p:sp>
+      <p:sp>
+        <p:nvSpPr>
+          <p:cNvPr id="6" name="TextBox 5">
+            <a:extLst>
+              <a:ext uri="{FF2B5EF4-FFF2-40B4-BE49-F238E27FC236}">
+                <a16:creationId xmlns:a16="http://schemas.microsoft.com/office/drawing/2014/main" id="{8D412666-212D-4CB7-944D-A2F46FAD81FE}"/>
+              </a:ext>
+            </a:extLst>
+          </p:cNvPr>
+          <p:cNvSpPr txBox="1"/>
+          <p:nvPr/>
+        </p:nvSpPr>
+        <p:spPr>
+          <a:xfrm>
+            <a:off x="5239650" y="2553535"/>
+            <a:ext cx="5987332" cy="3139321"/>
+          </a:xfrm>
+          <a:prstGeom prst="rect">
+            <a:avLst/>
+          </a:prstGeom>
+          <a:noFill/>
+        </p:spPr>
+        <p:txBody>
+          <a:bodyPr wrap="square" rtlCol="0">
+            <a:spAutoFit/>
+          </a:bodyPr>
+          <a:lstStyle/>
+          <a:p>
+            <a:r>
+              <a:rPr lang="ko-KR" altLang="en-US" dirty="0"/>
+              <a:t>일기장 클릭  </a:t>
+            </a:r>
+            <a:endParaRPr lang="en-US" altLang="ko-KR" dirty="0"/>
+          </a:p>
+          <a:p>
+            <a:endParaRPr lang="en-US" altLang="ko-KR" dirty="0"/>
+          </a:p>
+          <a:p>
+            <a:r>
+              <a:rPr lang="ko-KR" altLang="en-US" dirty="0"/>
+              <a:t>일기장 클릭 이후 패널 활성화</a:t>
+            </a:r>
+            <a:endParaRPr lang="en-US" altLang="ko-KR" dirty="0"/>
+          </a:p>
+          <a:p>
+            <a:r>
+              <a:rPr lang="en-US" altLang="ko-KR" dirty="0"/>
+              <a:t>-&gt; </a:t>
+            </a:r>
+            <a:r>
+              <a:rPr lang="ko-KR" altLang="en-US" dirty="0"/>
+              <a:t>일기장의 내용이 나오고 넘기는 오브젝트 활성화 </a:t>
+            </a:r>
+            <a:r>
+              <a:rPr lang="en-US" altLang="ko-KR" dirty="0"/>
+              <a:t>(</a:t>
+            </a:r>
+            <a:r>
+              <a:rPr lang="ko-KR" altLang="en-US" dirty="0"/>
+              <a:t>화살표</a:t>
+            </a:r>
+            <a:r>
+              <a:rPr lang="en-US" altLang="ko-KR" dirty="0"/>
+              <a:t>)</a:t>
+            </a:r>
+          </a:p>
+          <a:p>
+            <a:endParaRPr lang="en-US" altLang="ko-KR" dirty="0"/>
+          </a:p>
+          <a:p>
+            <a:r>
+              <a:rPr lang="en-US" altLang="ko-KR" dirty="0"/>
+              <a:t>-&gt; </a:t>
+            </a:r>
+            <a:r>
+              <a:rPr lang="ko-KR" altLang="en-US" dirty="0"/>
+              <a:t>일기장을 다 넘기면 열쇠를 습득 가능하게 함 </a:t>
+            </a:r>
+            <a:r>
+              <a:rPr lang="en-US" altLang="ko-KR" dirty="0"/>
+              <a:t>(</a:t>
+            </a:r>
+            <a:r>
+              <a:rPr lang="ko-KR" altLang="en-US" dirty="0"/>
+              <a:t>인벤토리 추가</a:t>
+            </a:r>
+            <a:r>
+              <a:rPr lang="en-US" altLang="ko-KR" dirty="0"/>
+              <a:t>)</a:t>
+            </a:r>
+          </a:p>
+          <a:p>
+            <a:endParaRPr lang="en-US" altLang="ko-KR" dirty="0"/>
+          </a:p>
+          <a:p>
+            <a:r>
+              <a:rPr lang="en-US" altLang="ko-KR" dirty="0"/>
+              <a:t>-&gt; </a:t>
+            </a:r>
+            <a:r>
+              <a:rPr lang="ko-KR" altLang="en-US" dirty="0"/>
+              <a:t>일기장이기에 </a:t>
+            </a:r>
+            <a:r>
+              <a:rPr lang="en-US" altLang="ko-KR" dirty="0"/>
+              <a:t>4</a:t>
+            </a:r>
+            <a:r>
+              <a:rPr lang="ko-KR" altLang="en-US" dirty="0"/>
+              <a:t>페이지 정도의 일기가 들어갈 예정</a:t>
+            </a:r>
+            <a:r>
+              <a:rPr lang="en-US" altLang="ko-KR" dirty="0"/>
+              <a:t>.</a:t>
+            </a:r>
+            <a:r>
+              <a:rPr lang="ko-KR" altLang="en-US" dirty="0"/>
+              <a:t> 저택의 어느 정도의 분위기를 표현하기 위함</a:t>
+            </a:r>
+            <a:endParaRPr lang="en-US" altLang="ko-KR" dirty="0"/>
+          </a:p>
+        </p:txBody>
+      </p:sp>
+      <p:sp>
+        <p:nvSpPr>
+          <p:cNvPr id="4" name="내용 개체 틀 3">
+            <a:extLst>
+              <a:ext uri="{FF2B5EF4-FFF2-40B4-BE49-F238E27FC236}">
+                <a16:creationId xmlns:a16="http://schemas.microsoft.com/office/drawing/2014/main" id="{9B30CAB0-6B03-4613-925D-0F6F6BD52F4F}"/>
+              </a:ext>
+            </a:extLst>
+          </p:cNvPr>
+          <p:cNvSpPr>
+            <a:spLocks noGrp="1"/>
+          </p:cNvSpPr>
+          <p:nvPr>
+            <p:ph idx="1"/>
+          </p:nvPr>
+        </p:nvSpPr>
+        <p:spPr/>
+        <p:txBody>
+          <a:bodyPr>
+            <a:normAutofit/>
+          </a:bodyPr>
+          <a:lstStyle/>
+          <a:p>
+            <a:pPr marL="0" indent="0">
+              <a:buNone/>
+            </a:pPr>
+            <a:r>
+              <a:rPr lang="en-US" altLang="ko-KR" sz="2000" dirty="0"/>
+              <a:t>[</a:t>
+            </a:r>
+            <a:r>
+              <a:rPr lang="ko-KR" altLang="en-US" sz="2000" dirty="0"/>
+              <a:t>책을 펼쳤을 때의 참고 이미지</a:t>
+            </a:r>
+            <a:r>
+              <a:rPr lang="en-US" altLang="ko-KR" sz="2000" dirty="0"/>
+              <a:t>]</a:t>
+            </a:r>
+            <a:endParaRPr lang="ko-KR" altLang="en-US" sz="2000" dirty="0"/>
+          </a:p>
+        </p:txBody>
+      </p:sp>
+      <p:pic>
+        <p:nvPicPr>
+          <p:cNvPr id="8" name="그림 7">
+            <a:extLst>
+              <a:ext uri="{FF2B5EF4-FFF2-40B4-BE49-F238E27FC236}">
+                <a16:creationId xmlns:a16="http://schemas.microsoft.com/office/drawing/2014/main" id="{E3DCB647-2290-4E9E-8640-1637C240E398}"/>
+              </a:ext>
+            </a:extLst>
+          </p:cNvPr>
+          <p:cNvPicPr>
+            <a:picLocks noChangeAspect="1"/>
+          </p:cNvPicPr>
+          <p:nvPr/>
+        </p:nvPicPr>
+        <p:blipFill>
+          <a:blip r:embed="rId2">
+            <a:extLst>
+              <a:ext uri="{28A0092B-C50C-407E-A947-70E740481C1C}">
+                <a14:useLocalDpi xmlns:a14="http://schemas.microsoft.com/office/drawing/2010/main" val="0"/>
+              </a:ext>
+            </a:extLst>
+          </a:blip>
+          <a:stretch>
+            <a:fillRect/>
+          </a:stretch>
+        </p:blipFill>
+        <p:spPr>
+          <a:xfrm>
+            <a:off x="956807" y="2553535"/>
+            <a:ext cx="4036518" cy="2234908"/>
+          </a:xfrm>
+          <a:prstGeom prst="rect">
+            <a:avLst/>
+          </a:prstGeom>
+        </p:spPr>
+      </p:pic>
+    </p:spTree>
+    <p:extLst>
+      <p:ext uri="{BB962C8B-B14F-4D97-AF65-F5344CB8AC3E}">
+        <p14:creationId xmlns:p14="http://schemas.microsoft.com/office/powerpoint/2010/main" val="1673775839"/>
+      </p:ext>
+    </p:extLst>
+  </p:cSld>
+  <p:clrMapOvr>
+    <a:masterClrMapping/>
+  </p:clrMapOvr>
+</p:sld>
+</file>
+
+<file path=ppt/slides/slide16.xml><?xml version="1.0" encoding="utf-8"?>
+<p:sld xmlns:a="http://schemas.openxmlformats.org/drawingml/2006/main" xmlns:r="http://schemas.openxmlformats.org/officeDocument/2006/relationships" xmlns:p="http://schemas.openxmlformats.org/presentationml/2006/main">
+  <p:cSld>
+    <p:spTree>
+      <p:nvGrpSpPr>
+        <p:cNvPr id="1" name=""/>
+        <p:cNvGrpSpPr/>
+        <p:nvPr/>
+      </p:nvGrpSpPr>
+      <p:grpSpPr>
+        <a:xfrm>
+          <a:off x="0" y="0"/>
+          <a:ext cx="0" cy="0"/>
+          <a:chOff x="0" y="0"/>
+          <a:chExt cx="0" cy="0"/>
+        </a:xfrm>
+      </p:grpSpPr>
+      <p:sp>
+        <p:nvSpPr>
+          <p:cNvPr id="2" name="제목 1">
+            <a:extLst>
+              <a:ext uri="{FF2B5EF4-FFF2-40B4-BE49-F238E27FC236}">
+                <a16:creationId xmlns:a16="http://schemas.microsoft.com/office/drawing/2014/main" id="{9E86BC59-9D15-44F2-941C-A39A53D9C1CB}"/>
+              </a:ext>
+            </a:extLst>
+          </p:cNvPr>
+          <p:cNvSpPr>
+            <a:spLocks noGrp="1"/>
+          </p:cNvSpPr>
+          <p:nvPr>
+            <p:ph type="title"/>
+          </p:nvPr>
+        </p:nvSpPr>
+        <p:spPr/>
+        <p:txBody>
+          <a:bodyPr/>
+          <a:lstStyle/>
+          <a:p>
+            <a:r>
+              <a:rPr lang="ko-KR" altLang="en-US" dirty="0"/>
+              <a:t>개발팀</a:t>
+            </a:r>
+            <a:r>
+              <a:rPr lang="en-US" altLang="ko-KR" dirty="0"/>
+              <a:t>(</a:t>
+            </a:r>
+            <a:r>
+              <a:rPr lang="ko-KR" altLang="en-US" dirty="0"/>
+              <a:t>서재 중앙</a:t>
+            </a:r>
+            <a:r>
+              <a:rPr lang="en-US" altLang="ko-KR" dirty="0"/>
+              <a:t>)</a:t>
+            </a:r>
+            <a:endParaRPr lang="ko-KR" altLang="en-US" dirty="0"/>
+          </a:p>
+        </p:txBody>
+      </p:sp>
+      <p:pic>
+        <p:nvPicPr>
           <p:cNvPr id="8" name="내용 개체 틀 7">
             <a:extLst>
               <a:ext uri="{FF2B5EF4-FFF2-40B4-BE49-F238E27FC236}">
@@ -4022,7 +5798,250 @@
 </p:sld>
 </file>
 
-<file path=ppt/slides/slide13.xml><?xml version="1.0" encoding="utf-8"?>
+<file path=ppt/slides/slide17.xml><?xml version="1.0" encoding="utf-8"?>
+<p:sld xmlns:a="http://schemas.openxmlformats.org/drawingml/2006/main" xmlns:r="http://schemas.openxmlformats.org/officeDocument/2006/relationships" xmlns:p="http://schemas.openxmlformats.org/presentationml/2006/main">
+  <p:cSld>
+    <p:spTree>
+      <p:nvGrpSpPr>
+        <p:cNvPr id="1" name=""/>
+        <p:cNvGrpSpPr/>
+        <p:nvPr/>
+      </p:nvGrpSpPr>
+      <p:grpSpPr>
+        <a:xfrm>
+          <a:off x="0" y="0"/>
+          <a:ext cx="0" cy="0"/>
+          <a:chOff x="0" y="0"/>
+          <a:chExt cx="0" cy="0"/>
+        </a:xfrm>
+      </p:grpSpPr>
+      <p:sp>
+        <p:nvSpPr>
+          <p:cNvPr id="2" name="제목 1">
+            <a:extLst>
+              <a:ext uri="{FF2B5EF4-FFF2-40B4-BE49-F238E27FC236}">
+                <a16:creationId xmlns:a16="http://schemas.microsoft.com/office/drawing/2014/main" id="{9E86BC59-9D15-44F2-941C-A39A53D9C1CB}"/>
+              </a:ext>
+            </a:extLst>
+          </p:cNvPr>
+          <p:cNvSpPr>
+            <a:spLocks noGrp="1"/>
+          </p:cNvSpPr>
+          <p:nvPr>
+            <p:ph type="title"/>
+          </p:nvPr>
+        </p:nvSpPr>
+        <p:spPr/>
+        <p:txBody>
+          <a:bodyPr/>
+          <a:lstStyle/>
+          <a:p>
+            <a:r>
+              <a:rPr lang="ko-KR" altLang="en-US" dirty="0"/>
+              <a:t>개발팀</a:t>
+            </a:r>
+            <a:r>
+              <a:rPr lang="en-US" altLang="ko-KR" dirty="0"/>
+              <a:t> + </a:t>
+            </a:r>
+            <a:r>
+              <a:rPr lang="ko-KR" altLang="en-US" dirty="0" err="1"/>
+              <a:t>아트팀</a:t>
+            </a:r>
+            <a:r>
+              <a:rPr lang="en-US" altLang="ko-KR" dirty="0"/>
+              <a:t>(</a:t>
+            </a:r>
+            <a:r>
+              <a:rPr lang="ko-KR" altLang="en-US" dirty="0"/>
+              <a:t>서재 중앙</a:t>
+            </a:r>
+            <a:r>
+              <a:rPr lang="en-US" altLang="ko-KR" dirty="0"/>
+              <a:t>)</a:t>
+            </a:r>
+            <a:endParaRPr lang="ko-KR" altLang="en-US" dirty="0"/>
+          </a:p>
+        </p:txBody>
+      </p:sp>
+      <p:pic>
+        <p:nvPicPr>
+          <p:cNvPr id="8" name="내용 개체 틀 7">
+            <a:extLst>
+              <a:ext uri="{FF2B5EF4-FFF2-40B4-BE49-F238E27FC236}">
+                <a16:creationId xmlns:a16="http://schemas.microsoft.com/office/drawing/2014/main" id="{7BCFD2C5-5043-42FF-BC75-A28DABCF816F}"/>
+              </a:ext>
+            </a:extLst>
+          </p:cNvPr>
+          <p:cNvPicPr>
+            <a:picLocks noGrp="1" noChangeAspect="1"/>
+          </p:cNvPicPr>
+          <p:nvPr>
+            <p:ph idx="1"/>
+          </p:nvPr>
+        </p:nvPicPr>
+        <p:blipFill>
+          <a:blip r:embed="rId2">
+            <a:extLst>
+              <a:ext uri="{28A0092B-C50C-407E-A947-70E740481C1C}">
+                <a14:useLocalDpi xmlns:a14="http://schemas.microsoft.com/office/drawing/2010/main" val="0"/>
+              </a:ext>
+            </a:extLst>
+          </a:blip>
+          <a:stretch>
+            <a:fillRect/>
+          </a:stretch>
+        </p:blipFill>
+        <p:spPr>
+          <a:xfrm>
+            <a:off x="1072101" y="2631136"/>
+            <a:ext cx="2743200" cy="2343150"/>
+          </a:xfrm>
+        </p:spPr>
+      </p:pic>
+      <p:sp>
+        <p:nvSpPr>
+          <p:cNvPr id="10" name="TextBox 9">
+            <a:extLst>
+              <a:ext uri="{FF2B5EF4-FFF2-40B4-BE49-F238E27FC236}">
+                <a16:creationId xmlns:a16="http://schemas.microsoft.com/office/drawing/2014/main" id="{A4F74F6D-5F80-4B8C-8545-3D7F38148624}"/>
+              </a:ext>
+            </a:extLst>
+          </p:cNvPr>
+          <p:cNvSpPr txBox="1"/>
+          <p:nvPr/>
+        </p:nvSpPr>
+        <p:spPr>
+          <a:xfrm>
+            <a:off x="5041126" y="2544417"/>
+            <a:ext cx="6599583" cy="3139321"/>
+          </a:xfrm>
+          <a:prstGeom prst="rect">
+            <a:avLst/>
+          </a:prstGeom>
+          <a:noFill/>
+        </p:spPr>
+        <p:txBody>
+          <a:bodyPr wrap="square" rtlCol="0">
+            <a:spAutoFit/>
+          </a:bodyPr>
+          <a:lstStyle/>
+          <a:p>
+            <a:r>
+              <a:rPr lang="ko-KR" altLang="en-US" dirty="0"/>
+              <a:t>암호문</a:t>
+            </a:r>
+            <a:endParaRPr lang="en-US" altLang="ko-KR" dirty="0"/>
+          </a:p>
+          <a:p>
+            <a:endParaRPr lang="en-US" altLang="ko-KR" dirty="0"/>
+          </a:p>
+          <a:p>
+            <a:r>
+              <a:rPr lang="en-US" altLang="ko-KR" dirty="0"/>
+              <a:t>-&gt; </a:t>
+            </a:r>
+            <a:r>
+              <a:rPr lang="ko-KR" altLang="en-US" dirty="0"/>
+              <a:t>암호 패드의 위치 변경 </a:t>
+            </a:r>
+            <a:r>
+              <a:rPr lang="en-US" altLang="ko-KR" dirty="0"/>
+              <a:t>: </a:t>
+            </a:r>
+            <a:r>
+              <a:rPr lang="ko-KR" altLang="en-US" dirty="0"/>
+              <a:t>가정부 방</a:t>
+            </a:r>
+            <a:endParaRPr lang="en-US" altLang="ko-KR" dirty="0"/>
+          </a:p>
+          <a:p>
+            <a:r>
+              <a:rPr lang="en-US" altLang="ko-KR" dirty="0"/>
+              <a:t>-&gt; </a:t>
+            </a:r>
+            <a:r>
+              <a:rPr lang="ko-KR" altLang="en-US" dirty="0"/>
+              <a:t>가정부가 취미로 퍼즐을 풀었다는 설정</a:t>
+            </a:r>
+            <a:endParaRPr lang="en-US" altLang="ko-KR" dirty="0"/>
+          </a:p>
+          <a:p>
+            <a:r>
+              <a:rPr lang="en-US" altLang="ko-KR" dirty="0"/>
+              <a:t>-&gt; </a:t>
+            </a:r>
+            <a:r>
+              <a:rPr lang="ko-KR" altLang="en-US" dirty="0"/>
+              <a:t>가정부 방에 퍼즐풀이 책 추가 </a:t>
+            </a:r>
+            <a:r>
+              <a:rPr lang="en-US" altLang="ko-KR" dirty="0"/>
+              <a:t>(</a:t>
+            </a:r>
+            <a:r>
+              <a:rPr lang="ko-KR" altLang="en-US" dirty="0"/>
+              <a:t>기존 요리책에서 색만 변화</a:t>
+            </a:r>
+            <a:r>
+              <a:rPr lang="en-US" altLang="ko-KR" dirty="0"/>
+              <a:t>)</a:t>
+            </a:r>
+          </a:p>
+          <a:p>
+            <a:endParaRPr lang="en-US" altLang="ko-KR" dirty="0"/>
+          </a:p>
+          <a:p>
+            <a:r>
+              <a:rPr lang="ko-KR" altLang="en-US" dirty="0"/>
+              <a:t>사유 </a:t>
+            </a:r>
+            <a:r>
+              <a:rPr lang="en-US" altLang="ko-KR" dirty="0"/>
+              <a:t>: </a:t>
+            </a:r>
+            <a:r>
+              <a:rPr lang="ko-KR" altLang="en-US" dirty="0"/>
+              <a:t>일을 하는 서재의 책상에 퍼즐과 일기장 두 물건만 놓여 있는 것은 부자연스러움</a:t>
+            </a:r>
+            <a:r>
+              <a:rPr lang="en-US" altLang="ko-KR" dirty="0"/>
+              <a:t>. </a:t>
+            </a:r>
+          </a:p>
+          <a:p>
+            <a:endParaRPr lang="en-US" altLang="ko-KR" dirty="0"/>
+          </a:p>
+          <a:p>
+            <a:r>
+              <a:rPr lang="en-US" altLang="ko-KR" dirty="0"/>
+              <a:t>-&gt; </a:t>
+            </a:r>
+            <a:r>
+              <a:rPr lang="ko-KR" altLang="en-US" dirty="0"/>
+              <a:t>서재의 책상에서 저택 주인이 어떠한 직업을 가졌는지 보여주기 위함</a:t>
+            </a:r>
+            <a:r>
+              <a:rPr lang="en-US" altLang="ko-KR" dirty="0"/>
+              <a:t>.</a:t>
+            </a:r>
+          </a:p>
+        </p:txBody>
+      </p:sp>
+    </p:spTree>
+    <p:extLst>
+      <p:ext uri="{BB962C8B-B14F-4D97-AF65-F5344CB8AC3E}">
+        <p14:creationId xmlns:p14="http://schemas.microsoft.com/office/powerpoint/2010/main" val="3628337041"/>
+      </p:ext>
+    </p:extLst>
+  </p:cSld>
+  <p:clrMapOvr>
+    <a:masterClrMapping/>
+  </p:clrMapOvr>
+</p:sld>
+</file>
+
+<file path=ppt/slides/slide18.xml><?xml version="1.0" encoding="utf-8"?>
 <p:sld xmlns:a="http://schemas.openxmlformats.org/drawingml/2006/main" xmlns:r="http://schemas.openxmlformats.org/officeDocument/2006/relationships" xmlns:p="http://schemas.openxmlformats.org/presentationml/2006/main">
   <p:cSld>
     <p:spTree>
@@ -5294,144 +7313,30 @@
             </a:r>
             <a:r>
               <a:rPr lang="ko-KR" altLang="en-US" dirty="0"/>
-              <a:t>책장</a:t>
+              <a:t>서재 중앙</a:t>
+            </a:r>
+            <a:r>
+              <a:rPr lang="en-US" altLang="ko-KR" dirty="0"/>
+              <a:t>)(</a:t>
+            </a:r>
+            <a:r>
+              <a:rPr lang="ko-KR" altLang="en-US" dirty="0"/>
+              <a:t>수정 제안</a:t>
             </a:r>
             <a:r>
               <a:rPr lang="en-US" altLang="ko-KR" dirty="0"/>
               <a:t>)</a:t>
             </a:r>
             <a:endParaRPr lang="ko-KR" altLang="en-US" dirty="0"/>
-          </a:p>
-        </p:txBody>
-      </p:sp>
-      <p:sp>
-        <p:nvSpPr>
-          <p:cNvPr id="6" name="TextBox 5">
-            <a:extLst>
-              <a:ext uri="{FF2B5EF4-FFF2-40B4-BE49-F238E27FC236}">
-                <a16:creationId xmlns:a16="http://schemas.microsoft.com/office/drawing/2014/main" id="{8D412666-212D-4CB7-944D-A2F46FAD81FE}"/>
-              </a:ext>
-            </a:extLst>
-          </p:cNvPr>
-          <p:cNvSpPr txBox="1"/>
-          <p:nvPr/>
-        </p:nvSpPr>
-        <p:spPr>
-          <a:xfrm>
-            <a:off x="5239650" y="2353586"/>
-            <a:ext cx="5987332" cy="2862322"/>
-          </a:xfrm>
-          <a:prstGeom prst="rect">
-            <a:avLst/>
-          </a:prstGeom>
-          <a:noFill/>
-        </p:spPr>
-        <p:txBody>
-          <a:bodyPr wrap="square" rtlCol="0">
-            <a:spAutoFit/>
-          </a:bodyPr>
-          <a:lstStyle/>
-          <a:p>
-            <a:r>
-              <a:rPr lang="ko-KR" altLang="en-US" dirty="0"/>
-              <a:t>공통적으로 </a:t>
-            </a:r>
-            <a:r>
-              <a:rPr lang="ko-KR" altLang="en-US" dirty="0" err="1"/>
-              <a:t>백스패이스가</a:t>
-            </a:r>
-            <a:r>
-              <a:rPr lang="ko-KR" altLang="en-US" dirty="0"/>
-              <a:t> 들어가며 책장에는 여러가지 책이 있지만 퍼즐을 위해 빨간색</a:t>
-            </a:r>
-            <a:r>
-              <a:rPr lang="en-US" altLang="ko-KR" dirty="0"/>
-              <a:t>, </a:t>
-            </a:r>
-            <a:r>
-              <a:rPr lang="ko-KR" altLang="en-US" dirty="0"/>
-              <a:t>파란색</a:t>
-            </a:r>
-            <a:r>
-              <a:rPr lang="en-US" altLang="ko-KR" dirty="0"/>
-              <a:t>, </a:t>
-            </a:r>
-            <a:r>
-              <a:rPr lang="ko-KR" altLang="en-US" dirty="0"/>
-              <a:t>녹색의 책이 들어가며 다른 색깔의 책은 전부 흰색 아니면 갈색으로 들어갈 예정</a:t>
-            </a:r>
-            <a:endParaRPr lang="en-US" altLang="ko-KR" dirty="0"/>
-          </a:p>
-          <a:p>
-            <a:endParaRPr lang="en-US" altLang="ko-KR" dirty="0"/>
-          </a:p>
-          <a:p>
-            <a:r>
-              <a:rPr lang="ko-KR" altLang="en-US" dirty="0"/>
-              <a:t>책의 색깔은 추후 논의 후 업데이트 예정</a:t>
-            </a:r>
-            <a:endParaRPr lang="en-US" altLang="ko-KR" dirty="0"/>
-          </a:p>
-          <a:p>
-            <a:r>
-              <a:rPr lang="en-US" altLang="ko-KR" dirty="0"/>
-              <a:t>-&gt; </a:t>
-            </a:r>
-            <a:r>
-              <a:rPr lang="ko-KR" altLang="en-US" dirty="0"/>
-              <a:t>책장당 빨간색</a:t>
-            </a:r>
-            <a:r>
-              <a:rPr lang="en-US" altLang="ko-KR" dirty="0"/>
-              <a:t>, </a:t>
-            </a:r>
-            <a:r>
-              <a:rPr lang="ko-KR" altLang="en-US" dirty="0"/>
-              <a:t>파란색</a:t>
-            </a:r>
-            <a:r>
-              <a:rPr lang="en-US" altLang="ko-KR" dirty="0"/>
-              <a:t>, </a:t>
-            </a:r>
-            <a:r>
-              <a:rPr lang="ko-KR" altLang="en-US" dirty="0"/>
-              <a:t>녹색의 책들은 사칙연산을 했을 때 </a:t>
-            </a:r>
-            <a:r>
-              <a:rPr lang="en-US" altLang="ko-KR" dirty="0"/>
-              <a:t>0~9</a:t>
-            </a:r>
-            <a:r>
-              <a:rPr lang="ko-KR" altLang="en-US" dirty="0"/>
-              <a:t>사이의 수이며 음수나 </a:t>
-            </a:r>
-            <a:r>
-              <a:rPr lang="en-US" altLang="ko-KR" dirty="0"/>
-              <a:t>10</a:t>
-            </a:r>
-            <a:r>
-              <a:rPr lang="ko-KR" altLang="en-US" dirty="0"/>
-              <a:t> 이상의 숫자가 될 수 없음</a:t>
-            </a:r>
-            <a:r>
-              <a:rPr lang="en-US" altLang="ko-KR" dirty="0"/>
-              <a:t>.</a:t>
-            </a:r>
-          </a:p>
-          <a:p>
-            <a:r>
-              <a:rPr lang="en-US" altLang="ko-KR" dirty="0"/>
-              <a:t> </a:t>
-            </a:r>
           </a:p>
         </p:txBody>
       </p:sp>
       <p:pic>
         <p:nvPicPr>
-          <p:cNvPr id="13" name="내용 개체 틀 12">
-            <a:extLst>
-              <a:ext uri="{FF2B5EF4-FFF2-40B4-BE49-F238E27FC236}">
-                <a16:creationId xmlns:a16="http://schemas.microsoft.com/office/drawing/2014/main" id="{05B14CE2-EF0F-40C5-B894-91F2173A0C96}"/>
+          <p:cNvPr id="5" name="내용 개체 틀 4">
+            <a:extLst>
+              <a:ext uri="{FF2B5EF4-FFF2-40B4-BE49-F238E27FC236}">
+                <a16:creationId xmlns:a16="http://schemas.microsoft.com/office/drawing/2014/main" id="{B32C2D8B-EB5C-4880-A2F5-4687A9F9B249}"/>
               </a:ext>
             </a:extLst>
           </p:cNvPr>
@@ -5456,17 +7361,108 @@
         </p:blipFill>
         <p:spPr>
           <a:xfrm>
-            <a:off x="228801" y="2066840"/>
-            <a:ext cx="5010849" cy="3105583"/>
+            <a:off x="375489" y="2573048"/>
+            <a:ext cx="4218069" cy="2372664"/>
           </a:xfrm>
         </p:spPr>
       </p:pic>
       <p:sp>
         <p:nvSpPr>
-          <p:cNvPr id="14" name="직사각형 13">
-            <a:extLst>
-              <a:ext uri="{FF2B5EF4-FFF2-40B4-BE49-F238E27FC236}">
-                <a16:creationId xmlns:a16="http://schemas.microsoft.com/office/drawing/2014/main" id="{0D5A1D76-CB61-41A6-8647-5E6559DD2608}"/>
+          <p:cNvPr id="6" name="TextBox 5">
+            <a:extLst>
+              <a:ext uri="{FF2B5EF4-FFF2-40B4-BE49-F238E27FC236}">
+                <a16:creationId xmlns:a16="http://schemas.microsoft.com/office/drawing/2014/main" id="{8D412666-212D-4CB7-944D-A2F46FAD81FE}"/>
+              </a:ext>
+            </a:extLst>
+          </p:cNvPr>
+          <p:cNvSpPr txBox="1"/>
+          <p:nvPr/>
+        </p:nvSpPr>
+        <p:spPr>
+          <a:xfrm>
+            <a:off x="5239649" y="2553535"/>
+            <a:ext cx="6324197" cy="1754326"/>
+          </a:xfrm>
+          <a:prstGeom prst="rect">
+            <a:avLst/>
+          </a:prstGeom>
+          <a:noFill/>
+        </p:spPr>
+        <p:txBody>
+          <a:bodyPr wrap="square" rtlCol="0">
+            <a:spAutoFit/>
+          </a:bodyPr>
+          <a:lstStyle/>
+          <a:p>
+            <a:r>
+              <a:rPr lang="ko-KR" altLang="en-US" dirty="0"/>
+              <a:t> 서재의 책상 치고는 너무 아무것도 없음</a:t>
+            </a:r>
+            <a:r>
+              <a:rPr lang="en-US" altLang="ko-KR" dirty="0"/>
+              <a:t>.</a:t>
+            </a:r>
+            <a:r>
+              <a:rPr lang="ko-KR" altLang="en-US" dirty="0"/>
+              <a:t> 일을 하는 책상이라고 느껴지지 않음</a:t>
+            </a:r>
+            <a:endParaRPr lang="en-US" altLang="ko-KR" dirty="0"/>
+          </a:p>
+          <a:p>
+            <a:endParaRPr lang="en-US" altLang="ko-KR" dirty="0"/>
+          </a:p>
+          <a:p>
+            <a:r>
+              <a:rPr lang="en-US" altLang="ko-KR" dirty="0"/>
+              <a:t>-&gt; </a:t>
+            </a:r>
+            <a:r>
+              <a:rPr lang="ko-KR" altLang="en-US" dirty="0"/>
+              <a:t>저택에 있을 법 한 책상으로 수정 제안</a:t>
+            </a:r>
+            <a:endParaRPr lang="en-US" altLang="ko-KR" dirty="0"/>
+          </a:p>
+          <a:p>
+            <a:endParaRPr lang="en-US" altLang="ko-KR" dirty="0"/>
+          </a:p>
+          <a:p>
+            <a:r>
+              <a:rPr lang="en-US" altLang="ko-KR" dirty="0"/>
+              <a:t>[</a:t>
+            </a:r>
+            <a:r>
+              <a:rPr lang="ko-KR" altLang="en-US" dirty="0"/>
+              <a:t>수정안 참고 이미지</a:t>
+            </a:r>
+            <a:r>
+              <a:rPr lang="en-US" altLang="ko-KR" dirty="0"/>
+              <a:t>]</a:t>
+            </a:r>
+            <a:r>
+              <a:rPr lang="ko-KR" altLang="en-US" dirty="0"/>
+              <a:t>                </a:t>
+            </a:r>
+            <a:r>
+              <a:rPr lang="en-US" altLang="ko-KR" dirty="0"/>
+              <a:t>[</a:t>
+            </a:r>
+            <a:r>
+              <a:rPr lang="ko-KR" altLang="en-US" dirty="0"/>
+              <a:t>책상을 클릭하였을 경우</a:t>
+            </a:r>
+            <a:r>
+              <a:rPr lang="en-US" altLang="ko-KR" dirty="0"/>
+              <a:t>]</a:t>
+            </a:r>
+          </a:p>
+        </p:txBody>
+      </p:sp>
+      <p:sp>
+        <p:nvSpPr>
+          <p:cNvPr id="3" name="직사각형 2">
+            <a:extLst>
+              <a:ext uri="{FF2B5EF4-FFF2-40B4-BE49-F238E27FC236}">
+                <a16:creationId xmlns:a16="http://schemas.microsoft.com/office/drawing/2014/main" id="{D03CD479-77EA-433F-8BBD-CD6DA4F74E29}"/>
               </a:ext>
             </a:extLst>
           </p:cNvPr>
@@ -5475,8 +7471,8 @@
         </p:nvSpPr>
         <p:spPr>
           <a:xfrm>
-            <a:off x="228800" y="1573859"/>
-            <a:ext cx="733308" cy="779727"/>
+            <a:off x="461176" y="2679590"/>
+            <a:ext cx="477078" cy="453224"/>
           </a:xfrm>
           <a:prstGeom prst="rect">
             <a:avLst/>
@@ -5507,10 +7503,312 @@
           </a:p>
         </p:txBody>
       </p:sp>
+      <p:sp>
+        <p:nvSpPr>
+          <p:cNvPr id="4" name="화살표: 오른쪽 3">
+            <a:extLst>
+              <a:ext uri="{FF2B5EF4-FFF2-40B4-BE49-F238E27FC236}">
+                <a16:creationId xmlns:a16="http://schemas.microsoft.com/office/drawing/2014/main" id="{6C1D3FFD-91D7-4E13-8259-AAD1757BA846}"/>
+              </a:ext>
+            </a:extLst>
+          </p:cNvPr>
+          <p:cNvSpPr/>
+          <p:nvPr/>
+        </p:nvSpPr>
+        <p:spPr>
+          <a:xfrm>
+            <a:off x="3808675" y="3808675"/>
+            <a:ext cx="620202" cy="357808"/>
+          </a:xfrm>
+          <a:prstGeom prst="rightArrow">
+            <a:avLst/>
+          </a:prstGeom>
+        </p:spPr>
+        <p:style>
+          <a:lnRef idx="2">
+            <a:schemeClr val="accent1">
+              <a:shade val="50000"/>
+            </a:schemeClr>
+          </a:lnRef>
+          <a:fillRef idx="1">
+            <a:schemeClr val="accent1"/>
+          </a:fillRef>
+          <a:effectRef idx="0">
+            <a:schemeClr val="accent1"/>
+          </a:effectRef>
+          <a:fontRef idx="minor">
+            <a:schemeClr val="lt1"/>
+          </a:fontRef>
+        </p:style>
+        <p:txBody>
+          <a:bodyPr rtlCol="0" anchor="ctr"/>
+          <a:lstStyle/>
+          <a:p>
+            <a:pPr algn="ctr"/>
+            <a:endParaRPr lang="ko-KR" altLang="en-US"/>
+          </a:p>
+        </p:txBody>
+      </p:sp>
+      <p:sp>
+        <p:nvSpPr>
+          <p:cNvPr id="7" name="화살표: 아래쪽 6">
+            <a:extLst>
+              <a:ext uri="{FF2B5EF4-FFF2-40B4-BE49-F238E27FC236}">
+                <a16:creationId xmlns:a16="http://schemas.microsoft.com/office/drawing/2014/main" id="{5EEB3AF9-EC6D-4C1E-A4AA-6F674E97F7F3}"/>
+              </a:ext>
+            </a:extLst>
+          </p:cNvPr>
+          <p:cNvSpPr/>
+          <p:nvPr/>
+        </p:nvSpPr>
+        <p:spPr>
+          <a:xfrm>
+            <a:off x="2289716" y="4317558"/>
+            <a:ext cx="389614" cy="628154"/>
+          </a:xfrm>
+          <a:prstGeom prst="downArrow">
+            <a:avLst/>
+          </a:prstGeom>
+        </p:spPr>
+        <p:style>
+          <a:lnRef idx="2">
+            <a:schemeClr val="accent1">
+              <a:shade val="50000"/>
+            </a:schemeClr>
+          </a:lnRef>
+          <a:fillRef idx="1">
+            <a:schemeClr val="accent1"/>
+          </a:fillRef>
+          <a:effectRef idx="0">
+            <a:schemeClr val="accent1"/>
+          </a:effectRef>
+          <a:fontRef idx="minor">
+            <a:schemeClr val="lt1"/>
+          </a:fontRef>
+        </p:style>
+        <p:txBody>
+          <a:bodyPr rtlCol="0" anchor="ctr"/>
+          <a:lstStyle/>
+          <a:p>
+            <a:pPr algn="ctr"/>
+            <a:endParaRPr lang="ko-KR" altLang="en-US"/>
+          </a:p>
+        </p:txBody>
+      </p:sp>
+      <p:sp>
+        <p:nvSpPr>
+          <p:cNvPr id="8" name="화살표: 아래쪽 7">
+            <a:extLst>
+              <a:ext uri="{FF2B5EF4-FFF2-40B4-BE49-F238E27FC236}">
+                <a16:creationId xmlns:a16="http://schemas.microsoft.com/office/drawing/2014/main" id="{6F431507-E024-44DE-BB3E-825853B3C7EB}"/>
+              </a:ext>
+            </a:extLst>
+          </p:cNvPr>
+          <p:cNvSpPr/>
+          <p:nvPr/>
+        </p:nvSpPr>
+        <p:spPr>
+          <a:xfrm rot="10800000">
+            <a:off x="2289716" y="2906202"/>
+            <a:ext cx="389614" cy="628154"/>
+          </a:xfrm>
+          <a:prstGeom prst="downArrow">
+            <a:avLst/>
+          </a:prstGeom>
+        </p:spPr>
+        <p:style>
+          <a:lnRef idx="2">
+            <a:schemeClr val="accent1">
+              <a:shade val="50000"/>
+            </a:schemeClr>
+          </a:lnRef>
+          <a:fillRef idx="1">
+            <a:schemeClr val="accent1"/>
+          </a:fillRef>
+          <a:effectRef idx="0">
+            <a:schemeClr val="accent1"/>
+          </a:effectRef>
+          <a:fontRef idx="minor">
+            <a:schemeClr val="lt1"/>
+          </a:fontRef>
+        </p:style>
+        <p:txBody>
+          <a:bodyPr rtlCol="0" anchor="ctr"/>
+          <a:lstStyle/>
+          <a:p>
+            <a:pPr algn="ctr"/>
+            <a:endParaRPr lang="ko-KR" altLang="en-US"/>
+          </a:p>
+        </p:txBody>
+      </p:sp>
+      <p:sp>
+        <p:nvSpPr>
+          <p:cNvPr id="9" name="화살표: 오른쪽 8">
+            <a:extLst>
+              <a:ext uri="{FF2B5EF4-FFF2-40B4-BE49-F238E27FC236}">
+                <a16:creationId xmlns:a16="http://schemas.microsoft.com/office/drawing/2014/main" id="{C7832BD4-B878-4B87-BA5B-1B8AA36913E2}"/>
+              </a:ext>
+            </a:extLst>
+          </p:cNvPr>
+          <p:cNvSpPr/>
+          <p:nvPr/>
+        </p:nvSpPr>
+        <p:spPr>
+          <a:xfrm rot="10800000">
+            <a:off x="628153" y="3707697"/>
+            <a:ext cx="620202" cy="357808"/>
+          </a:xfrm>
+          <a:prstGeom prst="rightArrow">
+            <a:avLst/>
+          </a:prstGeom>
+        </p:spPr>
+        <p:style>
+          <a:lnRef idx="2">
+            <a:schemeClr val="accent1">
+              <a:shade val="50000"/>
+            </a:schemeClr>
+          </a:lnRef>
+          <a:fillRef idx="1">
+            <a:schemeClr val="accent1"/>
+          </a:fillRef>
+          <a:effectRef idx="0">
+            <a:schemeClr val="accent1"/>
+          </a:effectRef>
+          <a:fontRef idx="minor">
+            <a:schemeClr val="lt1"/>
+          </a:fontRef>
+        </p:style>
+        <p:txBody>
+          <a:bodyPr rtlCol="0" anchor="ctr"/>
+          <a:lstStyle/>
+          <a:p>
+            <a:pPr algn="ctr"/>
+            <a:endParaRPr lang="ko-KR" altLang="en-US"/>
+          </a:p>
+        </p:txBody>
+      </p:sp>
+      <p:pic>
+        <p:nvPicPr>
+          <p:cNvPr id="11" name="그림 10">
+            <a:extLst>
+              <a:ext uri="{FF2B5EF4-FFF2-40B4-BE49-F238E27FC236}">
+                <a16:creationId xmlns:a16="http://schemas.microsoft.com/office/drawing/2014/main" id="{F4E5F767-B22C-442F-A60F-7AB3F07F89A3}"/>
+              </a:ext>
+            </a:extLst>
+          </p:cNvPr>
+          <p:cNvPicPr>
+            <a:picLocks noChangeAspect="1"/>
+          </p:cNvPicPr>
+          <p:nvPr/>
+        </p:nvPicPr>
+        <p:blipFill>
+          <a:blip r:embed="rId3">
+            <a:extLst>
+              <a:ext uri="{28A0092B-C50C-407E-A947-70E740481C1C}">
+                <a14:useLocalDpi xmlns:a14="http://schemas.microsoft.com/office/drawing/2010/main" val="0"/>
+              </a:ext>
+            </a:extLst>
+          </a:blip>
+          <a:stretch>
+            <a:fillRect/>
+          </a:stretch>
+        </p:blipFill>
+        <p:spPr>
+          <a:xfrm>
+            <a:off x="5311308" y="4317558"/>
+            <a:ext cx="2392954" cy="2286205"/>
+          </a:xfrm>
+          <a:prstGeom prst="rect">
+            <a:avLst/>
+          </a:prstGeom>
+        </p:spPr>
+      </p:pic>
+      <p:sp>
+        <p:nvSpPr>
+          <p:cNvPr id="12" name="화살표: 오른쪽 11">
+            <a:extLst>
+              <a:ext uri="{FF2B5EF4-FFF2-40B4-BE49-F238E27FC236}">
+                <a16:creationId xmlns:a16="http://schemas.microsoft.com/office/drawing/2014/main" id="{F291899B-7D64-45E5-9AD4-837377A17956}"/>
+              </a:ext>
+            </a:extLst>
+          </p:cNvPr>
+          <p:cNvSpPr/>
+          <p:nvPr/>
+        </p:nvSpPr>
+        <p:spPr>
+          <a:xfrm>
+            <a:off x="7919239" y="5176299"/>
+            <a:ext cx="628153" cy="318052"/>
+          </a:xfrm>
+          <a:prstGeom prst="rightArrow">
+            <a:avLst/>
+          </a:prstGeom>
+        </p:spPr>
+        <p:style>
+          <a:lnRef idx="2">
+            <a:schemeClr val="accent1">
+              <a:shade val="50000"/>
+            </a:schemeClr>
+          </a:lnRef>
+          <a:fillRef idx="1">
+            <a:schemeClr val="accent1"/>
+          </a:fillRef>
+          <a:effectRef idx="0">
+            <a:schemeClr val="accent1"/>
+          </a:effectRef>
+          <a:fontRef idx="minor">
+            <a:schemeClr val="lt1"/>
+          </a:fontRef>
+        </p:style>
+        <p:txBody>
+          <a:bodyPr rtlCol="0" anchor="ctr"/>
+          <a:lstStyle/>
+          <a:p>
+            <a:pPr algn="ctr"/>
+            <a:endParaRPr lang="ko-KR" altLang="en-US"/>
+          </a:p>
+        </p:txBody>
+      </p:sp>
+      <p:pic>
+        <p:nvPicPr>
+          <p:cNvPr id="14" name="그림 13">
+            <a:extLst>
+              <a:ext uri="{FF2B5EF4-FFF2-40B4-BE49-F238E27FC236}">
+                <a16:creationId xmlns:a16="http://schemas.microsoft.com/office/drawing/2014/main" id="{DC2488B1-F09D-405E-957C-746669267618}"/>
+              </a:ext>
+            </a:extLst>
+          </p:cNvPr>
+          <p:cNvPicPr>
+            <a:picLocks noChangeAspect="1"/>
+          </p:cNvPicPr>
+          <p:nvPr/>
+        </p:nvPicPr>
+        <p:blipFill>
+          <a:blip r:embed="rId4">
+            <a:extLst>
+              <a:ext uri="{28A0092B-C50C-407E-A947-70E740481C1C}">
+                <a14:useLocalDpi xmlns:a14="http://schemas.microsoft.com/office/drawing/2010/main" val="0"/>
+              </a:ext>
+            </a:extLst>
+          </a:blip>
+          <a:stretch>
+            <a:fillRect/>
+          </a:stretch>
+        </p:blipFill>
+        <p:spPr>
+          <a:xfrm>
+            <a:off x="8893729" y="4777501"/>
+            <a:ext cx="2460071" cy="1366318"/>
+          </a:xfrm>
+          <a:prstGeom prst="rect">
+            <a:avLst/>
+          </a:prstGeom>
+        </p:spPr>
+      </p:pic>
     </p:spTree>
     <p:extLst>
       <p:ext uri="{BB962C8B-B14F-4D97-AF65-F5344CB8AC3E}">
-        <p14:creationId xmlns:p14="http://schemas.microsoft.com/office/powerpoint/2010/main" val="2947882958"/>
+        <p14:creationId xmlns:p14="http://schemas.microsoft.com/office/powerpoint/2010/main" val="3816399619"/>
       </p:ext>
     </p:extLst>
   </p:cSld>
@@ -5559,6 +7857,18 @@
           <a:lstStyle/>
           <a:p>
             <a:r>
+              <a:rPr lang="ko-KR" altLang="en-US" dirty="0" err="1"/>
+              <a:t>아트팀</a:t>
+            </a:r>
+            <a:r>
+              <a:rPr lang="ko-KR" altLang="en-US" dirty="0"/>
+              <a:t> </a:t>
+            </a:r>
+            <a:r>
+              <a:rPr lang="en-US" altLang="ko-KR" dirty="0"/>
+              <a:t>+ </a:t>
+            </a:r>
+            <a:r>
               <a:rPr lang="ko-KR" altLang="en-US" dirty="0"/>
               <a:t>개발팀</a:t>
             </a:r>
@@ -5569,6 +7879,14 @@
             <a:r>
               <a:rPr lang="ko-KR" altLang="en-US" dirty="0"/>
               <a:t>서재 중앙</a:t>
+            </a:r>
+            <a:r>
+              <a:rPr lang="en-US" altLang="ko-KR" dirty="0"/>
+              <a:t>)(</a:t>
+            </a:r>
+            <a:r>
+              <a:rPr lang="ko-KR" altLang="en-US" dirty="0"/>
+              <a:t>수정 제안</a:t>
             </a:r>
             <a:r>
               <a:rPr lang="en-US" altLang="ko-KR" dirty="0"/>
@@ -5627,8 +7945,8 @@
         </p:nvSpPr>
         <p:spPr>
           <a:xfrm>
-            <a:off x="5239650" y="2553535"/>
-            <a:ext cx="5987332" cy="3416320"/>
+            <a:off x="5239649" y="2553535"/>
+            <a:ext cx="6324197" cy="1754326"/>
           </a:xfrm>
           <a:prstGeom prst="rect">
             <a:avLst/>
@@ -5641,21 +7959,13 @@
           </a:bodyPr>
           <a:lstStyle/>
           <a:p>
-            <a:endParaRPr lang="en-US" altLang="ko-KR" dirty="0"/>
-          </a:p>
-          <a:p>
-            <a:r>
-              <a:rPr lang="ko-KR" altLang="en-US" dirty="0"/>
-              <a:t>왼쪽 위의 </a:t>
-            </a:r>
-            <a:r>
-              <a:rPr lang="ko-KR" altLang="en-US" dirty="0" err="1"/>
-              <a:t>백스패이스</a:t>
-            </a:r>
-            <a:r>
-              <a:rPr lang="ko-KR" altLang="en-US" dirty="0"/>
-              <a:t> </a:t>
-            </a:r>
+            <a:r>
+              <a:rPr lang="ko-KR" altLang="en-US" dirty="0"/>
+              <a:t>수정 제안의 이유</a:t>
+            </a:r>
+            <a:endParaRPr lang="en-US" altLang="ko-KR" dirty="0"/>
+          </a:p>
+          <a:p>
             <a:endParaRPr lang="en-US" altLang="ko-KR" dirty="0"/>
           </a:p>
           <a:p>
@@ -5665,9 +7975,12 @@
             </a:r>
             <a:r>
               <a:rPr lang="ko-KR" altLang="en-US" dirty="0"/>
-              <a:t>클릭되었을 경우 메뉴를 띄우며 </a:t>
-            </a:r>
-            <a:endParaRPr lang="en-US" altLang="ko-KR" dirty="0"/>
+              <a:t>책상 클릭 이후 퍼즐을 푼다</a:t>
+            </a:r>
+            <a:r>
+              <a:rPr lang="en-US" altLang="ko-KR" dirty="0"/>
+              <a:t>(X), </a:t>
+            </a:r>
           </a:p>
           <a:p>
             <a:r>
@@ -5676,89 +7989,45 @@
             </a:r>
             <a:r>
               <a:rPr lang="ko-KR" altLang="en-US" dirty="0"/>
-              <a:t>나간다 클릭 </a:t>
-            </a:r>
-            <a:r>
-              <a:rPr lang="en-US" altLang="ko-KR" dirty="0"/>
-              <a:t>== </a:t>
-            </a:r>
-            <a:r>
-              <a:rPr lang="ko-KR" altLang="en-US" dirty="0"/>
-              <a:t>복도 씬</a:t>
-            </a:r>
-            <a:r>
-              <a:rPr lang="en-US" altLang="ko-KR" dirty="0"/>
-              <a:t>(HallWayRight2</a:t>
-            </a:r>
-            <a:r>
-              <a:rPr lang="ko-KR" altLang="en-US" dirty="0"/>
-              <a:t>를 로드</a:t>
-            </a:r>
-            <a:r>
-              <a:rPr lang="en-US" altLang="ko-KR" dirty="0"/>
-              <a:t>)</a:t>
-            </a:r>
-          </a:p>
-          <a:p>
-            <a:r>
-              <a:rPr lang="en-US" altLang="ko-KR" dirty="0"/>
-              <a:t>-&gt; </a:t>
-            </a:r>
-            <a:r>
-              <a:rPr lang="ko-KR" altLang="en-US" dirty="0"/>
-              <a:t>나가지 않는다 클릭 </a:t>
-            </a:r>
-            <a:r>
-              <a:rPr lang="en-US" altLang="ko-KR" dirty="0"/>
-              <a:t>== </a:t>
-            </a:r>
-            <a:r>
-              <a:rPr lang="ko-KR" altLang="en-US" dirty="0"/>
-              <a:t>좀 더 둘러 본다는 대사 출력</a:t>
-            </a:r>
-            <a:endParaRPr lang="en-US" altLang="ko-KR" dirty="0"/>
-          </a:p>
-          <a:p>
-            <a:endParaRPr lang="en-US" altLang="ko-KR" dirty="0"/>
-          </a:p>
-          <a:p>
-            <a:r>
-              <a:rPr lang="ko-KR" altLang="en-US" dirty="0"/>
-              <a:t>예외 처리 </a:t>
-            </a:r>
-            <a:endParaRPr lang="en-US" altLang="ko-KR" dirty="0"/>
-          </a:p>
-          <a:p>
-            <a:r>
-              <a:rPr lang="en-US" altLang="ko-KR" dirty="0"/>
-              <a:t>-&gt; </a:t>
-            </a:r>
-            <a:r>
-              <a:rPr lang="ko-KR" altLang="en-US" dirty="0"/>
-              <a:t>백스페이스를 클릭 하고 메뉴가 떴을 경우 다른 오브젝트와의 상호작용은 </a:t>
-            </a:r>
-            <a:r>
-              <a:rPr lang="en-US" altLang="ko-KR" dirty="0"/>
-              <a:t>false</a:t>
-            </a:r>
-            <a:r>
-              <a:rPr lang="ko-KR" altLang="en-US" dirty="0"/>
-              <a:t>로 유지</a:t>
-            </a:r>
-            <a:endParaRPr lang="en-US" altLang="ko-KR" dirty="0"/>
-          </a:p>
-          <a:p>
-            <a:r>
-              <a:rPr lang="en-US" altLang="ko-KR" dirty="0"/>
-              <a:t>[EX]</a:t>
-            </a:r>
-          </a:p>
-          <a:p>
-            <a:r>
-              <a:rPr lang="ko-KR" altLang="en-US" dirty="0"/>
-              <a:t>백스페이스가 클릭 되었을 경우 데스크를 클릭 했을 때 데스크 패널이 뜨지 않도록 하는 것</a:t>
-            </a:r>
-            <a:endParaRPr lang="en-US" altLang="ko-KR" dirty="0"/>
+              <a:t>책상 클릭 이후 책상에서 상호작용을 한다</a:t>
+            </a:r>
+            <a:r>
+              <a:rPr lang="en-US" altLang="ko-KR" dirty="0"/>
+              <a:t>(O)</a:t>
+            </a:r>
+          </a:p>
+          <a:p>
+            <a:endParaRPr lang="en-US" altLang="ko-KR" dirty="0"/>
+          </a:p>
+          <a:p>
+            <a:r>
+              <a:rPr lang="en-US" altLang="ko-KR" dirty="0"/>
+              <a:t>[</a:t>
+            </a:r>
+            <a:r>
+              <a:rPr lang="ko-KR" altLang="en-US" dirty="0"/>
+              <a:t>수정안 참고 이미지</a:t>
+            </a:r>
+            <a:r>
+              <a:rPr lang="en-US" altLang="ko-KR" dirty="0"/>
+              <a:t>]</a:t>
+            </a:r>
+            <a:r>
+              <a:rPr lang="ko-KR" altLang="en-US" dirty="0"/>
+              <a:t>                </a:t>
+            </a:r>
+            <a:r>
+              <a:rPr lang="en-US" altLang="ko-KR" dirty="0"/>
+              <a:t>[</a:t>
+            </a:r>
+            <a:r>
+              <a:rPr lang="ko-KR" altLang="en-US" dirty="0"/>
+              <a:t>책상을 클릭하였을 경우</a:t>
+            </a:r>
+            <a:r>
+              <a:rPr lang="en-US" altLang="ko-KR" dirty="0"/>
+              <a:t>]</a:t>
+            </a:r>
           </a:p>
         </p:txBody>
       </p:sp>
@@ -5992,10 +8261,128 @@
           </a:p>
         </p:txBody>
       </p:sp>
+      <p:pic>
+        <p:nvPicPr>
+          <p:cNvPr id="11" name="그림 10">
+            <a:extLst>
+              <a:ext uri="{FF2B5EF4-FFF2-40B4-BE49-F238E27FC236}">
+                <a16:creationId xmlns:a16="http://schemas.microsoft.com/office/drawing/2014/main" id="{F4E5F767-B22C-442F-A60F-7AB3F07F89A3}"/>
+              </a:ext>
+            </a:extLst>
+          </p:cNvPr>
+          <p:cNvPicPr>
+            <a:picLocks noChangeAspect="1"/>
+          </p:cNvPicPr>
+          <p:nvPr/>
+        </p:nvPicPr>
+        <p:blipFill>
+          <a:blip r:embed="rId3">
+            <a:extLst>
+              <a:ext uri="{28A0092B-C50C-407E-A947-70E740481C1C}">
+                <a14:useLocalDpi xmlns:a14="http://schemas.microsoft.com/office/drawing/2010/main" val="0"/>
+              </a:ext>
+            </a:extLst>
+          </a:blip>
+          <a:stretch>
+            <a:fillRect/>
+          </a:stretch>
+        </p:blipFill>
+        <p:spPr>
+          <a:xfrm>
+            <a:off x="5311308" y="4317558"/>
+            <a:ext cx="2392954" cy="2286205"/>
+          </a:xfrm>
+          <a:prstGeom prst="rect">
+            <a:avLst/>
+          </a:prstGeom>
+        </p:spPr>
+      </p:pic>
+      <p:sp>
+        <p:nvSpPr>
+          <p:cNvPr id="12" name="화살표: 오른쪽 11">
+            <a:extLst>
+              <a:ext uri="{FF2B5EF4-FFF2-40B4-BE49-F238E27FC236}">
+                <a16:creationId xmlns:a16="http://schemas.microsoft.com/office/drawing/2014/main" id="{F291899B-7D64-45E5-9AD4-837377A17956}"/>
+              </a:ext>
+            </a:extLst>
+          </p:cNvPr>
+          <p:cNvSpPr/>
+          <p:nvPr/>
+        </p:nvSpPr>
+        <p:spPr>
+          <a:xfrm>
+            <a:off x="7919239" y="5176299"/>
+            <a:ext cx="628153" cy="318052"/>
+          </a:xfrm>
+          <a:prstGeom prst="rightArrow">
+            <a:avLst/>
+          </a:prstGeom>
+        </p:spPr>
+        <p:style>
+          <a:lnRef idx="2">
+            <a:schemeClr val="accent1">
+              <a:shade val="50000"/>
+            </a:schemeClr>
+          </a:lnRef>
+          <a:fillRef idx="1">
+            <a:schemeClr val="accent1"/>
+          </a:fillRef>
+          <a:effectRef idx="0">
+            <a:schemeClr val="accent1"/>
+          </a:effectRef>
+          <a:fontRef idx="minor">
+            <a:schemeClr val="lt1"/>
+          </a:fontRef>
+        </p:style>
+        <p:txBody>
+          <a:bodyPr rtlCol="0" anchor="ctr"/>
+          <a:lstStyle/>
+          <a:p>
+            <a:pPr algn="ctr"/>
+            <a:endParaRPr lang="ko-KR" altLang="en-US"/>
+          </a:p>
+        </p:txBody>
+      </p:sp>
+      <p:pic>
+        <p:nvPicPr>
+          <p:cNvPr id="14" name="그림 13">
+            <a:extLst>
+              <a:ext uri="{FF2B5EF4-FFF2-40B4-BE49-F238E27FC236}">
+                <a16:creationId xmlns:a16="http://schemas.microsoft.com/office/drawing/2014/main" id="{DC2488B1-F09D-405E-957C-746669267618}"/>
+              </a:ext>
+            </a:extLst>
+          </p:cNvPr>
+          <p:cNvPicPr>
+            <a:picLocks noChangeAspect="1"/>
+          </p:cNvPicPr>
+          <p:nvPr/>
+        </p:nvPicPr>
+        <p:blipFill>
+          <a:blip r:embed="rId4">
+            <a:extLst>
+              <a:ext uri="{28A0092B-C50C-407E-A947-70E740481C1C}">
+                <a14:useLocalDpi xmlns:a14="http://schemas.microsoft.com/office/drawing/2010/main" val="0"/>
+              </a:ext>
+            </a:extLst>
+          </a:blip>
+          <a:stretch>
+            <a:fillRect/>
+          </a:stretch>
+        </p:blipFill>
+        <p:spPr>
+          <a:xfrm>
+            <a:off x="8893729" y="4777501"/>
+            <a:ext cx="2460071" cy="1366318"/>
+          </a:xfrm>
+          <a:prstGeom prst="rect">
+            <a:avLst/>
+          </a:prstGeom>
+        </p:spPr>
+      </p:pic>
     </p:spTree>
     <p:extLst>
       <p:ext uri="{BB962C8B-B14F-4D97-AF65-F5344CB8AC3E}">
-        <p14:creationId xmlns:p14="http://schemas.microsoft.com/office/powerpoint/2010/main" val="1462668348"/>
+        <p14:creationId xmlns:p14="http://schemas.microsoft.com/office/powerpoint/2010/main" val="66667136"/>
       </p:ext>
     </p:extLst>
   </p:cSld>
@@ -6044,6 +8431,18 @@
           <a:lstStyle/>
           <a:p>
             <a:r>
+              <a:rPr lang="ko-KR" altLang="en-US" dirty="0" err="1"/>
+              <a:t>아트팀</a:t>
+            </a:r>
+            <a:r>
+              <a:rPr lang="ko-KR" altLang="en-US" dirty="0"/>
+              <a:t> </a:t>
+            </a:r>
+            <a:r>
+              <a:rPr lang="en-US" altLang="ko-KR" dirty="0"/>
+              <a:t>+ </a:t>
+            </a:r>
+            <a:r>
               <a:rPr lang="ko-KR" altLang="en-US" dirty="0"/>
               <a:t>개발팀</a:t>
             </a:r>
@@ -6057,27 +8456,123 @@
             </a:r>
             <a:r>
               <a:rPr lang="en-US" altLang="ko-KR" dirty="0"/>
+              <a:t>)(</a:t>
+            </a:r>
+            <a:r>
+              <a:rPr lang="ko-KR" altLang="en-US" dirty="0"/>
+              <a:t>수정 제안</a:t>
+            </a:r>
+            <a:r>
+              <a:rPr lang="en-US" altLang="ko-KR" dirty="0"/>
               <a:t>)</a:t>
             </a:r>
             <a:endParaRPr lang="ko-KR" altLang="en-US" dirty="0"/>
+          </a:p>
+        </p:txBody>
+      </p:sp>
+      <p:sp>
+        <p:nvSpPr>
+          <p:cNvPr id="6" name="TextBox 5">
+            <a:extLst>
+              <a:ext uri="{FF2B5EF4-FFF2-40B4-BE49-F238E27FC236}">
+                <a16:creationId xmlns:a16="http://schemas.microsoft.com/office/drawing/2014/main" id="{8D412666-212D-4CB7-944D-A2F46FAD81FE}"/>
+              </a:ext>
+            </a:extLst>
+          </p:cNvPr>
+          <p:cNvSpPr txBox="1"/>
+          <p:nvPr/>
+        </p:nvSpPr>
+        <p:spPr>
+          <a:xfrm>
+            <a:off x="5239649" y="2657194"/>
+            <a:ext cx="6491175" cy="1754326"/>
+          </a:xfrm>
+          <a:prstGeom prst="rect">
+            <a:avLst/>
+          </a:prstGeom>
+          <a:noFill/>
+        </p:spPr>
+        <p:txBody>
+          <a:bodyPr wrap="square" rtlCol="0">
+            <a:spAutoFit/>
+          </a:bodyPr>
+          <a:lstStyle/>
+          <a:p>
+            <a:r>
+              <a:rPr lang="ko-KR" altLang="en-US" dirty="0"/>
+              <a:t>수정 제안의 이유</a:t>
+            </a:r>
+            <a:endParaRPr lang="en-US" altLang="ko-KR" dirty="0"/>
+          </a:p>
+          <a:p>
+            <a:endParaRPr lang="en-US" altLang="ko-KR" dirty="0"/>
+          </a:p>
+          <a:p>
+            <a:r>
+              <a:rPr lang="ko-KR" altLang="en-US" dirty="0"/>
+              <a:t>책 홀더 추가</a:t>
+            </a:r>
+            <a:endParaRPr lang="en-US" altLang="ko-KR" dirty="0"/>
+          </a:p>
+          <a:p>
+            <a:r>
+              <a:rPr lang="en-US" altLang="ko-KR" dirty="0"/>
+              <a:t>-&gt; </a:t>
+            </a:r>
+            <a:r>
+              <a:rPr lang="ko-KR" altLang="en-US" dirty="0"/>
+              <a:t>책 홀더에는 저택 주인의 직업과 관련된 책이 들어갈 예정</a:t>
+            </a:r>
+            <a:endParaRPr lang="en-US" altLang="ko-KR" dirty="0"/>
+          </a:p>
+          <a:p>
+            <a:endParaRPr lang="en-US" altLang="ko-KR" dirty="0"/>
+          </a:p>
+          <a:p>
+            <a:r>
+              <a:rPr lang="en-US" altLang="ko-KR" dirty="0"/>
+              <a:t>[</a:t>
+            </a:r>
+            <a:r>
+              <a:rPr lang="ko-KR" altLang="en-US" dirty="0"/>
+              <a:t>수정안 참고 이미지</a:t>
+            </a:r>
+            <a:r>
+              <a:rPr lang="en-US" altLang="ko-KR" dirty="0"/>
+              <a:t>]</a:t>
+            </a:r>
+            <a:r>
+              <a:rPr lang="ko-KR" altLang="en-US" dirty="0"/>
+              <a:t>                </a:t>
+            </a:r>
+            <a:r>
+              <a:rPr lang="en-US" altLang="ko-KR" dirty="0"/>
+              <a:t>[</a:t>
+            </a:r>
+            <a:r>
+              <a:rPr lang="ko-KR" altLang="en-US" dirty="0"/>
+              <a:t>책상을 클릭하였을 경우</a:t>
+            </a:r>
+            <a:r>
+              <a:rPr lang="en-US" altLang="ko-KR" dirty="0"/>
+              <a:t>]</a:t>
+            </a:r>
           </a:p>
         </p:txBody>
       </p:sp>
       <p:pic>
         <p:nvPicPr>
-          <p:cNvPr id="5" name="내용 개체 틀 4">
-            <a:extLst>
-              <a:ext uri="{FF2B5EF4-FFF2-40B4-BE49-F238E27FC236}">
-                <a16:creationId xmlns:a16="http://schemas.microsoft.com/office/drawing/2014/main" id="{B32C2D8B-EB5C-4880-A2F5-4687A9F9B249}"/>
+          <p:cNvPr id="11" name="그림 10">
+            <a:extLst>
+              <a:ext uri="{FF2B5EF4-FFF2-40B4-BE49-F238E27FC236}">
+                <a16:creationId xmlns:a16="http://schemas.microsoft.com/office/drawing/2014/main" id="{F4E5F767-B22C-442F-A60F-7AB3F07F89A3}"/>
               </a:ext>
             </a:extLst>
           </p:cNvPr>
           <p:cNvPicPr>
-            <a:picLocks noGrp="1" noChangeAspect="1"/>
+            <a:picLocks noChangeAspect="1"/>
           </p:cNvPicPr>
-          <p:nvPr>
-            <p:ph idx="1"/>
-          </p:nvPr>
+          <p:nvPr/>
         </p:nvPicPr>
         <p:blipFill>
           <a:blip r:embed="rId2">
@@ -6093,165 +8588,20 @@
         </p:blipFill>
         <p:spPr>
           <a:xfrm>
-            <a:off x="375489" y="2573048"/>
-            <a:ext cx="4218069" cy="2372664"/>
-          </a:xfrm>
-        </p:spPr>
-      </p:pic>
-      <p:sp>
-        <p:nvSpPr>
-          <p:cNvPr id="6" name="TextBox 5">
-            <a:extLst>
-              <a:ext uri="{FF2B5EF4-FFF2-40B4-BE49-F238E27FC236}">
-                <a16:creationId xmlns:a16="http://schemas.microsoft.com/office/drawing/2014/main" id="{8D412666-212D-4CB7-944D-A2F46FAD81FE}"/>
-              </a:ext>
-            </a:extLst>
-          </p:cNvPr>
-          <p:cNvSpPr txBox="1"/>
-          <p:nvPr/>
-        </p:nvSpPr>
-        <p:spPr>
-          <a:xfrm>
-            <a:off x="5239650" y="2553535"/>
-            <a:ext cx="5987332" cy="3416320"/>
+            <a:off x="5311308" y="4317558"/>
+            <a:ext cx="2392954" cy="2286205"/>
           </a:xfrm>
           <a:prstGeom prst="rect">
             <a:avLst/>
           </a:prstGeom>
-          <a:noFill/>
-        </p:spPr>
-        <p:txBody>
-          <a:bodyPr wrap="square" rtlCol="0">
-            <a:spAutoFit/>
-          </a:bodyPr>
-          <a:lstStyle/>
-          <a:p>
-            <a:r>
-              <a:rPr lang="ko-KR" altLang="en-US" dirty="0"/>
-              <a:t>데스크 클릭 </a:t>
-            </a:r>
-            <a:endParaRPr lang="en-US" altLang="ko-KR" dirty="0"/>
-          </a:p>
-          <a:p>
-            <a:endParaRPr lang="en-US" altLang="ko-KR" dirty="0"/>
-          </a:p>
-          <a:p>
-            <a:r>
-              <a:rPr lang="ko-KR" altLang="en-US" dirty="0"/>
-              <a:t>데스크를 클릭 하였을 경우 메뉴창을 </a:t>
-            </a:r>
-            <a:r>
-              <a:rPr lang="ko-KR" altLang="en-US" dirty="0" err="1"/>
-              <a:t>뜨운다</a:t>
-            </a:r>
-            <a:endParaRPr lang="en-US" altLang="ko-KR" dirty="0"/>
-          </a:p>
-          <a:p>
-            <a:r>
-              <a:rPr lang="en-US" altLang="ko-KR" dirty="0"/>
-              <a:t>-&gt; </a:t>
-            </a:r>
-            <a:r>
-              <a:rPr lang="ko-KR" altLang="en-US" dirty="0"/>
-              <a:t>조사한다 </a:t>
-            </a:r>
-            <a:r>
-              <a:rPr lang="en-US" altLang="ko-KR" dirty="0"/>
-              <a:t>or </a:t>
-            </a:r>
-            <a:r>
-              <a:rPr lang="ko-KR" altLang="en-US" dirty="0"/>
-              <a:t>비슷한 </a:t>
-            </a:r>
-            <a:r>
-              <a:rPr lang="ko-KR" altLang="en-US" dirty="0" err="1"/>
-              <a:t>뉘양스의</a:t>
-            </a:r>
-            <a:r>
-              <a:rPr lang="ko-KR" altLang="en-US" dirty="0"/>
-              <a:t> 대사</a:t>
-            </a:r>
-            <a:endParaRPr lang="en-US" altLang="ko-KR" dirty="0"/>
-          </a:p>
-          <a:p>
-            <a:r>
-              <a:rPr lang="en-US" altLang="ko-KR" dirty="0"/>
-              <a:t>-&gt; </a:t>
-            </a:r>
-            <a:r>
-              <a:rPr lang="ko-KR" altLang="en-US" dirty="0" err="1"/>
-              <a:t>조사한다를</a:t>
-            </a:r>
-            <a:r>
-              <a:rPr lang="ko-KR" altLang="en-US" dirty="0"/>
-              <a:t> 클릭했을 경우 데스크 패널을 활성화</a:t>
-            </a:r>
-            <a:endParaRPr lang="en-US" altLang="ko-KR" dirty="0"/>
-          </a:p>
-          <a:p>
-            <a:r>
-              <a:rPr lang="en-US" altLang="ko-KR" dirty="0"/>
-              <a:t>-&gt; </a:t>
-            </a:r>
-            <a:r>
-              <a:rPr lang="ko-KR" altLang="en-US" dirty="0"/>
-              <a:t>데스크의 자식 오브젝트들 활성화 </a:t>
-            </a:r>
-            <a:r>
-              <a:rPr lang="en-US" altLang="ko-KR" dirty="0"/>
-              <a:t>(</a:t>
-            </a:r>
-            <a:r>
-              <a:rPr lang="ko-KR" altLang="en-US" dirty="0"/>
-              <a:t>패널의 백스페이스나 데스크 패널 자식 오브젝트들</a:t>
-            </a:r>
-            <a:r>
-              <a:rPr lang="en-US" altLang="ko-KR" dirty="0"/>
-              <a:t>)</a:t>
-            </a:r>
-          </a:p>
-          <a:p>
-            <a:endParaRPr lang="en-US" altLang="ko-KR" dirty="0"/>
-          </a:p>
-          <a:p>
-            <a:r>
-              <a:rPr lang="ko-KR" altLang="en-US" dirty="0"/>
-              <a:t>예외 처리 </a:t>
-            </a:r>
-            <a:r>
-              <a:rPr lang="en-US" altLang="ko-KR" dirty="0"/>
-              <a:t>: </a:t>
-            </a:r>
-            <a:r>
-              <a:rPr lang="ko-KR" altLang="en-US" dirty="0"/>
-              <a:t>백스페이스와 마찬가지로 패널을 활성화 했을 경우 패널의 자식 오브젝트나 이미지가 아닌 이상 또한 데스크를 활성화 했을 때의 퍼즐이나 일기장을 제외한 다른 </a:t>
-            </a:r>
-            <a:r>
-              <a:rPr lang="ko-KR" altLang="en-US" dirty="0" err="1"/>
-              <a:t>오브젝트들와의</a:t>
-            </a:r>
-            <a:r>
-              <a:rPr lang="ko-KR" altLang="en-US" dirty="0"/>
-              <a:t> 상호작용은 </a:t>
-            </a:r>
-            <a:r>
-              <a:rPr lang="en-US" altLang="ko-KR" dirty="0"/>
-              <a:t>false</a:t>
-            </a:r>
-            <a:r>
-              <a:rPr lang="ko-KR" altLang="en-US" dirty="0"/>
-              <a:t>상태 </a:t>
-            </a:r>
-            <a:endParaRPr lang="en-US" altLang="ko-KR" dirty="0"/>
-          </a:p>
-        </p:txBody>
-      </p:sp>
-      <p:sp>
-        <p:nvSpPr>
-          <p:cNvPr id="3" name="직사각형 2">
-            <a:extLst>
-              <a:ext uri="{FF2B5EF4-FFF2-40B4-BE49-F238E27FC236}">
-                <a16:creationId xmlns:a16="http://schemas.microsoft.com/office/drawing/2014/main" id="{D03CD479-77EA-433F-8BBD-CD6DA4F74E29}"/>
+        </p:spPr>
+      </p:pic>
+      <p:sp>
+        <p:nvSpPr>
+          <p:cNvPr id="12" name="화살표: 오른쪽 11">
+            <a:extLst>
+              <a:ext uri="{FF2B5EF4-FFF2-40B4-BE49-F238E27FC236}">
+                <a16:creationId xmlns:a16="http://schemas.microsoft.com/office/drawing/2014/main" id="{F291899B-7D64-45E5-9AD4-837377A17956}"/>
               </a:ext>
             </a:extLst>
           </p:cNvPr>
@@ -6260,10 +8610,10 @@
         </p:nvSpPr>
         <p:spPr>
           <a:xfrm>
-            <a:off x="461176" y="2679590"/>
-            <a:ext cx="477078" cy="453224"/>
-          </a:xfrm>
-          <a:prstGeom prst="rect">
+            <a:off x="7919239" y="5176299"/>
+            <a:ext cx="628153" cy="318052"/>
+          </a:xfrm>
+          <a:prstGeom prst="rightArrow">
             <a:avLst/>
           </a:prstGeom>
         </p:spPr>
@@ -6292,12 +8642,127 @@
           </a:p>
         </p:txBody>
       </p:sp>
-      <p:sp>
-        <p:nvSpPr>
-          <p:cNvPr id="4" name="화살표: 오른쪽 3">
-            <a:extLst>
-              <a:ext uri="{FF2B5EF4-FFF2-40B4-BE49-F238E27FC236}">
-                <a16:creationId xmlns:a16="http://schemas.microsoft.com/office/drawing/2014/main" id="{6C1D3FFD-91D7-4E13-8259-AAD1757BA846}"/>
+      <p:pic>
+        <p:nvPicPr>
+          <p:cNvPr id="14" name="그림 13">
+            <a:extLst>
+              <a:ext uri="{FF2B5EF4-FFF2-40B4-BE49-F238E27FC236}">
+                <a16:creationId xmlns:a16="http://schemas.microsoft.com/office/drawing/2014/main" id="{DC2488B1-F09D-405E-957C-746669267618}"/>
+              </a:ext>
+            </a:extLst>
+          </p:cNvPr>
+          <p:cNvPicPr>
+            <a:picLocks noChangeAspect="1"/>
+          </p:cNvPicPr>
+          <p:nvPr/>
+        </p:nvPicPr>
+        <p:blipFill>
+          <a:blip r:embed="rId3">
+            <a:extLst>
+              <a:ext uri="{28A0092B-C50C-407E-A947-70E740481C1C}">
+                <a14:useLocalDpi xmlns:a14="http://schemas.microsoft.com/office/drawing/2010/main" val="0"/>
+              </a:ext>
+            </a:extLst>
+          </a:blip>
+          <a:stretch>
+            <a:fillRect/>
+          </a:stretch>
+        </p:blipFill>
+        <p:spPr>
+          <a:xfrm>
+            <a:off x="8893729" y="4777501"/>
+            <a:ext cx="2460071" cy="1366318"/>
+          </a:xfrm>
+          <a:prstGeom prst="rect">
+            <a:avLst/>
+          </a:prstGeom>
+        </p:spPr>
+      </p:pic>
+      <p:pic>
+        <p:nvPicPr>
+          <p:cNvPr id="16" name="내용 개체 틀 15">
+            <a:extLst>
+              <a:ext uri="{FF2B5EF4-FFF2-40B4-BE49-F238E27FC236}">
+                <a16:creationId xmlns:a16="http://schemas.microsoft.com/office/drawing/2014/main" id="{D66312E8-79C1-45D6-AA03-931FF655487D}"/>
+              </a:ext>
+            </a:extLst>
+          </p:cNvPr>
+          <p:cNvPicPr>
+            <a:picLocks noGrp="1" noChangeAspect="1"/>
+          </p:cNvPicPr>
+          <p:nvPr>
+            <p:ph idx="1"/>
+          </p:nvPr>
+        </p:nvPicPr>
+        <p:blipFill>
+          <a:blip r:embed="rId4">
+            <a:extLst>
+              <a:ext uri="{28A0092B-C50C-407E-A947-70E740481C1C}">
+                <a14:useLocalDpi xmlns:a14="http://schemas.microsoft.com/office/drawing/2010/main" val="0"/>
+              </a:ext>
+            </a:extLst>
+          </a:blip>
+          <a:stretch>
+            <a:fillRect/>
+          </a:stretch>
+        </p:blipFill>
+        <p:spPr>
+          <a:xfrm>
+            <a:off x="838200" y="2907860"/>
+            <a:ext cx="3163344" cy="3169128"/>
+          </a:xfrm>
+        </p:spPr>
+      </p:pic>
+      <p:sp>
+        <p:nvSpPr>
+          <p:cNvPr id="17" name="TextBox 16">
+            <a:extLst>
+              <a:ext uri="{FF2B5EF4-FFF2-40B4-BE49-F238E27FC236}">
+                <a16:creationId xmlns:a16="http://schemas.microsoft.com/office/drawing/2014/main" id="{23A801BD-D53F-49AE-8BC3-CAED471F11F2}"/>
+              </a:ext>
+            </a:extLst>
+          </p:cNvPr>
+          <p:cNvSpPr txBox="1"/>
+          <p:nvPr/>
+        </p:nvSpPr>
+        <p:spPr>
+          <a:xfrm>
+            <a:off x="838200" y="2319667"/>
+            <a:ext cx="2703444" cy="369332"/>
+          </a:xfrm>
+          <a:prstGeom prst="rect">
+            <a:avLst/>
+          </a:prstGeom>
+          <a:noFill/>
+        </p:spPr>
+        <p:txBody>
+          <a:bodyPr wrap="square" rtlCol="0">
+            <a:spAutoFit/>
+          </a:bodyPr>
+          <a:lstStyle/>
+          <a:p>
+            <a:r>
+              <a:rPr lang="en-US" altLang="ko-KR" dirty="0"/>
+              <a:t>[</a:t>
+            </a:r>
+            <a:r>
+              <a:rPr lang="ko-KR" altLang="en-US" dirty="0"/>
+              <a:t>책 홀더 이미지</a:t>
+            </a:r>
+            <a:r>
+              <a:rPr lang="en-US" altLang="ko-KR" dirty="0"/>
+              <a:t>]</a:t>
+            </a:r>
+            <a:endParaRPr lang="ko-KR" altLang="en-US" dirty="0"/>
+          </a:p>
+        </p:txBody>
+      </p:sp>
+      <p:sp>
+        <p:nvSpPr>
+          <p:cNvPr id="19" name="액자 18">
+            <a:extLst>
+              <a:ext uri="{FF2B5EF4-FFF2-40B4-BE49-F238E27FC236}">
+                <a16:creationId xmlns:a16="http://schemas.microsoft.com/office/drawing/2014/main" id="{E259FA18-1487-49C5-93EA-01B76F78C9F8}"/>
               </a:ext>
             </a:extLst>
           </p:cNvPr>
@@ -6306,12 +8771,20 @@
         </p:nvSpPr>
         <p:spPr>
           <a:xfrm>
-            <a:off x="3808675" y="3808675"/>
-            <a:ext cx="620202" cy="357808"/>
-          </a:xfrm>
-          <a:prstGeom prst="rightArrow">
+            <a:off x="6040341" y="4411520"/>
+            <a:ext cx="901148" cy="772004"/>
+          </a:xfrm>
+          <a:prstGeom prst="frame">
             <a:avLst/>
           </a:prstGeom>
+          <a:solidFill>
+            <a:srgbClr val="FF0000"/>
+          </a:solidFill>
+          <a:ln>
+            <a:solidFill>
+              <a:srgbClr val="FF0000"/>
+            </a:solidFill>
+          </a:ln>
         </p:spPr>
         <p:style>
           <a:lnRef idx="2">
@@ -6334,152 +8807,18 @@
           <a:lstStyle/>
           <a:p>
             <a:pPr algn="ctr"/>
-            <a:endParaRPr lang="ko-KR" altLang="en-US"/>
-          </a:p>
-        </p:txBody>
-      </p:sp>
-      <p:sp>
-        <p:nvSpPr>
-          <p:cNvPr id="7" name="화살표: 아래쪽 6">
-            <a:extLst>
-              <a:ext uri="{FF2B5EF4-FFF2-40B4-BE49-F238E27FC236}">
-                <a16:creationId xmlns:a16="http://schemas.microsoft.com/office/drawing/2014/main" id="{5EEB3AF9-EC6D-4C1E-A4AA-6F674E97F7F3}"/>
-              </a:ext>
-            </a:extLst>
-          </p:cNvPr>
-          <p:cNvSpPr/>
-          <p:nvPr/>
-        </p:nvSpPr>
-        <p:spPr>
-          <a:xfrm>
-            <a:off x="2289716" y="4317558"/>
-            <a:ext cx="389614" cy="628154"/>
-          </a:xfrm>
-          <a:prstGeom prst="downArrow">
-            <a:avLst/>
-          </a:prstGeom>
-        </p:spPr>
-        <p:style>
-          <a:lnRef idx="2">
-            <a:schemeClr val="accent1">
-              <a:shade val="50000"/>
-            </a:schemeClr>
-          </a:lnRef>
-          <a:fillRef idx="1">
-            <a:schemeClr val="accent1"/>
-          </a:fillRef>
-          <a:effectRef idx="0">
-            <a:schemeClr val="accent1"/>
-          </a:effectRef>
-          <a:fontRef idx="minor">
-            <a:schemeClr val="lt1"/>
-          </a:fontRef>
-        </p:style>
-        <p:txBody>
-          <a:bodyPr rtlCol="0" anchor="ctr"/>
-          <a:lstStyle/>
-          <a:p>
-            <a:pPr algn="ctr"/>
-            <a:endParaRPr lang="ko-KR" altLang="en-US"/>
-          </a:p>
-        </p:txBody>
-      </p:sp>
-      <p:sp>
-        <p:nvSpPr>
-          <p:cNvPr id="8" name="화살표: 아래쪽 7">
-            <a:extLst>
-              <a:ext uri="{FF2B5EF4-FFF2-40B4-BE49-F238E27FC236}">
-                <a16:creationId xmlns:a16="http://schemas.microsoft.com/office/drawing/2014/main" id="{6F431507-E024-44DE-BB3E-825853B3C7EB}"/>
-              </a:ext>
-            </a:extLst>
-          </p:cNvPr>
-          <p:cNvSpPr/>
-          <p:nvPr/>
-        </p:nvSpPr>
-        <p:spPr>
-          <a:xfrm rot="10800000">
-            <a:off x="2289716" y="2906202"/>
-            <a:ext cx="389614" cy="628154"/>
-          </a:xfrm>
-          <a:prstGeom prst="downArrow">
-            <a:avLst/>
-          </a:prstGeom>
-        </p:spPr>
-        <p:style>
-          <a:lnRef idx="2">
-            <a:schemeClr val="accent1">
-              <a:shade val="50000"/>
-            </a:schemeClr>
-          </a:lnRef>
-          <a:fillRef idx="1">
-            <a:schemeClr val="accent1"/>
-          </a:fillRef>
-          <a:effectRef idx="0">
-            <a:schemeClr val="accent1"/>
-          </a:effectRef>
-          <a:fontRef idx="minor">
-            <a:schemeClr val="lt1"/>
-          </a:fontRef>
-        </p:style>
-        <p:txBody>
-          <a:bodyPr rtlCol="0" anchor="ctr"/>
-          <a:lstStyle/>
-          <a:p>
-            <a:pPr algn="ctr"/>
-            <a:endParaRPr lang="ko-KR" altLang="en-US"/>
-          </a:p>
-        </p:txBody>
-      </p:sp>
-      <p:sp>
-        <p:nvSpPr>
-          <p:cNvPr id="9" name="화살표: 오른쪽 8">
-            <a:extLst>
-              <a:ext uri="{FF2B5EF4-FFF2-40B4-BE49-F238E27FC236}">
-                <a16:creationId xmlns:a16="http://schemas.microsoft.com/office/drawing/2014/main" id="{C7832BD4-B878-4B87-BA5B-1B8AA36913E2}"/>
-              </a:ext>
-            </a:extLst>
-          </p:cNvPr>
-          <p:cNvSpPr/>
-          <p:nvPr/>
-        </p:nvSpPr>
-        <p:spPr>
-          <a:xfrm rot="10800000">
-            <a:off x="628153" y="3707697"/>
-            <a:ext cx="620202" cy="357808"/>
-          </a:xfrm>
-          <a:prstGeom prst="rightArrow">
-            <a:avLst/>
-          </a:prstGeom>
-        </p:spPr>
-        <p:style>
-          <a:lnRef idx="2">
-            <a:schemeClr val="accent1">
-              <a:shade val="50000"/>
-            </a:schemeClr>
-          </a:lnRef>
-          <a:fillRef idx="1">
-            <a:schemeClr val="accent1"/>
-          </a:fillRef>
-          <a:effectRef idx="0">
-            <a:schemeClr val="accent1"/>
-          </a:effectRef>
-          <a:fontRef idx="minor">
-            <a:schemeClr val="lt1"/>
-          </a:fontRef>
-        </p:style>
-        <p:txBody>
-          <a:bodyPr rtlCol="0" anchor="ctr"/>
-          <a:lstStyle/>
-          <a:p>
-            <a:pPr algn="ctr"/>
-            <a:endParaRPr lang="ko-KR" altLang="en-US"/>
+            <a:endParaRPr lang="ko-KR" altLang="en-US">
+              <a:solidFill>
+                <a:schemeClr val="tx1"/>
+              </a:solidFill>
+            </a:endParaRPr>
           </a:p>
         </p:txBody>
       </p:sp>
     </p:spTree>
     <p:extLst>
       <p:ext uri="{BB962C8B-B14F-4D97-AF65-F5344CB8AC3E}">
-        <p14:creationId xmlns:p14="http://schemas.microsoft.com/office/powerpoint/2010/main" val="1451075368"/>
+        <p14:creationId xmlns:p14="http://schemas.microsoft.com/office/powerpoint/2010/main" val="1089261500"/>
       </p:ext>
     </p:extLst>
   </p:cSld>
@@ -6528,8 +8867,8 @@
           <a:lstStyle/>
           <a:p>
             <a:r>
-              <a:rPr lang="ko-KR" altLang="en-US" dirty="0"/>
-              <a:t>개발팀</a:t>
+              <a:rPr lang="ko-KR" altLang="en-US" dirty="0" err="1"/>
+              <a:t>아트팀</a:t>
             </a:r>
             <a:r>
               <a:rPr lang="en-US" altLang="ko-KR" dirty="0"/>
@@ -6537,22 +8876,144 @@
             </a:r>
             <a:r>
               <a:rPr lang="ko-KR" altLang="en-US" dirty="0"/>
-              <a:t>서재 중앙</a:t>
+              <a:t>책장</a:t>
             </a:r>
             <a:r>
               <a:rPr lang="en-US" altLang="ko-KR" dirty="0"/>
               <a:t>)</a:t>
             </a:r>
             <a:endParaRPr lang="ko-KR" altLang="en-US" dirty="0"/>
+          </a:p>
+        </p:txBody>
+      </p:sp>
+      <p:sp>
+        <p:nvSpPr>
+          <p:cNvPr id="6" name="TextBox 5">
+            <a:extLst>
+              <a:ext uri="{FF2B5EF4-FFF2-40B4-BE49-F238E27FC236}">
+                <a16:creationId xmlns:a16="http://schemas.microsoft.com/office/drawing/2014/main" id="{8D412666-212D-4CB7-944D-A2F46FAD81FE}"/>
+              </a:ext>
+            </a:extLst>
+          </p:cNvPr>
+          <p:cNvSpPr txBox="1"/>
+          <p:nvPr/>
+        </p:nvSpPr>
+        <p:spPr>
+          <a:xfrm>
+            <a:off x="5239650" y="2353586"/>
+            <a:ext cx="5987332" cy="2862322"/>
+          </a:xfrm>
+          <a:prstGeom prst="rect">
+            <a:avLst/>
+          </a:prstGeom>
+          <a:noFill/>
+        </p:spPr>
+        <p:txBody>
+          <a:bodyPr wrap="square" rtlCol="0">
+            <a:spAutoFit/>
+          </a:bodyPr>
+          <a:lstStyle/>
+          <a:p>
+            <a:r>
+              <a:rPr lang="ko-KR" altLang="en-US" dirty="0"/>
+              <a:t>공통적으로 </a:t>
+            </a:r>
+            <a:r>
+              <a:rPr lang="ko-KR" altLang="en-US" dirty="0" err="1"/>
+              <a:t>백스패이스가</a:t>
+            </a:r>
+            <a:r>
+              <a:rPr lang="ko-KR" altLang="en-US" dirty="0"/>
+              <a:t> 들어가며 책장에는 여러가지 책이 있지만 퍼즐을 위해 빨간색</a:t>
+            </a:r>
+            <a:r>
+              <a:rPr lang="en-US" altLang="ko-KR" dirty="0"/>
+              <a:t>, </a:t>
+            </a:r>
+            <a:r>
+              <a:rPr lang="ko-KR" altLang="en-US" dirty="0"/>
+              <a:t>파란색</a:t>
+            </a:r>
+            <a:r>
+              <a:rPr lang="en-US" altLang="ko-KR" dirty="0"/>
+              <a:t>, </a:t>
+            </a:r>
+            <a:r>
+              <a:rPr lang="ko-KR" altLang="en-US" dirty="0"/>
+              <a:t>녹색의 책이 들어가며 다른 색깔의 책은 전부 흰색 아니면 갈색으로 들어갈 예정</a:t>
+            </a:r>
+            <a:endParaRPr lang="en-US" altLang="ko-KR" dirty="0"/>
+          </a:p>
+          <a:p>
+            <a:endParaRPr lang="en-US" altLang="ko-KR" dirty="0"/>
+          </a:p>
+          <a:p>
+            <a:r>
+              <a:rPr lang="ko-KR" altLang="en-US" dirty="0"/>
+              <a:t>책의 색깔은 추후 논의 후 업데이트 예정</a:t>
+            </a:r>
+            <a:endParaRPr lang="en-US" altLang="ko-KR" dirty="0"/>
+          </a:p>
+          <a:p>
+            <a:r>
+              <a:rPr lang="en-US" altLang="ko-KR" dirty="0"/>
+              <a:t>-&gt; </a:t>
+            </a:r>
+            <a:r>
+              <a:rPr lang="ko-KR" altLang="en-US" dirty="0"/>
+              <a:t>책장당 빨간색</a:t>
+            </a:r>
+            <a:r>
+              <a:rPr lang="en-US" altLang="ko-KR" dirty="0"/>
+              <a:t>, </a:t>
+            </a:r>
+            <a:r>
+              <a:rPr lang="ko-KR" altLang="en-US" dirty="0"/>
+              <a:t>파란색</a:t>
+            </a:r>
+            <a:r>
+              <a:rPr lang="en-US" altLang="ko-KR" dirty="0"/>
+              <a:t>, </a:t>
+            </a:r>
+            <a:r>
+              <a:rPr lang="ko-KR" altLang="en-US" dirty="0"/>
+              <a:t>녹색의 책들은 사칙연산을 했을 때 </a:t>
+            </a:r>
+            <a:r>
+              <a:rPr lang="en-US" altLang="ko-KR" dirty="0"/>
+              <a:t>0~9</a:t>
+            </a:r>
+            <a:r>
+              <a:rPr lang="ko-KR" altLang="en-US" dirty="0"/>
+              <a:t>사이의 수이며 음수나 </a:t>
+            </a:r>
+            <a:r>
+              <a:rPr lang="en-US" altLang="ko-KR" dirty="0"/>
+              <a:t>10</a:t>
+            </a:r>
+            <a:r>
+              <a:rPr lang="ko-KR" altLang="en-US" dirty="0"/>
+              <a:t> 이상의 숫자가 될 수 없음</a:t>
+            </a:r>
+            <a:r>
+              <a:rPr lang="en-US" altLang="ko-KR" dirty="0"/>
+              <a:t>.</a:t>
+            </a:r>
+          </a:p>
+          <a:p>
+            <a:r>
+              <a:rPr lang="en-US" altLang="ko-KR" dirty="0"/>
+              <a:t> </a:t>
+            </a:r>
           </a:p>
         </p:txBody>
       </p:sp>
       <p:pic>
         <p:nvPicPr>
-          <p:cNvPr id="5" name="내용 개체 틀 4">
-            <a:extLst>
-              <a:ext uri="{FF2B5EF4-FFF2-40B4-BE49-F238E27FC236}">
-                <a16:creationId xmlns:a16="http://schemas.microsoft.com/office/drawing/2014/main" id="{B32C2D8B-EB5C-4880-A2F5-4687A9F9B249}"/>
+          <p:cNvPr id="13" name="내용 개체 틀 12">
+            <a:extLst>
+              <a:ext uri="{FF2B5EF4-FFF2-40B4-BE49-F238E27FC236}">
+                <a16:creationId xmlns:a16="http://schemas.microsoft.com/office/drawing/2014/main" id="{05B14CE2-EF0F-40C5-B894-91F2173A0C96}"/>
               </a:ext>
             </a:extLst>
           </p:cNvPr>
@@ -6577,165 +9038,17 @@
         </p:blipFill>
         <p:spPr>
           <a:xfrm>
-            <a:off x="375489" y="2573048"/>
-            <a:ext cx="4218069" cy="2372664"/>
+            <a:off x="228801" y="2066840"/>
+            <a:ext cx="5010849" cy="3105583"/>
           </a:xfrm>
         </p:spPr>
       </p:pic>
       <p:sp>
         <p:nvSpPr>
-          <p:cNvPr id="6" name="TextBox 5">
-            <a:extLst>
-              <a:ext uri="{FF2B5EF4-FFF2-40B4-BE49-F238E27FC236}">
-                <a16:creationId xmlns:a16="http://schemas.microsoft.com/office/drawing/2014/main" id="{8D412666-212D-4CB7-944D-A2F46FAD81FE}"/>
-              </a:ext>
-            </a:extLst>
-          </p:cNvPr>
-          <p:cNvSpPr txBox="1"/>
-          <p:nvPr/>
-        </p:nvSpPr>
-        <p:spPr>
-          <a:xfrm>
-            <a:off x="5239650" y="2553535"/>
-            <a:ext cx="5987332" cy="3416320"/>
-          </a:xfrm>
-          <a:prstGeom prst="rect">
-            <a:avLst/>
-          </a:prstGeom>
-          <a:noFill/>
-        </p:spPr>
-        <p:txBody>
-          <a:bodyPr wrap="square" rtlCol="0">
-            <a:spAutoFit/>
-          </a:bodyPr>
-          <a:lstStyle/>
-          <a:p>
-            <a:r>
-              <a:rPr lang="ko-KR" altLang="en-US" dirty="0"/>
-              <a:t>데스크 클릭 </a:t>
-            </a:r>
-            <a:endParaRPr lang="en-US" altLang="ko-KR" dirty="0"/>
-          </a:p>
-          <a:p>
-            <a:endParaRPr lang="en-US" altLang="ko-KR" dirty="0"/>
-          </a:p>
-          <a:p>
-            <a:r>
-              <a:rPr lang="ko-KR" altLang="en-US" dirty="0"/>
-              <a:t>데스크를 클릭 하였을 경우 메뉴창을 </a:t>
-            </a:r>
-            <a:r>
-              <a:rPr lang="ko-KR" altLang="en-US" dirty="0" err="1"/>
-              <a:t>뜨운다</a:t>
-            </a:r>
-            <a:endParaRPr lang="en-US" altLang="ko-KR" dirty="0"/>
-          </a:p>
-          <a:p>
-            <a:r>
-              <a:rPr lang="en-US" altLang="ko-KR" dirty="0"/>
-              <a:t>-&gt; </a:t>
-            </a:r>
-            <a:r>
-              <a:rPr lang="ko-KR" altLang="en-US" dirty="0"/>
-              <a:t>조사한다 </a:t>
-            </a:r>
-            <a:r>
-              <a:rPr lang="en-US" altLang="ko-KR" dirty="0"/>
-              <a:t>or </a:t>
-            </a:r>
-            <a:r>
-              <a:rPr lang="ko-KR" altLang="en-US" dirty="0"/>
-              <a:t>비슷한 </a:t>
-            </a:r>
-            <a:r>
-              <a:rPr lang="ko-KR" altLang="en-US" dirty="0" err="1"/>
-              <a:t>뉘양스의</a:t>
-            </a:r>
-            <a:r>
-              <a:rPr lang="ko-KR" altLang="en-US" dirty="0"/>
-              <a:t> 대사</a:t>
-            </a:r>
-            <a:endParaRPr lang="en-US" altLang="ko-KR" dirty="0"/>
-          </a:p>
-          <a:p>
-            <a:r>
-              <a:rPr lang="en-US" altLang="ko-KR" dirty="0"/>
-              <a:t>-&gt; </a:t>
-            </a:r>
-            <a:r>
-              <a:rPr lang="ko-KR" altLang="en-US" dirty="0" err="1"/>
-              <a:t>조사한다를</a:t>
-            </a:r>
-            <a:r>
-              <a:rPr lang="ko-KR" altLang="en-US" dirty="0"/>
-              <a:t> 클릭했을 경우 데스크 패널을 활성화</a:t>
-            </a:r>
-            <a:endParaRPr lang="en-US" altLang="ko-KR" dirty="0"/>
-          </a:p>
-          <a:p>
-            <a:r>
-              <a:rPr lang="en-US" altLang="ko-KR" dirty="0"/>
-              <a:t>-&gt; </a:t>
-            </a:r>
-            <a:r>
-              <a:rPr lang="ko-KR" altLang="en-US" dirty="0"/>
-              <a:t>데스크의 자식 오브젝트들 활성화 </a:t>
-            </a:r>
-            <a:r>
-              <a:rPr lang="en-US" altLang="ko-KR" dirty="0"/>
-              <a:t>(</a:t>
-            </a:r>
-            <a:r>
-              <a:rPr lang="ko-KR" altLang="en-US" dirty="0"/>
-              <a:t>패널의 백스페이스나 데스크 패널 자식 오브젝트들</a:t>
-            </a:r>
-            <a:r>
-              <a:rPr lang="en-US" altLang="ko-KR" dirty="0"/>
-              <a:t>)</a:t>
-            </a:r>
-          </a:p>
-          <a:p>
-            <a:endParaRPr lang="en-US" altLang="ko-KR" dirty="0"/>
-          </a:p>
-          <a:p>
-            <a:r>
-              <a:rPr lang="ko-KR" altLang="en-US" dirty="0"/>
-              <a:t>예외 처리 </a:t>
-            </a:r>
-            <a:r>
-              <a:rPr lang="en-US" altLang="ko-KR" dirty="0"/>
-              <a:t>: </a:t>
-            </a:r>
-            <a:r>
-              <a:rPr lang="ko-KR" altLang="en-US" dirty="0"/>
-              <a:t>백스페이스와 마찬가지로 패널을 활성화 했을 경우 패널의 자식 오브젝트나 이미지가 아닌 이상 또한 데스크를 활성화 했을 때의 퍼즐이나 일기장을 제외한 다른 </a:t>
-            </a:r>
-            <a:r>
-              <a:rPr lang="ko-KR" altLang="en-US" dirty="0" err="1"/>
-              <a:t>오브젝트들와의</a:t>
-            </a:r>
-            <a:r>
-              <a:rPr lang="ko-KR" altLang="en-US" dirty="0"/>
-              <a:t> 상호작용은 </a:t>
-            </a:r>
-            <a:r>
-              <a:rPr lang="en-US" altLang="ko-KR" dirty="0"/>
-              <a:t>false</a:t>
-            </a:r>
-            <a:r>
-              <a:rPr lang="ko-KR" altLang="en-US" dirty="0"/>
-              <a:t>상태 </a:t>
-            </a:r>
-            <a:endParaRPr lang="en-US" altLang="ko-KR" dirty="0"/>
-          </a:p>
-        </p:txBody>
-      </p:sp>
-      <p:sp>
-        <p:nvSpPr>
-          <p:cNvPr id="3" name="직사각형 2">
-            <a:extLst>
-              <a:ext uri="{FF2B5EF4-FFF2-40B4-BE49-F238E27FC236}">
-                <a16:creationId xmlns:a16="http://schemas.microsoft.com/office/drawing/2014/main" id="{D03CD479-77EA-433F-8BBD-CD6DA4F74E29}"/>
+          <p:cNvPr id="14" name="직사각형 13">
+            <a:extLst>
+              <a:ext uri="{FF2B5EF4-FFF2-40B4-BE49-F238E27FC236}">
+                <a16:creationId xmlns:a16="http://schemas.microsoft.com/office/drawing/2014/main" id="{0D5A1D76-CB61-41A6-8647-5E6559DD2608}"/>
               </a:ext>
             </a:extLst>
           </p:cNvPr>
@@ -6744,8 +9057,8 @@
         </p:nvSpPr>
         <p:spPr>
           <a:xfrm>
-            <a:off x="461176" y="2679590"/>
-            <a:ext cx="477078" cy="453224"/>
+            <a:off x="228800" y="1573859"/>
+            <a:ext cx="733308" cy="779727"/>
           </a:xfrm>
           <a:prstGeom prst="rect">
             <a:avLst/>
@@ -6776,194 +9089,10 @@
           </a:p>
         </p:txBody>
       </p:sp>
-      <p:sp>
-        <p:nvSpPr>
-          <p:cNvPr id="4" name="화살표: 오른쪽 3">
-            <a:extLst>
-              <a:ext uri="{FF2B5EF4-FFF2-40B4-BE49-F238E27FC236}">
-                <a16:creationId xmlns:a16="http://schemas.microsoft.com/office/drawing/2014/main" id="{6C1D3FFD-91D7-4E13-8259-AAD1757BA846}"/>
-              </a:ext>
-            </a:extLst>
-          </p:cNvPr>
-          <p:cNvSpPr/>
-          <p:nvPr/>
-        </p:nvSpPr>
-        <p:spPr>
-          <a:xfrm>
-            <a:off x="3808675" y="3808675"/>
-            <a:ext cx="620202" cy="357808"/>
-          </a:xfrm>
-          <a:prstGeom prst="rightArrow">
-            <a:avLst/>
-          </a:prstGeom>
-        </p:spPr>
-        <p:style>
-          <a:lnRef idx="2">
-            <a:schemeClr val="accent1">
-              <a:shade val="50000"/>
-            </a:schemeClr>
-          </a:lnRef>
-          <a:fillRef idx="1">
-            <a:schemeClr val="accent1"/>
-          </a:fillRef>
-          <a:effectRef idx="0">
-            <a:schemeClr val="accent1"/>
-          </a:effectRef>
-          <a:fontRef idx="minor">
-            <a:schemeClr val="lt1"/>
-          </a:fontRef>
-        </p:style>
-        <p:txBody>
-          <a:bodyPr rtlCol="0" anchor="ctr"/>
-          <a:lstStyle/>
-          <a:p>
-            <a:pPr algn="ctr"/>
-            <a:endParaRPr lang="ko-KR" altLang="en-US"/>
-          </a:p>
-        </p:txBody>
-      </p:sp>
-      <p:sp>
-        <p:nvSpPr>
-          <p:cNvPr id="7" name="화살표: 아래쪽 6">
-            <a:extLst>
-              <a:ext uri="{FF2B5EF4-FFF2-40B4-BE49-F238E27FC236}">
-                <a16:creationId xmlns:a16="http://schemas.microsoft.com/office/drawing/2014/main" id="{5EEB3AF9-EC6D-4C1E-A4AA-6F674E97F7F3}"/>
-              </a:ext>
-            </a:extLst>
-          </p:cNvPr>
-          <p:cNvSpPr/>
-          <p:nvPr/>
-        </p:nvSpPr>
-        <p:spPr>
-          <a:xfrm>
-            <a:off x="2289716" y="4317558"/>
-            <a:ext cx="389614" cy="628154"/>
-          </a:xfrm>
-          <a:prstGeom prst="downArrow">
-            <a:avLst/>
-          </a:prstGeom>
-        </p:spPr>
-        <p:style>
-          <a:lnRef idx="2">
-            <a:schemeClr val="accent1">
-              <a:shade val="50000"/>
-            </a:schemeClr>
-          </a:lnRef>
-          <a:fillRef idx="1">
-            <a:schemeClr val="accent1"/>
-          </a:fillRef>
-          <a:effectRef idx="0">
-            <a:schemeClr val="accent1"/>
-          </a:effectRef>
-          <a:fontRef idx="minor">
-            <a:schemeClr val="lt1"/>
-          </a:fontRef>
-        </p:style>
-        <p:txBody>
-          <a:bodyPr rtlCol="0" anchor="ctr"/>
-          <a:lstStyle/>
-          <a:p>
-            <a:pPr algn="ctr"/>
-            <a:endParaRPr lang="ko-KR" altLang="en-US"/>
-          </a:p>
-        </p:txBody>
-      </p:sp>
-      <p:sp>
-        <p:nvSpPr>
-          <p:cNvPr id="8" name="화살표: 아래쪽 7">
-            <a:extLst>
-              <a:ext uri="{FF2B5EF4-FFF2-40B4-BE49-F238E27FC236}">
-                <a16:creationId xmlns:a16="http://schemas.microsoft.com/office/drawing/2014/main" id="{6F431507-E024-44DE-BB3E-825853B3C7EB}"/>
-              </a:ext>
-            </a:extLst>
-          </p:cNvPr>
-          <p:cNvSpPr/>
-          <p:nvPr/>
-        </p:nvSpPr>
-        <p:spPr>
-          <a:xfrm rot="10800000">
-            <a:off x="2289716" y="2906202"/>
-            <a:ext cx="389614" cy="628154"/>
-          </a:xfrm>
-          <a:prstGeom prst="downArrow">
-            <a:avLst/>
-          </a:prstGeom>
-        </p:spPr>
-        <p:style>
-          <a:lnRef idx="2">
-            <a:schemeClr val="accent1">
-              <a:shade val="50000"/>
-            </a:schemeClr>
-          </a:lnRef>
-          <a:fillRef idx="1">
-            <a:schemeClr val="accent1"/>
-          </a:fillRef>
-          <a:effectRef idx="0">
-            <a:schemeClr val="accent1"/>
-          </a:effectRef>
-          <a:fontRef idx="minor">
-            <a:schemeClr val="lt1"/>
-          </a:fontRef>
-        </p:style>
-        <p:txBody>
-          <a:bodyPr rtlCol="0" anchor="ctr"/>
-          <a:lstStyle/>
-          <a:p>
-            <a:pPr algn="ctr"/>
-            <a:endParaRPr lang="ko-KR" altLang="en-US"/>
-          </a:p>
-        </p:txBody>
-      </p:sp>
-      <p:sp>
-        <p:nvSpPr>
-          <p:cNvPr id="9" name="화살표: 오른쪽 8">
-            <a:extLst>
-              <a:ext uri="{FF2B5EF4-FFF2-40B4-BE49-F238E27FC236}">
-                <a16:creationId xmlns:a16="http://schemas.microsoft.com/office/drawing/2014/main" id="{C7832BD4-B878-4B87-BA5B-1B8AA36913E2}"/>
-              </a:ext>
-            </a:extLst>
-          </p:cNvPr>
-          <p:cNvSpPr/>
-          <p:nvPr/>
-        </p:nvSpPr>
-        <p:spPr>
-          <a:xfrm rot="10800000">
-            <a:off x="628153" y="3707697"/>
-            <a:ext cx="620202" cy="357808"/>
-          </a:xfrm>
-          <a:prstGeom prst="rightArrow">
-            <a:avLst/>
-          </a:prstGeom>
-        </p:spPr>
-        <p:style>
-          <a:lnRef idx="2">
-            <a:schemeClr val="accent1">
-              <a:shade val="50000"/>
-            </a:schemeClr>
-          </a:lnRef>
-          <a:fillRef idx="1">
-            <a:schemeClr val="accent1"/>
-          </a:fillRef>
-          <a:effectRef idx="0">
-            <a:schemeClr val="accent1"/>
-          </a:effectRef>
-          <a:fontRef idx="minor">
-            <a:schemeClr val="lt1"/>
-          </a:fontRef>
-        </p:style>
-        <p:txBody>
-          <a:bodyPr rtlCol="0" anchor="ctr"/>
-          <a:lstStyle/>
-          <a:p>
-            <a:pPr algn="ctr"/>
-            <a:endParaRPr lang="ko-KR" altLang="en-US"/>
-          </a:p>
-        </p:txBody>
-      </p:sp>
     </p:spTree>
     <p:extLst>
       <p:ext uri="{BB962C8B-B14F-4D97-AF65-F5344CB8AC3E}">
-        <p14:creationId xmlns:p14="http://schemas.microsoft.com/office/powerpoint/2010/main" val="2253979823"/>
+        <p14:creationId xmlns:p14="http://schemas.microsoft.com/office/powerpoint/2010/main" val="2947882958"/>
       </p:ext>
     </p:extLst>
   </p:cSld>

--- a/기획서/서재 개발 기획.pptx
+++ b/기획서/서재 개발 기획.pptx
@@ -16,13 +16,11 @@
     <p:sldId id="261" r:id="rId10"/>
     <p:sldId id="262" r:id="rId11"/>
     <p:sldId id="263" r:id="rId12"/>
-    <p:sldId id="264" r:id="rId13"/>
-    <p:sldId id="265" r:id="rId14"/>
-    <p:sldId id="266" r:id="rId15"/>
-    <p:sldId id="272" r:id="rId16"/>
-    <p:sldId id="268" r:id="rId17"/>
-    <p:sldId id="273" r:id="rId18"/>
-    <p:sldId id="269" r:id="rId19"/>
+    <p:sldId id="265" r:id="rId13"/>
+    <p:sldId id="266" r:id="rId14"/>
+    <p:sldId id="272" r:id="rId15"/>
+    <p:sldId id="268" r:id="rId16"/>
+    <p:sldId id="269" r:id="rId17"/>
   </p:sldIdLst>
   <p:sldSz cx="12192000" cy="6858000"/>
   <p:notesSz cx="6858000" cy="9144000"/>
@@ -276,7 +274,7 @@
           <a:p>
             <a:fld id="{0F45E6E6-56B5-476E-A835-0EA484E7D0D1}" type="datetimeFigureOut">
               <a:rPr lang="ko-KR" altLang="en-US" smtClean="0"/>
-              <a:t>2025-10-09</a:t>
+              <a:t>2026-03-08</a:t>
             </a:fld>
             <a:endParaRPr lang="ko-KR" altLang="en-US"/>
           </a:p>
@@ -474,7 +472,7 @@
           <a:p>
             <a:fld id="{0F45E6E6-56B5-476E-A835-0EA484E7D0D1}" type="datetimeFigureOut">
               <a:rPr lang="ko-KR" altLang="en-US" smtClean="0"/>
-              <a:t>2025-10-09</a:t>
+              <a:t>2026-03-08</a:t>
             </a:fld>
             <a:endParaRPr lang="ko-KR" altLang="en-US"/>
           </a:p>
@@ -682,7 +680,7 @@
           <a:p>
             <a:fld id="{0F45E6E6-56B5-476E-A835-0EA484E7D0D1}" type="datetimeFigureOut">
               <a:rPr lang="ko-KR" altLang="en-US" smtClean="0"/>
-              <a:t>2025-10-09</a:t>
+              <a:t>2026-03-08</a:t>
             </a:fld>
             <a:endParaRPr lang="ko-KR" altLang="en-US"/>
           </a:p>
@@ -880,7 +878,7 @@
           <a:p>
             <a:fld id="{0F45E6E6-56B5-476E-A835-0EA484E7D0D1}" type="datetimeFigureOut">
               <a:rPr lang="ko-KR" altLang="en-US" smtClean="0"/>
-              <a:t>2025-10-09</a:t>
+              <a:t>2026-03-08</a:t>
             </a:fld>
             <a:endParaRPr lang="ko-KR" altLang="en-US"/>
           </a:p>
@@ -1155,7 +1153,7 @@
           <a:p>
             <a:fld id="{0F45E6E6-56B5-476E-A835-0EA484E7D0D1}" type="datetimeFigureOut">
               <a:rPr lang="ko-KR" altLang="en-US" smtClean="0"/>
-              <a:t>2025-10-09</a:t>
+              <a:t>2026-03-08</a:t>
             </a:fld>
             <a:endParaRPr lang="ko-KR" altLang="en-US"/>
           </a:p>
@@ -1420,7 +1418,7 @@
           <a:p>
             <a:fld id="{0F45E6E6-56B5-476E-A835-0EA484E7D0D1}" type="datetimeFigureOut">
               <a:rPr lang="ko-KR" altLang="en-US" smtClean="0"/>
-              <a:t>2025-10-09</a:t>
+              <a:t>2026-03-08</a:t>
             </a:fld>
             <a:endParaRPr lang="ko-KR" altLang="en-US"/>
           </a:p>
@@ -1832,7 +1830,7 @@
           <a:p>
             <a:fld id="{0F45E6E6-56B5-476E-A835-0EA484E7D0D1}" type="datetimeFigureOut">
               <a:rPr lang="ko-KR" altLang="en-US" smtClean="0"/>
-              <a:t>2025-10-09</a:t>
+              <a:t>2026-03-08</a:t>
             </a:fld>
             <a:endParaRPr lang="ko-KR" altLang="en-US"/>
           </a:p>
@@ -1973,7 +1971,7 @@
           <a:p>
             <a:fld id="{0F45E6E6-56B5-476E-A835-0EA484E7D0D1}" type="datetimeFigureOut">
               <a:rPr lang="ko-KR" altLang="en-US" smtClean="0"/>
-              <a:t>2025-10-09</a:t>
+              <a:t>2026-03-08</a:t>
             </a:fld>
             <a:endParaRPr lang="ko-KR" altLang="en-US"/>
           </a:p>
@@ -2086,7 +2084,7 @@
           <a:p>
             <a:fld id="{0F45E6E6-56B5-476E-A835-0EA484E7D0D1}" type="datetimeFigureOut">
               <a:rPr lang="ko-KR" altLang="en-US" smtClean="0"/>
-              <a:t>2025-10-09</a:t>
+              <a:t>2026-03-08</a:t>
             </a:fld>
             <a:endParaRPr lang="ko-KR" altLang="en-US"/>
           </a:p>
@@ -2397,7 +2395,7 @@
           <a:p>
             <a:fld id="{0F45E6E6-56B5-476E-A835-0EA484E7D0D1}" type="datetimeFigureOut">
               <a:rPr lang="ko-KR" altLang="en-US" smtClean="0"/>
-              <a:t>2025-10-09</a:t>
+              <a:t>2026-03-08</a:t>
             </a:fld>
             <a:endParaRPr lang="ko-KR" altLang="en-US"/>
           </a:p>
@@ -2685,7 +2683,7 @@
           <a:p>
             <a:fld id="{0F45E6E6-56B5-476E-A835-0EA484E7D0D1}" type="datetimeFigureOut">
               <a:rPr lang="ko-KR" altLang="en-US" smtClean="0"/>
-              <a:t>2025-10-09</a:t>
+              <a:t>2026-03-08</a:t>
             </a:fld>
             <a:endParaRPr lang="ko-KR" altLang="en-US"/>
           </a:p>
@@ -2926,7 +2924,7 @@
           <a:p>
             <a:fld id="{0F45E6E6-56B5-476E-A835-0EA484E7D0D1}" type="datetimeFigureOut">
               <a:rPr lang="ko-KR" altLang="en-US" smtClean="0"/>
-              <a:t>2025-10-09</a:t>
+              <a:t>2026-03-08</a:t>
             </a:fld>
             <a:endParaRPr lang="ko-KR" altLang="en-US"/>
           </a:p>
@@ -4439,12 +4437,103 @@
           </a:p>
         </p:txBody>
       </p:sp>
+      <p:sp>
+        <p:nvSpPr>
+          <p:cNvPr id="6" name="TextBox 5">
+            <a:extLst>
+              <a:ext uri="{FF2B5EF4-FFF2-40B4-BE49-F238E27FC236}">
+                <a16:creationId xmlns:a16="http://schemas.microsoft.com/office/drawing/2014/main" id="{8D412666-212D-4CB7-944D-A2F46FAD81FE}"/>
+              </a:ext>
+            </a:extLst>
+          </p:cNvPr>
+          <p:cNvSpPr txBox="1"/>
+          <p:nvPr/>
+        </p:nvSpPr>
+        <p:spPr>
+          <a:xfrm>
+            <a:off x="5239650" y="2553535"/>
+            <a:ext cx="5987332" cy="3139321"/>
+          </a:xfrm>
+          <a:prstGeom prst="rect">
+            <a:avLst/>
+          </a:prstGeom>
+          <a:noFill/>
+        </p:spPr>
+        <p:txBody>
+          <a:bodyPr wrap="square" rtlCol="0">
+            <a:spAutoFit/>
+          </a:bodyPr>
+          <a:lstStyle/>
+          <a:p>
+            <a:r>
+              <a:rPr lang="ko-KR" altLang="en-US" dirty="0"/>
+              <a:t>데스크 클릭 후 패널  </a:t>
+            </a:r>
+            <a:endParaRPr lang="en-US" altLang="ko-KR" dirty="0"/>
+          </a:p>
+          <a:p>
+            <a:endParaRPr lang="en-US" altLang="ko-KR" dirty="0"/>
+          </a:p>
+          <a:p>
+            <a:r>
+              <a:rPr lang="ko-KR" altLang="en-US" dirty="0"/>
+              <a:t>패널을 활성화 한 후 일기장과 퍼즐로 사용할 암호문의 자식 오브젝트들을 패널의 활성화와 같이 활성화</a:t>
+            </a:r>
+            <a:endParaRPr lang="en-US" altLang="ko-KR" dirty="0"/>
+          </a:p>
+          <a:p>
+            <a:endParaRPr lang="en-US" altLang="ko-KR" dirty="0"/>
+          </a:p>
+          <a:p>
+            <a:endParaRPr lang="en-US" altLang="ko-KR" dirty="0"/>
+          </a:p>
+          <a:p>
+            <a:r>
+              <a:rPr lang="ko-KR" altLang="en-US" dirty="0"/>
+              <a:t>예외 처리 </a:t>
+            </a:r>
+            <a:r>
+              <a:rPr lang="en-US" altLang="ko-KR" dirty="0"/>
+              <a:t>: </a:t>
+            </a:r>
+            <a:r>
+              <a:rPr lang="ko-KR" altLang="en-US" dirty="0"/>
+              <a:t>백스페이스와 마찬가지로 패널을 활성화 했을 경우 패널의 자식 오브젝트나 이미지가 아닌 이상 또한 데스크를 활성화 했을 때의 퍼즐이나 일기장을 제외한 다른 </a:t>
+            </a:r>
+            <a:r>
+              <a:rPr lang="ko-KR" altLang="en-US" dirty="0" err="1"/>
+              <a:t>오브젝트들와의</a:t>
+            </a:r>
+            <a:r>
+              <a:rPr lang="ko-KR" altLang="en-US" dirty="0"/>
+              <a:t> 상호작용은 </a:t>
+            </a:r>
+            <a:r>
+              <a:rPr lang="en-US" altLang="ko-KR" dirty="0"/>
+              <a:t>false</a:t>
+            </a:r>
+            <a:r>
+              <a:rPr lang="ko-KR" altLang="en-US" dirty="0"/>
+              <a:t>상태 상호 작용 이후 </a:t>
+            </a:r>
+            <a:r>
+              <a:rPr lang="en-US" altLang="ko-KR" dirty="0"/>
+              <a:t>true </a:t>
+            </a:r>
+            <a:r>
+              <a:rPr lang="ko-KR" altLang="en-US" dirty="0"/>
+              <a:t>상태로 전환하여 상호작용 가능하도록</a:t>
+            </a:r>
+            <a:endParaRPr lang="en-US" altLang="ko-KR" dirty="0"/>
+          </a:p>
+        </p:txBody>
+      </p:sp>
       <p:pic>
         <p:nvPicPr>
-          <p:cNvPr id="5" name="내용 개체 틀 4">
-            <a:extLst>
-              <a:ext uri="{FF2B5EF4-FFF2-40B4-BE49-F238E27FC236}">
-                <a16:creationId xmlns:a16="http://schemas.microsoft.com/office/drawing/2014/main" id="{B32C2D8B-EB5C-4880-A2F5-4687A9F9B249}"/>
+          <p:cNvPr id="13" name="내용 개체 틀 12">
+            <a:extLst>
+              <a:ext uri="{FF2B5EF4-FFF2-40B4-BE49-F238E27FC236}">
+                <a16:creationId xmlns:a16="http://schemas.microsoft.com/office/drawing/2014/main" id="{E8CB12AD-1E4C-4795-AECA-84BD9FA7CF27}"/>
               </a:ext>
             </a:extLst>
           </p:cNvPr>
@@ -4469,393 +4558,15 @@
         </p:blipFill>
         <p:spPr>
           <a:xfrm>
-            <a:off x="375489" y="2573048"/>
-            <a:ext cx="4218069" cy="2372664"/>
+            <a:off x="583010" y="2162118"/>
+            <a:ext cx="4163919" cy="3601612"/>
           </a:xfrm>
         </p:spPr>
       </p:pic>
-      <p:sp>
-        <p:nvSpPr>
-          <p:cNvPr id="6" name="TextBox 5">
-            <a:extLst>
-              <a:ext uri="{FF2B5EF4-FFF2-40B4-BE49-F238E27FC236}">
-                <a16:creationId xmlns:a16="http://schemas.microsoft.com/office/drawing/2014/main" id="{8D412666-212D-4CB7-944D-A2F46FAD81FE}"/>
-              </a:ext>
-            </a:extLst>
-          </p:cNvPr>
-          <p:cNvSpPr txBox="1"/>
-          <p:nvPr/>
-        </p:nvSpPr>
-        <p:spPr>
-          <a:xfrm>
-            <a:off x="5239650" y="2553535"/>
-            <a:ext cx="5987332" cy="3416320"/>
-          </a:xfrm>
-          <a:prstGeom prst="rect">
-            <a:avLst/>
-          </a:prstGeom>
-          <a:noFill/>
-        </p:spPr>
-        <p:txBody>
-          <a:bodyPr wrap="square" rtlCol="0">
-            <a:spAutoFit/>
-          </a:bodyPr>
-          <a:lstStyle/>
-          <a:p>
-            <a:r>
-              <a:rPr lang="ko-KR" altLang="en-US" dirty="0"/>
-              <a:t>데스크 클릭 </a:t>
-            </a:r>
-            <a:endParaRPr lang="en-US" altLang="ko-KR" dirty="0"/>
-          </a:p>
-          <a:p>
-            <a:endParaRPr lang="en-US" altLang="ko-KR" dirty="0"/>
-          </a:p>
-          <a:p>
-            <a:r>
-              <a:rPr lang="ko-KR" altLang="en-US" dirty="0"/>
-              <a:t>데스크를 클릭 하였을 경우 메뉴창을 </a:t>
-            </a:r>
-            <a:r>
-              <a:rPr lang="ko-KR" altLang="en-US" dirty="0" err="1"/>
-              <a:t>뜨운다</a:t>
-            </a:r>
-            <a:endParaRPr lang="en-US" altLang="ko-KR" dirty="0"/>
-          </a:p>
-          <a:p>
-            <a:r>
-              <a:rPr lang="en-US" altLang="ko-KR" dirty="0"/>
-              <a:t>-&gt; </a:t>
-            </a:r>
-            <a:r>
-              <a:rPr lang="ko-KR" altLang="en-US" dirty="0"/>
-              <a:t>조사한다 </a:t>
-            </a:r>
-            <a:r>
-              <a:rPr lang="en-US" altLang="ko-KR" dirty="0"/>
-              <a:t>or </a:t>
-            </a:r>
-            <a:r>
-              <a:rPr lang="ko-KR" altLang="en-US" dirty="0"/>
-              <a:t>비슷한 </a:t>
-            </a:r>
-            <a:r>
-              <a:rPr lang="ko-KR" altLang="en-US" dirty="0" err="1"/>
-              <a:t>뉘양스의</a:t>
-            </a:r>
-            <a:r>
-              <a:rPr lang="ko-KR" altLang="en-US" dirty="0"/>
-              <a:t> 대사</a:t>
-            </a:r>
-            <a:endParaRPr lang="en-US" altLang="ko-KR" dirty="0"/>
-          </a:p>
-          <a:p>
-            <a:r>
-              <a:rPr lang="en-US" altLang="ko-KR" dirty="0"/>
-              <a:t>-&gt; </a:t>
-            </a:r>
-            <a:r>
-              <a:rPr lang="ko-KR" altLang="en-US" dirty="0" err="1"/>
-              <a:t>조사한다를</a:t>
-            </a:r>
-            <a:r>
-              <a:rPr lang="ko-KR" altLang="en-US" dirty="0"/>
-              <a:t> 클릭했을 경우 데스크 패널을 활성화</a:t>
-            </a:r>
-            <a:endParaRPr lang="en-US" altLang="ko-KR" dirty="0"/>
-          </a:p>
-          <a:p>
-            <a:r>
-              <a:rPr lang="en-US" altLang="ko-KR" dirty="0"/>
-              <a:t>-&gt; </a:t>
-            </a:r>
-            <a:r>
-              <a:rPr lang="ko-KR" altLang="en-US" dirty="0"/>
-              <a:t>데스크의 자식 오브젝트들 활성화 </a:t>
-            </a:r>
-            <a:r>
-              <a:rPr lang="en-US" altLang="ko-KR" dirty="0"/>
-              <a:t>(</a:t>
-            </a:r>
-            <a:r>
-              <a:rPr lang="ko-KR" altLang="en-US" dirty="0"/>
-              <a:t>패널의 백스페이스나 데스크 패널 자식 오브젝트들</a:t>
-            </a:r>
-            <a:r>
-              <a:rPr lang="en-US" altLang="ko-KR" dirty="0"/>
-              <a:t>)</a:t>
-            </a:r>
-          </a:p>
-          <a:p>
-            <a:endParaRPr lang="en-US" altLang="ko-KR" dirty="0"/>
-          </a:p>
-          <a:p>
-            <a:r>
-              <a:rPr lang="ko-KR" altLang="en-US" dirty="0"/>
-              <a:t>예외 처리 </a:t>
-            </a:r>
-            <a:r>
-              <a:rPr lang="en-US" altLang="ko-KR" dirty="0"/>
-              <a:t>: </a:t>
-            </a:r>
-            <a:r>
-              <a:rPr lang="ko-KR" altLang="en-US" dirty="0"/>
-              <a:t>백스페이스와 마찬가지로 패널을 활성화 했을 경우 패널의 자식 오브젝트나 이미지가 아닌 이상 또한 데스크를 활성화 했을 때의 퍼즐이나 일기장을 제외한 다른 </a:t>
-            </a:r>
-            <a:r>
-              <a:rPr lang="ko-KR" altLang="en-US" dirty="0" err="1"/>
-              <a:t>오브젝트들과의</a:t>
-            </a:r>
-            <a:r>
-              <a:rPr lang="ko-KR" altLang="en-US" dirty="0"/>
-              <a:t> 상호작용은 </a:t>
-            </a:r>
-            <a:r>
-              <a:rPr lang="en-US" altLang="ko-KR" dirty="0"/>
-              <a:t>false</a:t>
-            </a:r>
-            <a:r>
-              <a:rPr lang="ko-KR" altLang="en-US" dirty="0"/>
-              <a:t>상태 </a:t>
-            </a:r>
-            <a:endParaRPr lang="en-US" altLang="ko-KR" dirty="0"/>
-          </a:p>
-        </p:txBody>
-      </p:sp>
-      <p:sp>
-        <p:nvSpPr>
-          <p:cNvPr id="3" name="직사각형 2">
-            <a:extLst>
-              <a:ext uri="{FF2B5EF4-FFF2-40B4-BE49-F238E27FC236}">
-                <a16:creationId xmlns:a16="http://schemas.microsoft.com/office/drawing/2014/main" id="{D03CD479-77EA-433F-8BBD-CD6DA4F74E29}"/>
-              </a:ext>
-            </a:extLst>
-          </p:cNvPr>
-          <p:cNvSpPr/>
-          <p:nvPr/>
-        </p:nvSpPr>
-        <p:spPr>
-          <a:xfrm>
-            <a:off x="461176" y="2679590"/>
-            <a:ext cx="477078" cy="453224"/>
-          </a:xfrm>
-          <a:prstGeom prst="rect">
-            <a:avLst/>
-          </a:prstGeom>
-        </p:spPr>
-        <p:style>
-          <a:lnRef idx="2">
-            <a:schemeClr val="accent1">
-              <a:shade val="50000"/>
-            </a:schemeClr>
-          </a:lnRef>
-          <a:fillRef idx="1">
-            <a:schemeClr val="accent1"/>
-          </a:fillRef>
-          <a:effectRef idx="0">
-            <a:schemeClr val="accent1"/>
-          </a:effectRef>
-          <a:fontRef idx="minor">
-            <a:schemeClr val="lt1"/>
-          </a:fontRef>
-        </p:style>
-        <p:txBody>
-          <a:bodyPr rtlCol="0" anchor="ctr"/>
-          <a:lstStyle/>
-          <a:p>
-            <a:pPr algn="ctr"/>
-            <a:endParaRPr lang="ko-KR" altLang="en-US"/>
-          </a:p>
-        </p:txBody>
-      </p:sp>
-      <p:sp>
-        <p:nvSpPr>
-          <p:cNvPr id="4" name="화살표: 오른쪽 3">
-            <a:extLst>
-              <a:ext uri="{FF2B5EF4-FFF2-40B4-BE49-F238E27FC236}">
-                <a16:creationId xmlns:a16="http://schemas.microsoft.com/office/drawing/2014/main" id="{6C1D3FFD-91D7-4E13-8259-AAD1757BA846}"/>
-              </a:ext>
-            </a:extLst>
-          </p:cNvPr>
-          <p:cNvSpPr/>
-          <p:nvPr/>
-        </p:nvSpPr>
-        <p:spPr>
-          <a:xfrm>
-            <a:off x="3808675" y="3808675"/>
-            <a:ext cx="620202" cy="357808"/>
-          </a:xfrm>
-          <a:prstGeom prst="rightArrow">
-            <a:avLst/>
-          </a:prstGeom>
-        </p:spPr>
-        <p:style>
-          <a:lnRef idx="2">
-            <a:schemeClr val="accent1">
-              <a:shade val="50000"/>
-            </a:schemeClr>
-          </a:lnRef>
-          <a:fillRef idx="1">
-            <a:schemeClr val="accent1"/>
-          </a:fillRef>
-          <a:effectRef idx="0">
-            <a:schemeClr val="accent1"/>
-          </a:effectRef>
-          <a:fontRef idx="minor">
-            <a:schemeClr val="lt1"/>
-          </a:fontRef>
-        </p:style>
-        <p:txBody>
-          <a:bodyPr rtlCol="0" anchor="ctr"/>
-          <a:lstStyle/>
-          <a:p>
-            <a:pPr algn="ctr"/>
-            <a:endParaRPr lang="ko-KR" altLang="en-US"/>
-          </a:p>
-        </p:txBody>
-      </p:sp>
-      <p:sp>
-        <p:nvSpPr>
-          <p:cNvPr id="7" name="화살표: 아래쪽 6">
-            <a:extLst>
-              <a:ext uri="{FF2B5EF4-FFF2-40B4-BE49-F238E27FC236}">
-                <a16:creationId xmlns:a16="http://schemas.microsoft.com/office/drawing/2014/main" id="{5EEB3AF9-EC6D-4C1E-A4AA-6F674E97F7F3}"/>
-              </a:ext>
-            </a:extLst>
-          </p:cNvPr>
-          <p:cNvSpPr/>
-          <p:nvPr/>
-        </p:nvSpPr>
-        <p:spPr>
-          <a:xfrm>
-            <a:off x="2289716" y="4317558"/>
-            <a:ext cx="389614" cy="628154"/>
-          </a:xfrm>
-          <a:prstGeom prst="downArrow">
-            <a:avLst/>
-          </a:prstGeom>
-        </p:spPr>
-        <p:style>
-          <a:lnRef idx="2">
-            <a:schemeClr val="accent1">
-              <a:shade val="50000"/>
-            </a:schemeClr>
-          </a:lnRef>
-          <a:fillRef idx="1">
-            <a:schemeClr val="accent1"/>
-          </a:fillRef>
-          <a:effectRef idx="0">
-            <a:schemeClr val="accent1"/>
-          </a:effectRef>
-          <a:fontRef idx="minor">
-            <a:schemeClr val="lt1"/>
-          </a:fontRef>
-        </p:style>
-        <p:txBody>
-          <a:bodyPr rtlCol="0" anchor="ctr"/>
-          <a:lstStyle/>
-          <a:p>
-            <a:pPr algn="ctr"/>
-            <a:endParaRPr lang="ko-KR" altLang="en-US"/>
-          </a:p>
-        </p:txBody>
-      </p:sp>
-      <p:sp>
-        <p:nvSpPr>
-          <p:cNvPr id="8" name="화살표: 아래쪽 7">
-            <a:extLst>
-              <a:ext uri="{FF2B5EF4-FFF2-40B4-BE49-F238E27FC236}">
-                <a16:creationId xmlns:a16="http://schemas.microsoft.com/office/drawing/2014/main" id="{6F431507-E024-44DE-BB3E-825853B3C7EB}"/>
-              </a:ext>
-            </a:extLst>
-          </p:cNvPr>
-          <p:cNvSpPr/>
-          <p:nvPr/>
-        </p:nvSpPr>
-        <p:spPr>
-          <a:xfrm rot="10800000">
-            <a:off x="2289716" y="2906202"/>
-            <a:ext cx="389614" cy="628154"/>
-          </a:xfrm>
-          <a:prstGeom prst="downArrow">
-            <a:avLst/>
-          </a:prstGeom>
-        </p:spPr>
-        <p:style>
-          <a:lnRef idx="2">
-            <a:schemeClr val="accent1">
-              <a:shade val="50000"/>
-            </a:schemeClr>
-          </a:lnRef>
-          <a:fillRef idx="1">
-            <a:schemeClr val="accent1"/>
-          </a:fillRef>
-          <a:effectRef idx="0">
-            <a:schemeClr val="accent1"/>
-          </a:effectRef>
-          <a:fontRef idx="minor">
-            <a:schemeClr val="lt1"/>
-          </a:fontRef>
-        </p:style>
-        <p:txBody>
-          <a:bodyPr rtlCol="0" anchor="ctr"/>
-          <a:lstStyle/>
-          <a:p>
-            <a:pPr algn="ctr"/>
-            <a:endParaRPr lang="ko-KR" altLang="en-US"/>
-          </a:p>
-        </p:txBody>
-      </p:sp>
-      <p:sp>
-        <p:nvSpPr>
-          <p:cNvPr id="9" name="화살표: 오른쪽 8">
-            <a:extLst>
-              <a:ext uri="{FF2B5EF4-FFF2-40B4-BE49-F238E27FC236}">
-                <a16:creationId xmlns:a16="http://schemas.microsoft.com/office/drawing/2014/main" id="{C7832BD4-B878-4B87-BA5B-1B8AA36913E2}"/>
-              </a:ext>
-            </a:extLst>
-          </p:cNvPr>
-          <p:cNvSpPr/>
-          <p:nvPr/>
-        </p:nvSpPr>
-        <p:spPr>
-          <a:xfrm rot="10800000">
-            <a:off x="628153" y="3707697"/>
-            <a:ext cx="620202" cy="357808"/>
-          </a:xfrm>
-          <a:prstGeom prst="rightArrow">
-            <a:avLst/>
-          </a:prstGeom>
-        </p:spPr>
-        <p:style>
-          <a:lnRef idx="2">
-            <a:schemeClr val="accent1">
-              <a:shade val="50000"/>
-            </a:schemeClr>
-          </a:lnRef>
-          <a:fillRef idx="1">
-            <a:schemeClr val="accent1"/>
-          </a:fillRef>
-          <a:effectRef idx="0">
-            <a:schemeClr val="accent1"/>
-          </a:effectRef>
-          <a:fontRef idx="minor">
-            <a:schemeClr val="lt1"/>
-          </a:fontRef>
-        </p:style>
-        <p:txBody>
-          <a:bodyPr rtlCol="0" anchor="ctr"/>
-          <a:lstStyle/>
-          <a:p>
-            <a:pPr algn="ctr"/>
-            <a:endParaRPr lang="ko-KR" altLang="en-US"/>
-          </a:p>
-        </p:txBody>
-      </p:sp>
     </p:spTree>
     <p:extLst>
       <p:ext uri="{BB962C8B-B14F-4D97-AF65-F5344CB8AC3E}">
-        <p14:creationId xmlns:p14="http://schemas.microsoft.com/office/powerpoint/2010/main" val="2253979823"/>
+        <p14:creationId xmlns:p14="http://schemas.microsoft.com/office/powerpoint/2010/main" val="737257333"/>
       </p:ext>
     </p:extLst>
   </p:cSld>
@@ -4953,7 +4664,7 @@
           <a:p>
             <a:r>
               <a:rPr lang="ko-KR" altLang="en-US" dirty="0"/>
-              <a:t>데스크 클릭 후 패널  </a:t>
+              <a:t>일기장 클릭  </a:t>
             </a:r>
             <a:endParaRPr lang="en-US" altLang="ko-KR" dirty="0"/>
           </a:p>
@@ -4963,63 +4674,106 @@
           <a:p>
             <a:r>
               <a:rPr lang="ko-KR" altLang="en-US" dirty="0"/>
-              <a:t>패널을 활성화 한 후 일기장과 퍼즐로 사용할 암호문의 자식 오브젝트들을 패널의 활성화와 같이 활성화</a:t>
+              <a:t>일기장 클릭 이후 패널 활성화</a:t>
             </a:r>
             <a:endParaRPr lang="en-US" altLang="ko-KR" dirty="0"/>
           </a:p>
           <a:p>
+            <a:r>
+              <a:rPr lang="en-US" altLang="ko-KR" dirty="0"/>
+              <a:t>-&gt; </a:t>
+            </a:r>
+            <a:r>
+              <a:rPr lang="ko-KR" altLang="en-US" dirty="0"/>
+              <a:t>일기장의 내용이 나오고 넘기는 오브젝트 활성화 </a:t>
+            </a:r>
+            <a:r>
+              <a:rPr lang="en-US" altLang="ko-KR" dirty="0"/>
+              <a:t>(</a:t>
+            </a:r>
+            <a:r>
+              <a:rPr lang="ko-KR" altLang="en-US" dirty="0"/>
+              <a:t>화살표</a:t>
+            </a:r>
+            <a:r>
+              <a:rPr lang="en-US" altLang="ko-KR" dirty="0"/>
+              <a:t>)</a:t>
+            </a:r>
+          </a:p>
+          <a:p>
             <a:endParaRPr lang="en-US" altLang="ko-KR" dirty="0"/>
           </a:p>
           <a:p>
+            <a:r>
+              <a:rPr lang="en-US" altLang="ko-KR" dirty="0"/>
+              <a:t>-&gt; </a:t>
+            </a:r>
+            <a:r>
+              <a:rPr lang="ko-KR" altLang="en-US" dirty="0"/>
+              <a:t>일기장을 다 넘기면 열쇠를 습득 가능하게 함 </a:t>
+            </a:r>
+            <a:r>
+              <a:rPr lang="en-US" altLang="ko-KR" dirty="0"/>
+              <a:t>(</a:t>
+            </a:r>
+            <a:r>
+              <a:rPr lang="ko-KR" altLang="en-US" dirty="0"/>
+              <a:t>인벤토리 추가</a:t>
+            </a:r>
+            <a:r>
+              <a:rPr lang="en-US" altLang="ko-KR" dirty="0"/>
+              <a:t>)</a:t>
+            </a:r>
+          </a:p>
+          <a:p>
             <a:endParaRPr lang="en-US" altLang="ko-KR" dirty="0"/>
           </a:p>
           <a:p>
             <a:r>
-              <a:rPr lang="ko-KR" altLang="en-US" dirty="0"/>
-              <a:t>예외 처리 </a:t>
-            </a:r>
-            <a:r>
-              <a:rPr lang="en-US" altLang="ko-KR" dirty="0"/>
-              <a:t>: </a:t>
-            </a:r>
-            <a:r>
-              <a:rPr lang="ko-KR" altLang="en-US" dirty="0"/>
-              <a:t>백스페이스와 마찬가지로 패널을 활성화 했을 경우 패널의 자식 오브젝트나 이미지가 아닌 이상 또한 데스크를 활성화 했을 때의 퍼즐이나 일기장을 제외한 다른 </a:t>
+              <a:rPr lang="en-US" altLang="ko-KR" dirty="0"/>
+              <a:t>-&gt; </a:t>
+            </a:r>
+            <a:r>
+              <a:rPr lang="ko-KR" altLang="en-US" dirty="0"/>
+              <a:t>일기장 </a:t>
+            </a:r>
+            <a:r>
+              <a:rPr lang="en-US" altLang="ko-KR" dirty="0"/>
+              <a:t>4~5</a:t>
+            </a:r>
+            <a:r>
+              <a:rPr lang="ko-KR" altLang="en-US" dirty="0"/>
+              <a:t>페이지 추가 </a:t>
+            </a:r>
+            <a:r>
+              <a:rPr lang="en-US" altLang="ko-KR" dirty="0"/>
+              <a:t>(</a:t>
+            </a:r>
+            <a:r>
+              <a:rPr lang="ko-KR" altLang="en-US" dirty="0"/>
+              <a:t>내용은 </a:t>
             </a:r>
             <a:r>
               <a:rPr lang="ko-KR" altLang="en-US" dirty="0" err="1"/>
-              <a:t>오브젝트들와의</a:t>
-            </a:r>
-            <a:r>
-              <a:rPr lang="ko-KR" altLang="en-US" dirty="0"/>
-              <a:t> 상호작용은 </a:t>
-            </a:r>
-            <a:r>
-              <a:rPr lang="en-US" altLang="ko-KR" dirty="0"/>
-              <a:t>false</a:t>
-            </a:r>
-            <a:r>
-              <a:rPr lang="ko-KR" altLang="en-US" dirty="0"/>
-              <a:t>상태 상호 작용 이후 </a:t>
-            </a:r>
-            <a:r>
-              <a:rPr lang="en-US" altLang="ko-KR" dirty="0"/>
-              <a:t>true </a:t>
-            </a:r>
-            <a:r>
-              <a:rPr lang="ko-KR" altLang="en-US" dirty="0"/>
-              <a:t>상태로 전환하여 상호작용 가능하도록</a:t>
-            </a:r>
-            <a:endParaRPr lang="en-US" altLang="ko-KR" dirty="0"/>
+              <a:t>내러티브</a:t>
+            </a:r>
+            <a:r>
+              <a:rPr lang="ko-KR" altLang="en-US" dirty="0"/>
+              <a:t> 확정 이후 추가</a:t>
+            </a:r>
+            <a:r>
+              <a:rPr lang="en-US" altLang="ko-KR" dirty="0"/>
+              <a:t>) </a:t>
+            </a:r>
           </a:p>
         </p:txBody>
       </p:sp>
       <p:pic>
         <p:nvPicPr>
-          <p:cNvPr id="13" name="내용 개체 틀 12">
-            <a:extLst>
-              <a:ext uri="{FF2B5EF4-FFF2-40B4-BE49-F238E27FC236}">
-                <a16:creationId xmlns:a16="http://schemas.microsoft.com/office/drawing/2014/main" id="{E8CB12AD-1E4C-4795-AECA-84BD9FA7CF27}"/>
+          <p:cNvPr id="7" name="내용 개체 틀 6">
+            <a:extLst>
+              <a:ext uri="{FF2B5EF4-FFF2-40B4-BE49-F238E27FC236}">
+                <a16:creationId xmlns:a16="http://schemas.microsoft.com/office/drawing/2014/main" id="{CC12949B-22DF-43DB-BEDC-8F5B4BBF45A4}"/>
               </a:ext>
             </a:extLst>
           </p:cNvPr>
@@ -5044,15 +4798,15 @@
         </p:blipFill>
         <p:spPr>
           <a:xfrm>
-            <a:off x="583010" y="2162118"/>
-            <a:ext cx="4163919" cy="3601612"/>
+            <a:off x="1421626" y="2810338"/>
+            <a:ext cx="2971800" cy="2000250"/>
           </a:xfrm>
         </p:spPr>
       </p:pic>
     </p:spTree>
     <p:extLst>
       <p:ext uri="{BB962C8B-B14F-4D97-AF65-F5344CB8AC3E}">
-        <p14:creationId xmlns:p14="http://schemas.microsoft.com/office/powerpoint/2010/main" val="737257333"/>
+        <p14:creationId xmlns:p14="http://schemas.microsoft.com/office/powerpoint/2010/main" val="2348711516"/>
       </p:ext>
     </p:extLst>
   </p:cSld>
@@ -5221,54 +4975,83 @@
             </a:r>
             <a:r>
               <a:rPr lang="ko-KR" altLang="en-US" dirty="0"/>
-              <a:t>일기장 </a:t>
-            </a:r>
-            <a:r>
-              <a:rPr lang="en-US" altLang="ko-KR" dirty="0"/>
-              <a:t>4~5</a:t>
-            </a:r>
-            <a:r>
-              <a:rPr lang="ko-KR" altLang="en-US" dirty="0"/>
-              <a:t>페이지 추가 </a:t>
-            </a:r>
-            <a:r>
-              <a:rPr lang="en-US" altLang="ko-KR" dirty="0"/>
-              <a:t>(</a:t>
-            </a:r>
-            <a:r>
-              <a:rPr lang="ko-KR" altLang="en-US" dirty="0"/>
-              <a:t>내용은 </a:t>
-            </a:r>
-            <a:r>
-              <a:rPr lang="ko-KR" altLang="en-US" dirty="0" err="1"/>
-              <a:t>내러티브</a:t>
-            </a:r>
-            <a:r>
-              <a:rPr lang="ko-KR" altLang="en-US" dirty="0"/>
-              <a:t> 확정 이후 추가</a:t>
-            </a:r>
-            <a:r>
-              <a:rPr lang="en-US" altLang="ko-KR" dirty="0"/>
-              <a:t>) </a:t>
-            </a:r>
+              <a:t>일기장이기에 </a:t>
+            </a:r>
+            <a:r>
+              <a:rPr lang="en-US" altLang="ko-KR" dirty="0"/>
+              <a:t>4</a:t>
+            </a:r>
+            <a:r>
+              <a:rPr lang="ko-KR" altLang="en-US" dirty="0"/>
+              <a:t>페이지 정도의 일기가 들어갈 예정</a:t>
+            </a:r>
+            <a:r>
+              <a:rPr lang="en-US" altLang="ko-KR" dirty="0"/>
+              <a:t>.</a:t>
+            </a:r>
+            <a:r>
+              <a:rPr lang="ko-KR" altLang="en-US" dirty="0"/>
+              <a:t> 저택의 어느 정도의 분위기를 표현하기 위함</a:t>
+            </a:r>
+            <a:endParaRPr lang="en-US" altLang="ko-KR" dirty="0"/>
+          </a:p>
+        </p:txBody>
+      </p:sp>
+      <p:sp>
+        <p:nvSpPr>
+          <p:cNvPr id="4" name="내용 개체 틀 3">
+            <a:extLst>
+              <a:ext uri="{FF2B5EF4-FFF2-40B4-BE49-F238E27FC236}">
+                <a16:creationId xmlns:a16="http://schemas.microsoft.com/office/drawing/2014/main" id="{9B30CAB0-6B03-4613-925D-0F6F6BD52F4F}"/>
+              </a:ext>
+            </a:extLst>
+          </p:cNvPr>
+          <p:cNvSpPr>
+            <a:spLocks noGrp="1"/>
+          </p:cNvSpPr>
+          <p:nvPr>
+            <p:ph idx="1"/>
+          </p:nvPr>
+        </p:nvSpPr>
+        <p:spPr/>
+        <p:txBody>
+          <a:bodyPr>
+            <a:normAutofit/>
+          </a:bodyPr>
+          <a:lstStyle/>
+          <a:p>
+            <a:pPr marL="0" indent="0">
+              <a:buNone/>
+            </a:pPr>
+            <a:r>
+              <a:rPr lang="en-US" altLang="ko-KR" sz="2000" dirty="0"/>
+              <a:t>[</a:t>
+            </a:r>
+            <a:r>
+              <a:rPr lang="ko-KR" altLang="en-US" sz="2000" dirty="0"/>
+              <a:t>책을 펼쳤을 때의 참고 이미지</a:t>
+            </a:r>
+            <a:r>
+              <a:rPr lang="en-US" altLang="ko-KR" sz="2000" dirty="0"/>
+              <a:t>]</a:t>
+            </a:r>
+            <a:endParaRPr lang="ko-KR" altLang="en-US" sz="2000" dirty="0"/>
           </a:p>
         </p:txBody>
       </p:sp>
       <p:pic>
         <p:nvPicPr>
-          <p:cNvPr id="7" name="내용 개체 틀 6">
-            <a:extLst>
-              <a:ext uri="{FF2B5EF4-FFF2-40B4-BE49-F238E27FC236}">
-                <a16:creationId xmlns:a16="http://schemas.microsoft.com/office/drawing/2014/main" id="{CC12949B-22DF-43DB-BEDC-8F5B4BBF45A4}"/>
+          <p:cNvPr id="8" name="그림 7">
+            <a:extLst>
+              <a:ext uri="{FF2B5EF4-FFF2-40B4-BE49-F238E27FC236}">
+                <a16:creationId xmlns:a16="http://schemas.microsoft.com/office/drawing/2014/main" id="{E3DCB647-2290-4E9E-8640-1637C240E398}"/>
               </a:ext>
             </a:extLst>
           </p:cNvPr>
           <p:cNvPicPr>
-            <a:picLocks noGrp="1" noChangeAspect="1"/>
+            <a:picLocks noChangeAspect="1"/>
           </p:cNvPicPr>
-          <p:nvPr>
-            <p:ph idx="1"/>
-          </p:nvPr>
+          <p:nvPr/>
         </p:nvPicPr>
         <p:blipFill>
           <a:blip r:embed="rId2">
@@ -5284,15 +5067,18 @@
         </p:blipFill>
         <p:spPr>
           <a:xfrm>
-            <a:off x="1421626" y="2810338"/>
-            <a:ext cx="2971800" cy="2000250"/>
-          </a:xfrm>
+            <a:off x="956807" y="2553535"/>
+            <a:ext cx="4036518" cy="2234908"/>
+          </a:xfrm>
+          <a:prstGeom prst="rect">
+            <a:avLst/>
+          </a:prstGeom>
         </p:spPr>
       </p:pic>
     </p:spTree>
     <p:extLst>
       <p:ext uri="{BB962C8B-B14F-4D97-AF65-F5344CB8AC3E}">
-        <p14:creationId xmlns:p14="http://schemas.microsoft.com/office/powerpoint/2010/main" val="2348711516"/>
+        <p14:creationId xmlns:p14="http://schemas.microsoft.com/office/powerpoint/2010/main" val="1673775839"/>
       </p:ext>
     </p:extLst>
   </p:cSld>
@@ -5360,278 +5146,6 @@
           </a:p>
         </p:txBody>
       </p:sp>
-      <p:sp>
-        <p:nvSpPr>
-          <p:cNvPr id="6" name="TextBox 5">
-            <a:extLst>
-              <a:ext uri="{FF2B5EF4-FFF2-40B4-BE49-F238E27FC236}">
-                <a16:creationId xmlns:a16="http://schemas.microsoft.com/office/drawing/2014/main" id="{8D412666-212D-4CB7-944D-A2F46FAD81FE}"/>
-              </a:ext>
-            </a:extLst>
-          </p:cNvPr>
-          <p:cNvSpPr txBox="1"/>
-          <p:nvPr/>
-        </p:nvSpPr>
-        <p:spPr>
-          <a:xfrm>
-            <a:off x="5239650" y="2553535"/>
-            <a:ext cx="5987332" cy="3139321"/>
-          </a:xfrm>
-          <a:prstGeom prst="rect">
-            <a:avLst/>
-          </a:prstGeom>
-          <a:noFill/>
-        </p:spPr>
-        <p:txBody>
-          <a:bodyPr wrap="square" rtlCol="0">
-            <a:spAutoFit/>
-          </a:bodyPr>
-          <a:lstStyle/>
-          <a:p>
-            <a:r>
-              <a:rPr lang="ko-KR" altLang="en-US" dirty="0"/>
-              <a:t>일기장 클릭  </a:t>
-            </a:r>
-            <a:endParaRPr lang="en-US" altLang="ko-KR" dirty="0"/>
-          </a:p>
-          <a:p>
-            <a:endParaRPr lang="en-US" altLang="ko-KR" dirty="0"/>
-          </a:p>
-          <a:p>
-            <a:r>
-              <a:rPr lang="ko-KR" altLang="en-US" dirty="0"/>
-              <a:t>일기장 클릭 이후 패널 활성화</a:t>
-            </a:r>
-            <a:endParaRPr lang="en-US" altLang="ko-KR" dirty="0"/>
-          </a:p>
-          <a:p>
-            <a:r>
-              <a:rPr lang="en-US" altLang="ko-KR" dirty="0"/>
-              <a:t>-&gt; </a:t>
-            </a:r>
-            <a:r>
-              <a:rPr lang="ko-KR" altLang="en-US" dirty="0"/>
-              <a:t>일기장의 내용이 나오고 넘기는 오브젝트 활성화 </a:t>
-            </a:r>
-            <a:r>
-              <a:rPr lang="en-US" altLang="ko-KR" dirty="0"/>
-              <a:t>(</a:t>
-            </a:r>
-            <a:r>
-              <a:rPr lang="ko-KR" altLang="en-US" dirty="0"/>
-              <a:t>화살표</a:t>
-            </a:r>
-            <a:r>
-              <a:rPr lang="en-US" altLang="ko-KR" dirty="0"/>
-              <a:t>)</a:t>
-            </a:r>
-          </a:p>
-          <a:p>
-            <a:endParaRPr lang="en-US" altLang="ko-KR" dirty="0"/>
-          </a:p>
-          <a:p>
-            <a:r>
-              <a:rPr lang="en-US" altLang="ko-KR" dirty="0"/>
-              <a:t>-&gt; </a:t>
-            </a:r>
-            <a:r>
-              <a:rPr lang="ko-KR" altLang="en-US" dirty="0"/>
-              <a:t>일기장을 다 넘기면 열쇠를 습득 가능하게 함 </a:t>
-            </a:r>
-            <a:r>
-              <a:rPr lang="en-US" altLang="ko-KR" dirty="0"/>
-              <a:t>(</a:t>
-            </a:r>
-            <a:r>
-              <a:rPr lang="ko-KR" altLang="en-US" dirty="0"/>
-              <a:t>인벤토리 추가</a:t>
-            </a:r>
-            <a:r>
-              <a:rPr lang="en-US" altLang="ko-KR" dirty="0"/>
-              <a:t>)</a:t>
-            </a:r>
-          </a:p>
-          <a:p>
-            <a:endParaRPr lang="en-US" altLang="ko-KR" dirty="0"/>
-          </a:p>
-          <a:p>
-            <a:r>
-              <a:rPr lang="en-US" altLang="ko-KR" dirty="0"/>
-              <a:t>-&gt; </a:t>
-            </a:r>
-            <a:r>
-              <a:rPr lang="ko-KR" altLang="en-US" dirty="0"/>
-              <a:t>일기장이기에 </a:t>
-            </a:r>
-            <a:r>
-              <a:rPr lang="en-US" altLang="ko-KR" dirty="0"/>
-              <a:t>4</a:t>
-            </a:r>
-            <a:r>
-              <a:rPr lang="ko-KR" altLang="en-US" dirty="0"/>
-              <a:t>페이지 정도의 일기가 들어갈 예정</a:t>
-            </a:r>
-            <a:r>
-              <a:rPr lang="en-US" altLang="ko-KR" dirty="0"/>
-              <a:t>.</a:t>
-            </a:r>
-            <a:r>
-              <a:rPr lang="ko-KR" altLang="en-US" dirty="0"/>
-              <a:t> 저택의 어느 정도의 분위기를 표현하기 위함</a:t>
-            </a:r>
-            <a:endParaRPr lang="en-US" altLang="ko-KR" dirty="0"/>
-          </a:p>
-        </p:txBody>
-      </p:sp>
-      <p:sp>
-        <p:nvSpPr>
-          <p:cNvPr id="4" name="내용 개체 틀 3">
-            <a:extLst>
-              <a:ext uri="{FF2B5EF4-FFF2-40B4-BE49-F238E27FC236}">
-                <a16:creationId xmlns:a16="http://schemas.microsoft.com/office/drawing/2014/main" id="{9B30CAB0-6B03-4613-925D-0F6F6BD52F4F}"/>
-              </a:ext>
-            </a:extLst>
-          </p:cNvPr>
-          <p:cNvSpPr>
-            <a:spLocks noGrp="1"/>
-          </p:cNvSpPr>
-          <p:nvPr>
-            <p:ph idx="1"/>
-          </p:nvPr>
-        </p:nvSpPr>
-        <p:spPr/>
-        <p:txBody>
-          <a:bodyPr>
-            <a:normAutofit/>
-          </a:bodyPr>
-          <a:lstStyle/>
-          <a:p>
-            <a:pPr marL="0" indent="0">
-              <a:buNone/>
-            </a:pPr>
-            <a:r>
-              <a:rPr lang="en-US" altLang="ko-KR" sz="2000" dirty="0"/>
-              <a:t>[</a:t>
-            </a:r>
-            <a:r>
-              <a:rPr lang="ko-KR" altLang="en-US" sz="2000" dirty="0"/>
-              <a:t>책을 펼쳤을 때의 참고 이미지</a:t>
-            </a:r>
-            <a:r>
-              <a:rPr lang="en-US" altLang="ko-KR" sz="2000" dirty="0"/>
-              <a:t>]</a:t>
-            </a:r>
-            <a:endParaRPr lang="ko-KR" altLang="en-US" sz="2000" dirty="0"/>
-          </a:p>
-        </p:txBody>
-      </p:sp>
-      <p:pic>
-        <p:nvPicPr>
-          <p:cNvPr id="8" name="그림 7">
-            <a:extLst>
-              <a:ext uri="{FF2B5EF4-FFF2-40B4-BE49-F238E27FC236}">
-                <a16:creationId xmlns:a16="http://schemas.microsoft.com/office/drawing/2014/main" id="{E3DCB647-2290-4E9E-8640-1637C240E398}"/>
-              </a:ext>
-            </a:extLst>
-          </p:cNvPr>
-          <p:cNvPicPr>
-            <a:picLocks noChangeAspect="1"/>
-          </p:cNvPicPr>
-          <p:nvPr/>
-        </p:nvPicPr>
-        <p:blipFill>
-          <a:blip r:embed="rId2">
-            <a:extLst>
-              <a:ext uri="{28A0092B-C50C-407E-A947-70E740481C1C}">
-                <a14:useLocalDpi xmlns:a14="http://schemas.microsoft.com/office/drawing/2010/main" val="0"/>
-              </a:ext>
-            </a:extLst>
-          </a:blip>
-          <a:stretch>
-            <a:fillRect/>
-          </a:stretch>
-        </p:blipFill>
-        <p:spPr>
-          <a:xfrm>
-            <a:off x="956807" y="2553535"/>
-            <a:ext cx="4036518" cy="2234908"/>
-          </a:xfrm>
-          <a:prstGeom prst="rect">
-            <a:avLst/>
-          </a:prstGeom>
-        </p:spPr>
-      </p:pic>
-    </p:spTree>
-    <p:extLst>
-      <p:ext uri="{BB962C8B-B14F-4D97-AF65-F5344CB8AC3E}">
-        <p14:creationId xmlns:p14="http://schemas.microsoft.com/office/powerpoint/2010/main" val="1673775839"/>
-      </p:ext>
-    </p:extLst>
-  </p:cSld>
-  <p:clrMapOvr>
-    <a:masterClrMapping/>
-  </p:clrMapOvr>
-</p:sld>
-</file>
-
-<file path=ppt/slides/slide16.xml><?xml version="1.0" encoding="utf-8"?>
-<p:sld xmlns:a="http://schemas.openxmlformats.org/drawingml/2006/main" xmlns:r="http://schemas.openxmlformats.org/officeDocument/2006/relationships" xmlns:p="http://schemas.openxmlformats.org/presentationml/2006/main">
-  <p:cSld>
-    <p:spTree>
-      <p:nvGrpSpPr>
-        <p:cNvPr id="1" name=""/>
-        <p:cNvGrpSpPr/>
-        <p:nvPr/>
-      </p:nvGrpSpPr>
-      <p:grpSpPr>
-        <a:xfrm>
-          <a:off x="0" y="0"/>
-          <a:ext cx="0" cy="0"/>
-          <a:chOff x="0" y="0"/>
-          <a:chExt cx="0" cy="0"/>
-        </a:xfrm>
-      </p:grpSpPr>
-      <p:sp>
-        <p:nvSpPr>
-          <p:cNvPr id="2" name="제목 1">
-            <a:extLst>
-              <a:ext uri="{FF2B5EF4-FFF2-40B4-BE49-F238E27FC236}">
-                <a16:creationId xmlns:a16="http://schemas.microsoft.com/office/drawing/2014/main" id="{9E86BC59-9D15-44F2-941C-A39A53D9C1CB}"/>
-              </a:ext>
-            </a:extLst>
-          </p:cNvPr>
-          <p:cNvSpPr>
-            <a:spLocks noGrp="1"/>
-          </p:cNvSpPr>
-          <p:nvPr>
-            <p:ph type="title"/>
-          </p:nvPr>
-        </p:nvSpPr>
-        <p:spPr/>
-        <p:txBody>
-          <a:bodyPr/>
-          <a:lstStyle/>
-          <a:p>
-            <a:r>
-              <a:rPr lang="ko-KR" altLang="en-US" dirty="0"/>
-              <a:t>개발팀</a:t>
-            </a:r>
-            <a:r>
-              <a:rPr lang="en-US" altLang="ko-KR" dirty="0"/>
-              <a:t>(</a:t>
-            </a:r>
-            <a:r>
-              <a:rPr lang="ko-KR" altLang="en-US" dirty="0"/>
-              <a:t>서재 중앙</a:t>
-            </a:r>
-            <a:r>
-              <a:rPr lang="en-US" altLang="ko-KR" dirty="0"/>
-              <a:t>)</a:t>
-            </a:r>
-            <a:endParaRPr lang="ko-KR" altLang="en-US" dirty="0"/>
-          </a:p>
-        </p:txBody>
-      </p:sp>
       <p:pic>
         <p:nvPicPr>
           <p:cNvPr id="8" name="내용 개체 틀 7">
@@ -5798,250 +5312,7 @@
 </p:sld>
 </file>
 
-<file path=ppt/slides/slide17.xml><?xml version="1.0" encoding="utf-8"?>
-<p:sld xmlns:a="http://schemas.openxmlformats.org/drawingml/2006/main" xmlns:r="http://schemas.openxmlformats.org/officeDocument/2006/relationships" xmlns:p="http://schemas.openxmlformats.org/presentationml/2006/main">
-  <p:cSld>
-    <p:spTree>
-      <p:nvGrpSpPr>
-        <p:cNvPr id="1" name=""/>
-        <p:cNvGrpSpPr/>
-        <p:nvPr/>
-      </p:nvGrpSpPr>
-      <p:grpSpPr>
-        <a:xfrm>
-          <a:off x="0" y="0"/>
-          <a:ext cx="0" cy="0"/>
-          <a:chOff x="0" y="0"/>
-          <a:chExt cx="0" cy="0"/>
-        </a:xfrm>
-      </p:grpSpPr>
-      <p:sp>
-        <p:nvSpPr>
-          <p:cNvPr id="2" name="제목 1">
-            <a:extLst>
-              <a:ext uri="{FF2B5EF4-FFF2-40B4-BE49-F238E27FC236}">
-                <a16:creationId xmlns:a16="http://schemas.microsoft.com/office/drawing/2014/main" id="{9E86BC59-9D15-44F2-941C-A39A53D9C1CB}"/>
-              </a:ext>
-            </a:extLst>
-          </p:cNvPr>
-          <p:cNvSpPr>
-            <a:spLocks noGrp="1"/>
-          </p:cNvSpPr>
-          <p:nvPr>
-            <p:ph type="title"/>
-          </p:nvPr>
-        </p:nvSpPr>
-        <p:spPr/>
-        <p:txBody>
-          <a:bodyPr/>
-          <a:lstStyle/>
-          <a:p>
-            <a:r>
-              <a:rPr lang="ko-KR" altLang="en-US" dirty="0"/>
-              <a:t>개발팀</a:t>
-            </a:r>
-            <a:r>
-              <a:rPr lang="en-US" altLang="ko-KR" dirty="0"/>
-              <a:t> + </a:t>
-            </a:r>
-            <a:r>
-              <a:rPr lang="ko-KR" altLang="en-US" dirty="0" err="1"/>
-              <a:t>아트팀</a:t>
-            </a:r>
-            <a:r>
-              <a:rPr lang="en-US" altLang="ko-KR" dirty="0"/>
-              <a:t>(</a:t>
-            </a:r>
-            <a:r>
-              <a:rPr lang="ko-KR" altLang="en-US" dirty="0"/>
-              <a:t>서재 중앙</a:t>
-            </a:r>
-            <a:r>
-              <a:rPr lang="en-US" altLang="ko-KR" dirty="0"/>
-              <a:t>)</a:t>
-            </a:r>
-            <a:endParaRPr lang="ko-KR" altLang="en-US" dirty="0"/>
-          </a:p>
-        </p:txBody>
-      </p:sp>
-      <p:pic>
-        <p:nvPicPr>
-          <p:cNvPr id="8" name="내용 개체 틀 7">
-            <a:extLst>
-              <a:ext uri="{FF2B5EF4-FFF2-40B4-BE49-F238E27FC236}">
-                <a16:creationId xmlns:a16="http://schemas.microsoft.com/office/drawing/2014/main" id="{7BCFD2C5-5043-42FF-BC75-A28DABCF816F}"/>
-              </a:ext>
-            </a:extLst>
-          </p:cNvPr>
-          <p:cNvPicPr>
-            <a:picLocks noGrp="1" noChangeAspect="1"/>
-          </p:cNvPicPr>
-          <p:nvPr>
-            <p:ph idx="1"/>
-          </p:nvPr>
-        </p:nvPicPr>
-        <p:blipFill>
-          <a:blip r:embed="rId2">
-            <a:extLst>
-              <a:ext uri="{28A0092B-C50C-407E-A947-70E740481C1C}">
-                <a14:useLocalDpi xmlns:a14="http://schemas.microsoft.com/office/drawing/2010/main" val="0"/>
-              </a:ext>
-            </a:extLst>
-          </a:blip>
-          <a:stretch>
-            <a:fillRect/>
-          </a:stretch>
-        </p:blipFill>
-        <p:spPr>
-          <a:xfrm>
-            <a:off x="1072101" y="2631136"/>
-            <a:ext cx="2743200" cy="2343150"/>
-          </a:xfrm>
-        </p:spPr>
-      </p:pic>
-      <p:sp>
-        <p:nvSpPr>
-          <p:cNvPr id="10" name="TextBox 9">
-            <a:extLst>
-              <a:ext uri="{FF2B5EF4-FFF2-40B4-BE49-F238E27FC236}">
-                <a16:creationId xmlns:a16="http://schemas.microsoft.com/office/drawing/2014/main" id="{A4F74F6D-5F80-4B8C-8545-3D7F38148624}"/>
-              </a:ext>
-            </a:extLst>
-          </p:cNvPr>
-          <p:cNvSpPr txBox="1"/>
-          <p:nvPr/>
-        </p:nvSpPr>
-        <p:spPr>
-          <a:xfrm>
-            <a:off x="5041126" y="2544417"/>
-            <a:ext cx="6599583" cy="3139321"/>
-          </a:xfrm>
-          <a:prstGeom prst="rect">
-            <a:avLst/>
-          </a:prstGeom>
-          <a:noFill/>
-        </p:spPr>
-        <p:txBody>
-          <a:bodyPr wrap="square" rtlCol="0">
-            <a:spAutoFit/>
-          </a:bodyPr>
-          <a:lstStyle/>
-          <a:p>
-            <a:r>
-              <a:rPr lang="ko-KR" altLang="en-US" dirty="0"/>
-              <a:t>암호문</a:t>
-            </a:r>
-            <a:endParaRPr lang="en-US" altLang="ko-KR" dirty="0"/>
-          </a:p>
-          <a:p>
-            <a:endParaRPr lang="en-US" altLang="ko-KR" dirty="0"/>
-          </a:p>
-          <a:p>
-            <a:r>
-              <a:rPr lang="en-US" altLang="ko-KR" dirty="0"/>
-              <a:t>-&gt; </a:t>
-            </a:r>
-            <a:r>
-              <a:rPr lang="ko-KR" altLang="en-US" dirty="0"/>
-              <a:t>암호 패드의 위치 변경 </a:t>
-            </a:r>
-            <a:r>
-              <a:rPr lang="en-US" altLang="ko-KR" dirty="0"/>
-              <a:t>: </a:t>
-            </a:r>
-            <a:r>
-              <a:rPr lang="ko-KR" altLang="en-US" dirty="0"/>
-              <a:t>가정부 방</a:t>
-            </a:r>
-            <a:endParaRPr lang="en-US" altLang="ko-KR" dirty="0"/>
-          </a:p>
-          <a:p>
-            <a:r>
-              <a:rPr lang="en-US" altLang="ko-KR" dirty="0"/>
-              <a:t>-&gt; </a:t>
-            </a:r>
-            <a:r>
-              <a:rPr lang="ko-KR" altLang="en-US" dirty="0"/>
-              <a:t>가정부가 취미로 퍼즐을 풀었다는 설정</a:t>
-            </a:r>
-            <a:endParaRPr lang="en-US" altLang="ko-KR" dirty="0"/>
-          </a:p>
-          <a:p>
-            <a:r>
-              <a:rPr lang="en-US" altLang="ko-KR" dirty="0"/>
-              <a:t>-&gt; </a:t>
-            </a:r>
-            <a:r>
-              <a:rPr lang="ko-KR" altLang="en-US" dirty="0"/>
-              <a:t>가정부 방에 퍼즐풀이 책 추가 </a:t>
-            </a:r>
-            <a:r>
-              <a:rPr lang="en-US" altLang="ko-KR" dirty="0"/>
-              <a:t>(</a:t>
-            </a:r>
-            <a:r>
-              <a:rPr lang="ko-KR" altLang="en-US" dirty="0"/>
-              <a:t>기존 요리책에서 색만 변화</a:t>
-            </a:r>
-            <a:r>
-              <a:rPr lang="en-US" altLang="ko-KR" dirty="0"/>
-              <a:t>)</a:t>
-            </a:r>
-          </a:p>
-          <a:p>
-            <a:endParaRPr lang="en-US" altLang="ko-KR" dirty="0"/>
-          </a:p>
-          <a:p>
-            <a:r>
-              <a:rPr lang="ko-KR" altLang="en-US" dirty="0"/>
-              <a:t>사유 </a:t>
-            </a:r>
-            <a:r>
-              <a:rPr lang="en-US" altLang="ko-KR" dirty="0"/>
-              <a:t>: </a:t>
-            </a:r>
-            <a:r>
-              <a:rPr lang="ko-KR" altLang="en-US" dirty="0"/>
-              <a:t>일을 하는 서재의 책상에 퍼즐과 일기장 두 물건만 놓여 있는 것은 부자연스러움</a:t>
-            </a:r>
-            <a:r>
-              <a:rPr lang="en-US" altLang="ko-KR" dirty="0"/>
-              <a:t>. </a:t>
-            </a:r>
-          </a:p>
-          <a:p>
-            <a:endParaRPr lang="en-US" altLang="ko-KR" dirty="0"/>
-          </a:p>
-          <a:p>
-            <a:r>
-              <a:rPr lang="en-US" altLang="ko-KR" dirty="0"/>
-              <a:t>-&gt; </a:t>
-            </a:r>
-            <a:r>
-              <a:rPr lang="ko-KR" altLang="en-US" dirty="0"/>
-              <a:t>서재의 책상에서 저택 주인이 어떠한 직업을 가졌는지 보여주기 위함</a:t>
-            </a:r>
-            <a:r>
-              <a:rPr lang="en-US" altLang="ko-KR" dirty="0"/>
-              <a:t>.</a:t>
-            </a:r>
-          </a:p>
-        </p:txBody>
-      </p:sp>
-    </p:spTree>
-    <p:extLst>
-      <p:ext uri="{BB962C8B-B14F-4D97-AF65-F5344CB8AC3E}">
-        <p14:creationId xmlns:p14="http://schemas.microsoft.com/office/powerpoint/2010/main" val="3628337041"/>
-      </p:ext>
-    </p:extLst>
-  </p:cSld>
-  <p:clrMapOvr>
-    <a:masterClrMapping/>
-  </p:clrMapOvr>
-</p:sld>
-</file>
-
-<file path=ppt/slides/slide18.xml><?xml version="1.0" encoding="utf-8"?>
+<file path=ppt/slides/slide16.xml><?xml version="1.0" encoding="utf-8"?>
 <p:sld xmlns:a="http://schemas.openxmlformats.org/drawingml/2006/main" xmlns:r="http://schemas.openxmlformats.org/officeDocument/2006/relationships" xmlns:p="http://schemas.openxmlformats.org/presentationml/2006/main">
   <p:cSld>
     <p:spTree>
